--- a/docs/slides/Molinario_Thesis_Defense.pptx
+++ b/docs/slides/Molinario_Thesis_Defense.pptx
@@ -4,6 +4,9 @@
   <p:sldMasterIdLst>
     <p:sldMasterId id="2147483648" r:id="rId1"/>
   </p:sldMasterIdLst>
+  <p:notesMasterIdLst>
+    <p:notesMasterId r:id="rId20"/>
+  </p:notesMasterIdLst>
   <p:sldIdLst>
     <p:sldId id="256" r:id="rId2"/>
     <p:sldId id="257" r:id="rId3"/>
@@ -24,10 +27,7 @@
     <p:sldId id="272" r:id="rId18"/>
     <p:sldId id="273" r:id="rId19"/>
   </p:sldIdLst>
-  <p:notesMasterIdLst>
-    <p:notesMasterId r:id="rId20"/>
-  </p:notesMasterIdLst>
-  <p:sldSz cx="9144000" cy="5143500"/>
+  <p:sldSz cx="9144000" cy="5143500" type="screen16x9"/>
   <p:notesSz cx="5143500" cy="9144000"/>
   <p:defaultTextStyle>
     <a:lvl1pPr marL="0" algn="l" defTabSz="914400" rtl="0" eaLnBrk="1" latinLnBrk="0" hangingPunct="1">
@@ -121,6 +121,11 @@
       </a:defRPr>
     </a:lvl9pPr>
   </p:defaultTextStyle>
+  <p:extLst>
+    <p:ext uri="{EFAFB233-063F-42B5-8137-9DF3F51BA10A}">
+      <p15:sldGuideLst xmlns:p15="http://schemas.microsoft.com/office/powerpoint/2012/main"/>
+    </p:ext>
+  </p:extLst>
 </p:presentation>
 </file>
 
@@ -146,234 +151,10 @@
           <a:chExt cx="0" cy="0"/>
         </a:xfrm>
       </p:grpSpPr>
-      <p:sp>
-        <p:nvSpPr>
-          <p:cNvPr id="2" name="Header Placeholder 1"/>
-          <p:cNvSpPr>
-            <a:spLocks noGrp="1"/>
-          </p:cNvSpPr>
-          <p:nvPr>
-            <p:ph type="hdr" sz="quarter"/>
-          </p:nvPr>
-        </p:nvSpPr>
-        <p:spPr>
-          <a:xfrm>
-            <a:off x="0" y="0"/>
-            <a:ext cx="2971800" cy="458788"/>
-          </a:xfrm>
-          <a:prstGeom prst="rect">
-            <a:avLst/>
-          </a:prstGeom>
-        </p:spPr>
-        <p:txBody>
-          <a:bodyPr vert="horz" lIns="91440" tIns="45720" rIns="91440" bIns="45720" rtlCol="0"/>
-          <a:lstStyle>
-            <a:lvl1pPr algn="l">
-              <a:defRPr sz="1200"/>
-            </a:lvl1pPr>
-          </a:lstStyle>
-          <a:p>
-            <a:endParaRPr lang="en-US"/>
-          </a:p>
-        </p:txBody>
-      </p:sp>
-      <p:sp>
-        <p:nvSpPr>
-          <p:cNvPr id="3" name="Date Placeholder 2"/>
-          <p:cNvSpPr>
-            <a:spLocks noGrp="1"/>
-          </p:cNvSpPr>
-          <p:nvPr>
-            <p:ph type="dt" idx="1"/>
-          </p:nvPr>
-        </p:nvSpPr>
-        <p:spPr>
-          <a:xfrm>
-            <a:off x="3884613" y="0"/>
-            <a:ext cx="2971800" cy="458788"/>
-          </a:xfrm>
-          <a:prstGeom prst="rect">
-            <a:avLst/>
-          </a:prstGeom>
-        </p:spPr>
-        <p:txBody>
-          <a:bodyPr vert="horz" lIns="91440" tIns="45720" rIns="91440" bIns="45720" rtlCol="0"/>
-          <a:lstStyle>
-            <a:lvl1pPr algn="r">
-              <a:defRPr sz="1200"/>
-            </a:lvl1pPr>
-          </a:lstStyle>
-          <a:p>
-            <a:fld id="{5282F153-3F37-0F45-9E97-73ACFA13230C}" type="datetimeFigureOut">
-              <a:rPr lang="en-US"/>
-              <a:t>7/23/19</a:t>
-            </a:fld>
-            <a:endParaRPr lang="en-US"/>
-          </a:p>
-        </p:txBody>
-      </p:sp>
-      <p:sp>
-        <p:nvSpPr>
-          <p:cNvPr id="4" name="Slide Image Placeholder 3"/>
-          <p:cNvSpPr>
-            <a:spLocks noGrp="1" noRot="1" noChangeAspect="1"/>
-          </p:cNvSpPr>
-          <p:nvPr>
-            <p:ph type="sldImg" idx="2"/>
-          </p:nvPr>
-        </p:nvSpPr>
-        <p:spPr>
-          <a:xfrm>
-            <a:off x="685800" y="1143000"/>
-            <a:ext cx="5486400" cy="3086100"/>
-          </a:xfrm>
-          <a:prstGeom prst="rect">
-            <a:avLst/>
-          </a:prstGeom>
-          <a:noFill/>
-          <a:ln w="12700">
-            <a:solidFill>
-              <a:prstClr val="black"/>
-            </a:solidFill>
-          </a:ln>
-        </p:spPr>
-        <p:txBody>
-          <a:bodyPr vert="horz" lIns="91440" tIns="45720" rIns="91440" bIns="45720" rtlCol="0" anchor="ctr"/>
-          <a:lstStyle/>
-          <a:p>
-            <a:endParaRPr lang="en-US"/>
-          </a:p>
-        </p:txBody>
-      </p:sp>
-      <p:sp>
-        <p:nvSpPr>
-          <p:cNvPr id="5" name="Notes Placeholder 4"/>
-          <p:cNvSpPr>
-            <a:spLocks noGrp="1"/>
-          </p:cNvSpPr>
-          <p:nvPr>
-            <p:ph type="body" sz="quarter" idx="3"/>
-          </p:nvPr>
-        </p:nvSpPr>
-        <p:spPr>
-          <a:xfrm>
-            <a:off x="685800" y="4400550"/>
-            <a:ext cx="5486400" cy="3600450"/>
-          </a:xfrm>
-          <a:prstGeom prst="rect">
-            <a:avLst/>
-          </a:prstGeom>
-        </p:spPr>
-        <p:txBody>
-          <a:bodyPr vert="horz" lIns="91440" tIns="45720" rIns="91440" bIns="45720" rtlCol="0"/>
-          <a:lstStyle/>
-          <a:p>
-            <a:pPr lvl="0"/>
-            <a:r>
-              <a:rPr lang="en-US"/>
-              <a:t>Click to edit Master text styles</a:t>
-            </a:r>
-          </a:p>
-          <a:p>
-            <a:pPr lvl="1"/>
-            <a:r>
-              <a:rPr lang="en-US"/>
-              <a:t>Second level</a:t>
-            </a:r>
-          </a:p>
-          <a:p>
-            <a:pPr lvl="2"/>
-            <a:r>
-              <a:rPr lang="en-US"/>
-              <a:t>Third level</a:t>
-            </a:r>
-          </a:p>
-          <a:p>
-            <a:pPr lvl="3"/>
-            <a:r>
-              <a:rPr lang="en-US"/>
-              <a:t>Fourth level</a:t>
-            </a:r>
-          </a:p>
-          <a:p>
-            <a:pPr lvl="4"/>
-            <a:r>
-              <a:rPr lang="en-US"/>
-              <a:t>Fifth level</a:t>
-            </a:r>
-          </a:p>
-        </p:txBody>
-      </p:sp>
-      <p:sp>
-        <p:nvSpPr>
-          <p:cNvPr id="6" name="Footer Placeholder 5"/>
-          <p:cNvSpPr>
-            <a:spLocks noGrp="1"/>
-          </p:cNvSpPr>
-          <p:nvPr>
-            <p:ph type="ftr" sz="quarter" idx="4"/>
-          </p:nvPr>
-        </p:nvSpPr>
-        <p:spPr>
-          <a:xfrm>
-            <a:off x="0" y="8685213"/>
-            <a:ext cx="2971800" cy="458787"/>
-          </a:xfrm>
-          <a:prstGeom prst="rect">
-            <a:avLst/>
-          </a:prstGeom>
-        </p:spPr>
-        <p:txBody>
-          <a:bodyPr vert="horz" lIns="91440" tIns="45720" rIns="91440" bIns="45720" rtlCol="0" anchor="b"/>
-          <a:lstStyle>
-            <a:lvl1pPr algn="l">
-              <a:defRPr sz="1200"/>
-            </a:lvl1pPr>
-          </a:lstStyle>
-          <a:p>
-            <a:endParaRPr lang="en-US"/>
-          </a:p>
-        </p:txBody>
-      </p:sp>
-      <p:sp>
-        <p:nvSpPr>
-          <p:cNvPr id="7" name="Slide Number Placeholder 6"/>
-          <p:cNvSpPr>
-            <a:spLocks noGrp="1"/>
-          </p:cNvSpPr>
-          <p:nvPr>
-            <p:ph type="sldNum" sz="quarter" idx="5"/>
-          </p:nvPr>
-        </p:nvSpPr>
-        <p:spPr>
-          <a:xfrm>
-            <a:off x="3884613" y="8685213"/>
-            <a:ext cx="2971800" cy="458787"/>
-          </a:xfrm>
-          <a:prstGeom prst="rect">
-            <a:avLst/>
-          </a:prstGeom>
-        </p:spPr>
-        <p:txBody>
-          <a:bodyPr vert="horz" lIns="91440" tIns="45720" rIns="91440" bIns="45720" rtlCol="0" anchor="b"/>
-          <a:lstStyle>
-            <a:lvl1pPr algn="r">
-              <a:defRPr sz="1200"/>
-            </a:lvl1pPr>
-          </a:lstStyle>
-          <a:p>
-            <a:fld id="{CE5E9CC1-C706-0F49-92D6-E571CC5EEA8F}" type="slidenum">
-              <a:rPr lang="en-US"/>
-              <a:t>‹#›</a:t>
-            </a:fld>
-            <a:endParaRPr lang="en-US"/>
-          </a:p>
-        </p:txBody>
-      </p:sp>
     </p:spTree>
     <p:extLst>
       <p:ext uri="{BB962C8B-B14F-4D97-AF65-F5344CB8AC3E}">
-        <p14:creationId xmlns:p14="http://schemas.microsoft.com/office/powerpoint/2010/main" val="1024086991"/>
+        <p14:creationId xmlns:p14="http://schemas.microsoft.com/office/powerpoint/2010/main" val="769032914"/>
       </p:ext>
     </p:extLst>
   </p:cSld>
@@ -521,7 +302,6 @@
               <a:rPr lang="en-US" dirty="0"/>
               <a:t>Good morning/afternoon. This thesis evaluates whether AI-assisted forensic image classification remains operationally reliable when visual evidence is manipulated. I will present a controlled evaluation of both proxy models and commercial black-box forensic tools under adversarial and anti-forensic conditions. The goal is operational robustness, not simply optimizing an attack in isolation.</a:t>
             </a:r>
-            <a:endParaRPr lang="en-US" dirty="0"/>
           </a:p>
         </p:txBody>
       </p:sp>
@@ -609,7 +389,6 @@
               <a:rPr lang="en-US" dirty="0"/>
               <a:t>EfficientNet-B0 is used as the primary proxy target for adversarial perturbations, while ResNet18 and the CLIP-based classifier provide complementary model behaviors and act as a cross-check against the primary target.</a:t>
             </a:r>
-            <a:endParaRPr lang="en-US" dirty="0"/>
           </a:p>
         </p:txBody>
       </p:sp>
@@ -697,7 +476,6 @@
               <a:rPr lang="en-US" dirty="0"/>
               <a:t>Black-box evaluation is realistic: forensic practitioners typically cannot inspect model internals. This is why traceability and conservative label mapping are essential — every output is preserved, including cases that cannot be confidently mapped, rather than being forced into a positive or negative outcome.</a:t>
             </a:r>
-            <a:endParaRPr lang="en-US" dirty="0"/>
           </a:p>
         </p:txBody>
       </p:sp>
@@ -785,7 +563,6 @@
               <a:rPr lang="en-US" dirty="0"/>
               <a:t>This slide translates technical metrics into an operational interpretation. This matters for forensic use because AI-based tools support analysts, but should not be treated as infallible evidence evaluators — the risk framing is what makes the results actionable for practitioners.</a:t>
             </a:r>
-            <a:endParaRPr lang="en-US" dirty="0"/>
           </a:p>
         </p:txBody>
       </p:sp>
@@ -873,7 +650,6 @@
               <a:rPr lang="en-US" dirty="0"/>
               <a:t>These findings use cautious phrasing deliberately. They are not universal conclusions but evidence observed under this controlled experimental setting, with this dataset, these tool versions, and this perturbation design.</a:t>
             </a:r>
-            <a:endParaRPr lang="en-US" dirty="0"/>
           </a:p>
         </p:txBody>
       </p:sp>
@@ -961,7 +737,6 @@
               <a:rPr lang="en-US" dirty="0"/>
               <a:t>These limitations are expected in a forensic black-box evaluation and are not a weakness unique to this thesis. They motivate the need for periodic re-testing as tool versions change, and for transparent validation protocols across the field.</a:t>
             </a:r>
-            <a:endParaRPr lang="en-US" dirty="0"/>
           </a:p>
         </p:txBody>
       </p:sp>
@@ -1049,7 +824,6 @@
               <a:rPr lang="en-US" dirty="0"/>
               <a:t>To close: AI can support forensic analysts, but its outputs must be validated, traceable, and interpreted under known limitations. Thank you — I am happy to take questions.</a:t>
             </a:r>
-            <a:endParaRPr lang="en-US" dirty="0"/>
           </a:p>
         </p:txBody>
       </p:sp>
@@ -1137,7 +911,6 @@
               <a:rPr lang="en-US" dirty="0"/>
               <a:t>Reference slide with formal metric definitions, for use if asked during Q&amp;A.</a:t>
             </a:r>
-            <a:endParaRPr lang="en-US" dirty="0"/>
           </a:p>
         </p:txBody>
       </p:sp>
@@ -1225,7 +998,6 @@
               <a:rPr lang="en-US" dirty="0"/>
               <a:t>Explain the rationale for keeping the OOD branch unperturbed if asked in Q&amp;A.</a:t>
             </a:r>
-            <a:endParaRPr lang="en-US" dirty="0"/>
           </a:p>
         </p:txBody>
       </p:sp>
@@ -1313,7 +1085,6 @@
               <a:rPr lang="en-US" dirty="0"/>
               <a:t>Use if asked why the thesis does not rely solely on commercial tools for the adversarial analysis.</a:t>
             </a:r>
-            <a:endParaRPr lang="en-US" dirty="0"/>
           </a:p>
         </p:txBody>
       </p:sp>
@@ -1401,7 +1172,6 @@
               <a:rPr lang="en-US" dirty="0"/>
               <a:t>Image classification is useful in forensic triage because analysts cannot manually inspect every file immediately. However, if the classification is wrong, relevant evidence may be missed, or irrelevant material may be prioritized ahead of what matters. This motivates studying robustness, not just clean accuracy.</a:t>
             </a:r>
-            <a:endParaRPr lang="en-US" dirty="0"/>
           </a:p>
         </p:txBody>
       </p:sp>
@@ -1489,7 +1259,6 @@
               <a:rPr lang="en-US" dirty="0"/>
               <a:t>The problem is not only whether a classifier achieves high clean accuracy. It is whether the tool remains dependable when the input distribution changes, or when images are deliberately or incidentally manipulated. Four stressor categories frame the thesis: adversarial perturbations, anti-forensic transformations, out-of-distribution inputs, and the operational constraint of working with black-box commercial tools.</a:t>
             </a:r>
-            <a:endParaRPr lang="en-US" dirty="0"/>
           </a:p>
         </p:txBody>
       </p:sp>
@@ -1577,7 +1346,6 @@
               <a:rPr lang="en-US" dirty="0"/>
               <a:t>The scientific contribution is the framework itself: it allows heterogeneous systems, from inspectable proxy models to opaque commercial tools, to be evaluated under the same protocol while preserving traceability from raw output to risk interpretation.</a:t>
             </a:r>
-            <a:endParaRPr lang="en-US" dirty="0"/>
           </a:p>
         </p:txBody>
       </p:sp>
@@ -1665,7 +1433,6 @@
               <a:rPr lang="en-US" dirty="0"/>
               <a:t>Proxy models allow controlled adversarial testing and full metric extraction, since we own the weights and gradients. Commercial tools represent realistic forensic environments but expose only their outputs, with limited internal visibility. The two tracks are complementary, not competing.</a:t>
             </a:r>
-            <a:endParaRPr lang="en-US" dirty="0"/>
           </a:p>
         </p:txBody>
       </p:sp>
@@ -1753,7 +1520,6 @@
               <a:rPr lang="en-US" dirty="0"/>
               <a:t>The dataset is frozen at 1,500 images and never changes across experiments. It is important to stress that the OOD branch is never attacked — it exists to understand how tools behave when they encounter images outside the binary weapon / non-weapon task, not to test perturbation robustness.</a:t>
             </a:r>
-            <a:endParaRPr lang="en-US" dirty="0"/>
           </a:p>
         </p:txBody>
       </p:sp>
@@ -1841,7 +1607,6 @@
               <a:rPr lang="en-US" dirty="0"/>
               <a:t>Output normalization is critical. Commercial tools use different label vocabularies and confidence formats, so their raw outputs must be mapped conservatively — into true positive, false positive, false negative, true negative, or unknown — before any comparison with proxy models can be made.</a:t>
             </a:r>
-            <a:endParaRPr lang="en-US" dirty="0"/>
           </a:p>
         </p:txBody>
       </p:sp>
@@ -1929,7 +1694,6 @@
               <a:rPr lang="en-US" dirty="0"/>
               <a:t>There is a clear distinction between the two families: adversarial attacks are model-oriented perturbations computed against a target model, while anti-forensic transformations are practical, model-agnostic manipulations that may occur during real evidence handling or deliberate evasion attempts.</a:t>
             </a:r>
-            <a:endParaRPr lang="en-US" dirty="0"/>
           </a:p>
         </p:txBody>
       </p:sp>
@@ -2017,7 +1781,6 @@
               <a:rPr lang="en-US" dirty="0"/>
               <a:t>In forensic triage, false negatives on relevant images and high-confidence errors matter more than a single aggregate accuracy figure, because they directly affect what an analyst sees first and how much trust is placed in the automated label.</a:t>
             </a:r>
-            <a:endParaRPr lang="en-US" dirty="0"/>
           </a:p>
         </p:txBody>
       </p:sp>
@@ -2090,6 +1853,11 @@
 <file path=ppt/slideMasters/slideMaster1.xml><?xml version="1.0" encoding="utf-8"?>
 <p:sldMaster xmlns:a="http://schemas.openxmlformats.org/drawingml/2006/main" xmlns:r="http://schemas.openxmlformats.org/officeDocument/2006/relationships" xmlns:p="http://schemas.openxmlformats.org/presentationml/2006/main">
   <p:cSld>
+    <p:bg>
+      <p:bgRef idx="1001">
+        <a:schemeClr val="bg1"/>
+      </p:bgRef>
+    </p:bg>
     <p:spTree>
       <p:nvGrpSpPr>
         <p:cNvPr id="1" name=""/>
@@ -2372,6 +2140,7 @@
         <a:solidFill>
           <a:srgbClr val="0A1F3D"/>
         </a:solidFill>
+        <a:effectLst/>
       </p:bgPr>
     </p:bg>
     <p:spTree>
@@ -2407,6 +2176,13 @@
           </a:solidFill>
           <a:ln/>
         </p:spPr>
+        <p:txBody>
+          <a:bodyPr/>
+          <a:lstStyle/>
+          <a:p>
+            <a:endParaRPr lang="it-IT"/>
+          </a:p>
+        </p:txBody>
       </p:sp>
       <p:sp>
         <p:nvSpPr>
@@ -2427,334 +2203,395 @@
           </a:solidFill>
           <a:ln/>
         </p:spPr>
+        <p:txBody>
+          <a:bodyPr/>
+          <a:lstStyle/>
+          <a:p>
+            <a:endParaRPr lang="it-IT"/>
+          </a:p>
+        </p:txBody>
+      </p:sp>
+      <p:sp>
+        <p:nvSpPr>
+          <p:cNvPr id="6" name="Text 2"/>
+          <p:cNvSpPr/>
+          <p:nvPr/>
+        </p:nvSpPr>
+        <p:spPr>
+          <a:xfrm>
+            <a:off x="4981354" y="4701505"/>
+            <a:ext cx="3578752" cy="320040"/>
+          </a:xfrm>
+          <a:prstGeom prst="rect">
+            <a:avLst/>
+          </a:prstGeom>
+          <a:noFill/>
+          <a:ln/>
+        </p:spPr>
+        <p:txBody>
+          <a:bodyPr wrap="square" lIns="0" tIns="0" rIns="0" bIns="0" rtlCol="0" anchor="ctr"/>
+          <a:lstStyle/>
+          <a:p>
+            <a:pPr marL="0" indent="0">
+              <a:buNone/>
+            </a:pPr>
+            <a:r>
+              <a:rPr lang="en-US" sz="1300" b="1" kern="0" spc="220" dirty="0">
+                <a:solidFill>
+                  <a:srgbClr val="0E8A8A"/>
+                </a:solidFill>
+                <a:latin typeface="Calibri" pitchFamily="34" charset="0"/>
+                <a:ea typeface="Calibri" pitchFamily="34" charset="-122"/>
+                <a:cs typeface="Calibri" pitchFamily="34" charset="-120"/>
+              </a:rPr>
+              <a:t>MASTER'S THESIS DEFENSE</a:t>
+            </a:r>
+            <a:endParaRPr lang="en-US" sz="1300" dirty="0"/>
+          </a:p>
+        </p:txBody>
+      </p:sp>
+      <p:sp>
+        <p:nvSpPr>
+          <p:cNvPr id="7" name="Text 3"/>
+          <p:cNvSpPr/>
+          <p:nvPr/>
+        </p:nvSpPr>
+        <p:spPr>
+          <a:xfrm>
+            <a:off x="685800" y="1575001"/>
+            <a:ext cx="7772400" cy="1463040"/>
+          </a:xfrm>
+          <a:prstGeom prst="rect">
+            <a:avLst/>
+          </a:prstGeom>
+          <a:noFill/>
+          <a:ln/>
+        </p:spPr>
+        <p:txBody>
+          <a:bodyPr wrap="square" lIns="0" tIns="0" rIns="0" bIns="0" rtlCol="0" anchor="ctr"/>
+          <a:lstStyle/>
+          <a:p>
+            <a:pPr marL="0" indent="0" algn="ctr">
+              <a:lnSpc>
+                <a:spcPct val="112000"/>
+              </a:lnSpc>
+              <a:buNone/>
+            </a:pPr>
+            <a:r>
+              <a:rPr lang="en-US" sz="3000" b="1" dirty="0">
+                <a:solidFill>
+                  <a:srgbClr val="FFFFFF"/>
+                </a:solidFill>
+                <a:latin typeface="Cambria" pitchFamily="34" charset="0"/>
+                <a:ea typeface="Cambria" pitchFamily="34" charset="-122"/>
+                <a:cs typeface="Cambria" pitchFamily="34" charset="-120"/>
+              </a:rPr>
+              <a:t>Evaluating the Robustness of AI-Based Forensic Tools</a:t>
+            </a:r>
+            <a:endParaRPr lang="en-US" sz="3000" dirty="0"/>
+          </a:p>
+          <a:p>
+            <a:pPr marL="0" indent="0">
+              <a:lnSpc>
+                <a:spcPct val="112000"/>
+              </a:lnSpc>
+              <a:buNone/>
+            </a:pPr>
+            <a:r>
+              <a:rPr lang="en-US" sz="3000" b="1" dirty="0">
+                <a:solidFill>
+                  <a:srgbClr val="FFFFFF"/>
+                </a:solidFill>
+                <a:latin typeface="Cambria" pitchFamily="34" charset="0"/>
+                <a:ea typeface="Cambria" pitchFamily="34" charset="-122"/>
+                <a:cs typeface="Cambria" pitchFamily="34" charset="-120"/>
+              </a:rPr>
+              <a:t>under Adversarial and Anti-Forensic Attacks</a:t>
+            </a:r>
+            <a:endParaRPr lang="en-US" sz="3000" dirty="0"/>
+          </a:p>
+        </p:txBody>
+      </p:sp>
+      <p:sp>
+        <p:nvSpPr>
+          <p:cNvPr id="8" name="Shape 4"/>
+          <p:cNvSpPr/>
+          <p:nvPr/>
+        </p:nvSpPr>
+        <p:spPr>
+          <a:xfrm>
+            <a:off x="722376" y="3310128"/>
+            <a:ext cx="54864" cy="54864"/>
+          </a:xfrm>
+          <a:prstGeom prst="ellipse">
+            <a:avLst/>
+          </a:prstGeom>
+          <a:solidFill>
+            <a:srgbClr val="0E8A8A"/>
+          </a:solidFill>
+          <a:ln/>
+        </p:spPr>
+        <p:txBody>
+          <a:bodyPr/>
+          <a:lstStyle/>
+          <a:p>
+            <a:endParaRPr lang="it-IT"/>
+          </a:p>
+        </p:txBody>
+      </p:sp>
+      <p:sp>
+        <p:nvSpPr>
+          <p:cNvPr id="9" name="Text 5"/>
+          <p:cNvSpPr/>
+          <p:nvPr/>
+        </p:nvSpPr>
+        <p:spPr>
+          <a:xfrm>
+            <a:off x="-173310" y="441570"/>
+            <a:ext cx="7680960" cy="685800"/>
+          </a:xfrm>
+          <a:prstGeom prst="rect">
+            <a:avLst/>
+          </a:prstGeom>
+          <a:noFill/>
+          <a:ln/>
+        </p:spPr>
+        <p:txBody>
+          <a:bodyPr wrap="square" lIns="0" tIns="0" rIns="0" bIns="0" rtlCol="0" anchor="ctr"/>
+          <a:lstStyle/>
+          <a:p>
+            <a:pPr marL="0" indent="0">
+              <a:spcAft>
+                <a:spcPts val="400"/>
+              </a:spcAft>
+              <a:buNone/>
+            </a:pPr>
+            <a:r>
+              <a:rPr lang="en-US" sz="1400" dirty="0">
+                <a:solidFill>
+                  <a:schemeClr val="bg1"/>
+                </a:solidFill>
+                <a:latin typeface="Calibri" pitchFamily="34" charset="0"/>
+                <a:ea typeface="Calibri" pitchFamily="34" charset="-122"/>
+                <a:cs typeface="Calibri" pitchFamily="34" charset="-120"/>
+              </a:rPr>
+              <a:t>Master's Degree in Computer Engineering, Cybersecurity and Artificial Intelligence</a:t>
+            </a:r>
+            <a:endParaRPr lang="en-US" sz="1400" dirty="0">
+              <a:solidFill>
+                <a:schemeClr val="bg1"/>
+              </a:solidFill>
+            </a:endParaRPr>
+          </a:p>
+          <a:p>
+            <a:r>
+              <a:rPr lang="en-US" sz="1400" dirty="0" err="1">
+                <a:solidFill>
+                  <a:schemeClr val="bg1"/>
+                </a:solidFill>
+                <a:latin typeface="Calibri" pitchFamily="34" charset="0"/>
+                <a:ea typeface="Calibri" pitchFamily="34" charset="-122"/>
+                <a:cs typeface="Calibri" pitchFamily="34" charset="-120"/>
+              </a:rPr>
+              <a:t>UniversitY</a:t>
+            </a:r>
+            <a:endParaRPr lang="en-US" sz="1400" dirty="0">
+              <a:solidFill>
+                <a:schemeClr val="bg1"/>
+              </a:solidFill>
+              <a:latin typeface="Calibri" pitchFamily="34" charset="0"/>
+              <a:ea typeface="Calibri" pitchFamily="34" charset="-122"/>
+              <a:cs typeface="Calibri" pitchFamily="34" charset="-120"/>
+            </a:endParaRPr>
+          </a:p>
+          <a:p>
+            <a:r>
+              <a:rPr lang="it-IT" dirty="0">
+                <a:solidFill>
+                  <a:schemeClr val="bg1"/>
+                </a:solidFill>
+              </a:rPr>
+              <a:t>University of Cagliari</a:t>
+            </a:r>
+          </a:p>
+          <a:p>
+            <a:r>
+              <a:rPr lang="it-IT" b="1" dirty="0">
+                <a:solidFill>
+                  <a:schemeClr val="bg1"/>
+                </a:solidFill>
+              </a:rPr>
+              <a:t>Department of Engineering</a:t>
+            </a:r>
+          </a:p>
+          <a:p>
+            <a:r>
+              <a:rPr lang="en-US" dirty="0">
+                <a:solidFill>
+                  <a:schemeClr val="bg1"/>
+                </a:solidFill>
+              </a:rPr>
+              <a:t>Master’s Degree in “Computer Engineering,</a:t>
+            </a:r>
+          </a:p>
+          <a:p>
+            <a:r>
+              <a:rPr lang="it-IT" dirty="0">
+                <a:solidFill>
+                  <a:schemeClr val="bg1"/>
+                </a:solidFill>
+              </a:rPr>
+              <a:t>Cybersecurity and </a:t>
+            </a:r>
+            <a:r>
+              <a:rPr lang="it-IT" dirty="0" err="1">
+                <a:solidFill>
+                  <a:schemeClr val="bg1"/>
+                </a:solidFill>
+              </a:rPr>
+              <a:t>Artificial</a:t>
+            </a:r>
+            <a:r>
+              <a:rPr lang="it-IT" dirty="0">
+                <a:solidFill>
+                  <a:schemeClr val="bg1"/>
+                </a:solidFill>
+              </a:rPr>
+              <a:t> Intelligence”</a:t>
+            </a:r>
+            <a:r>
+              <a:rPr lang="en-US" sz="1400" dirty="0">
+                <a:solidFill>
+                  <a:schemeClr val="bg1"/>
+                </a:solidFill>
+                <a:latin typeface="Calibri" pitchFamily="34" charset="0"/>
+                <a:ea typeface="Calibri" pitchFamily="34" charset="-122"/>
+                <a:cs typeface="Calibri" pitchFamily="34" charset="-120"/>
+              </a:rPr>
+              <a:t>y of Cagliari</a:t>
+            </a:r>
+            <a:endParaRPr lang="en-US" sz="1400" dirty="0">
+              <a:solidFill>
+                <a:schemeClr val="bg1"/>
+              </a:solidFill>
+            </a:endParaRPr>
+          </a:p>
+        </p:txBody>
+      </p:sp>
+      <p:sp>
+        <p:nvSpPr>
+          <p:cNvPr id="10" name="Text 6"/>
+          <p:cNvSpPr/>
+          <p:nvPr/>
+        </p:nvSpPr>
+        <p:spPr>
+          <a:xfrm>
+            <a:off x="388620" y="4367642"/>
+            <a:ext cx="7680960" cy="640080"/>
+          </a:xfrm>
+          <a:prstGeom prst="rect">
+            <a:avLst/>
+          </a:prstGeom>
+          <a:noFill/>
+          <a:ln/>
+        </p:spPr>
+        <p:txBody>
+          <a:bodyPr wrap="square" lIns="0" tIns="0" rIns="0" bIns="0" rtlCol="0" anchor="ctr"/>
+          <a:lstStyle/>
+          <a:p>
+            <a:pPr marL="0" indent="0">
+              <a:spcAft>
+                <a:spcPts val="300"/>
+              </a:spcAft>
+              <a:buNone/>
+            </a:pPr>
+            <a:r>
+              <a:rPr lang="en-US" sz="1400" dirty="0">
+                <a:solidFill>
+                  <a:srgbClr val="9FB1CC"/>
+                </a:solidFill>
+                <a:latin typeface="Calibri" pitchFamily="34" charset="0"/>
+                <a:ea typeface="Calibri" pitchFamily="34" charset="-122"/>
+                <a:cs typeface="Calibri" pitchFamily="34" charset="-120"/>
+              </a:rPr>
+              <a:t>Candidate: </a:t>
+            </a:r>
+            <a:r>
+              <a:rPr lang="en-US" sz="1400" b="1" dirty="0">
+                <a:solidFill>
+                  <a:srgbClr val="FFFFFF"/>
+                </a:solidFill>
+                <a:latin typeface="Calibri" pitchFamily="34" charset="0"/>
+                <a:ea typeface="Calibri" pitchFamily="34" charset="-122"/>
+                <a:cs typeface="Calibri" pitchFamily="34" charset="-120"/>
+              </a:rPr>
+              <a:t>Lello Molinario</a:t>
+            </a:r>
+            <a:endParaRPr lang="en-US" sz="1400" dirty="0"/>
+          </a:p>
+          <a:p>
+            <a:pPr marL="0" indent="0">
+              <a:spcAft>
+                <a:spcPts val="300"/>
+              </a:spcAft>
+              <a:buNone/>
+            </a:pPr>
+            <a:r>
+              <a:rPr lang="en-US" sz="1400" dirty="0">
+                <a:solidFill>
+                  <a:srgbClr val="9FB1CC"/>
+                </a:solidFill>
+                <a:latin typeface="Calibri" pitchFamily="34" charset="0"/>
+                <a:ea typeface="Calibri" pitchFamily="34" charset="-122"/>
+                <a:cs typeface="Calibri" pitchFamily="34" charset="-120"/>
+              </a:rPr>
+              <a:t>Supervisor: </a:t>
+            </a:r>
+            <a:r>
+              <a:rPr lang="en-US" sz="1400" b="1" dirty="0">
+                <a:solidFill>
+                  <a:srgbClr val="FFFFFF"/>
+                </a:solidFill>
+                <a:latin typeface="Calibri" pitchFamily="34" charset="0"/>
+                <a:ea typeface="Calibri" pitchFamily="34" charset="-122"/>
+                <a:cs typeface="Calibri" pitchFamily="34" charset="-120"/>
+              </a:rPr>
+              <a:t>Davide Maiorca</a:t>
+            </a:r>
+            <a:endParaRPr lang="en-US" sz="1400" dirty="0"/>
+          </a:p>
+        </p:txBody>
       </p:sp>
       <p:pic>
         <p:nvPicPr>
-          <p:cNvPr id="4" name="Image 0" descr="preencoded.png">    </p:cNvPr>
+          <p:cNvPr id="12" name="Picture 11" descr="A black and white logo&#10;&#10;Description automatically generated">
+            <a:extLst>
+              <a:ext uri="{FF2B5EF4-FFF2-40B4-BE49-F238E27FC236}">
+                <a16:creationId xmlns:a16="http://schemas.microsoft.com/office/drawing/2014/main" id="{E1799DCC-EFB2-57A2-5FF0-D01B7605240B}"/>
+              </a:ext>
+            </a:extLst>
+          </p:cNvPr>
           <p:cNvPicPr>
             <a:picLocks noChangeAspect="1"/>
           </p:cNvPicPr>
           <p:nvPr/>
         </p:nvPicPr>
         <p:blipFill>
-          <a:blip r:embed="rId1"/>
+          <a:blip r:embed="rId3"/>
           <a:stretch>
             <a:fillRect/>
           </a:stretch>
         </p:blipFill>
         <p:spPr>
           <a:xfrm>
-            <a:off x="685800" y="594360"/>
-            <a:ext cx="502920" cy="502920"/>
+            <a:off x="3979446" y="276126"/>
+            <a:ext cx="1185107" cy="1185107"/>
           </a:xfrm>
           <a:prstGeom prst="rect">
             <a:avLst/>
           </a:prstGeom>
         </p:spPr>
       </p:pic>
-      <p:pic>
-        <p:nvPicPr>
-          <p:cNvPr id="5" name="Image 1" descr="preencoded.png">    </p:cNvPr>
-          <p:cNvPicPr>
-            <a:picLocks noChangeAspect="1"/>
-          </p:cNvPicPr>
-          <p:nvPr/>
-        </p:nvPicPr>
-        <p:blipFill>
-          <a:blip r:embed="rId2"/>
-          <a:stretch>
-            <a:fillRect/>
-          </a:stretch>
-        </p:blipFill>
-        <p:spPr>
-          <a:xfrm>
-            <a:off x="7909560" y="594360"/>
-            <a:ext cx="502920" cy="502920"/>
-          </a:xfrm>
-          <a:prstGeom prst="rect">
-            <a:avLst/>
-          </a:prstGeom>
-        </p:spPr>
-      </p:pic>
-      <p:sp>
-        <p:nvSpPr>
-          <p:cNvPr id="6" name="Text 2"/>
-          <p:cNvSpPr/>
-          <p:nvPr/>
-        </p:nvSpPr>
-        <p:spPr>
-          <a:xfrm>
-            <a:off x="685800" y="1234440"/>
-            <a:ext cx="7772400" cy="320040"/>
-          </a:xfrm>
-          <a:prstGeom prst="rect">
-            <a:avLst/>
-          </a:prstGeom>
-          <a:noFill/>
-          <a:ln/>
-        </p:spPr>
-        <p:txBody>
-          <a:bodyPr wrap="square" lIns="0" tIns="0" rIns="0" bIns="0" rtlCol="0" anchor="ctr"/>
-          <a:lstStyle/>
-          <a:p>
-            <a:pPr indent="0" marL="0">
-              <a:buNone/>
-            </a:pPr>
-            <a:r>
-              <a:rPr lang="en-US" sz="1300" b="1" spc="220" kern="0" dirty="0">
-                <a:solidFill>
-                  <a:srgbClr val="0E8A8A"/>
-                </a:solidFill>
-                <a:latin typeface="Calibri" pitchFamily="34" charset="0"/>
-                <a:ea typeface="Calibri" pitchFamily="34" charset="-122"/>
-                <a:cs typeface="Calibri" pitchFamily="34" charset="-120"/>
-              </a:rPr>
-              <a:t>MASTER'S THESIS DEFENSE</a:t>
-            </a:r>
-            <a:endParaRPr lang="en-US" sz="1300" dirty="0"/>
-          </a:p>
-        </p:txBody>
-      </p:sp>
-      <p:sp>
-        <p:nvSpPr>
-          <p:cNvPr id="7" name="Text 3"/>
-          <p:cNvSpPr/>
-          <p:nvPr/>
-        </p:nvSpPr>
-        <p:spPr>
-          <a:xfrm>
-            <a:off x="685800" y="1600200"/>
-            <a:ext cx="7772400" cy="1463040"/>
-          </a:xfrm>
-          <a:prstGeom prst="rect">
-            <a:avLst/>
-          </a:prstGeom>
-          <a:noFill/>
-          <a:ln/>
-        </p:spPr>
-        <p:txBody>
-          <a:bodyPr wrap="square" lIns="0" tIns="0" rIns="0" bIns="0" rtlCol="0" anchor="ctr"/>
-          <a:lstStyle/>
-          <a:p>
-            <a:pPr indent="0" marL="0">
-              <a:lnSpc>
-                <a:spcPct val="112000"/>
-              </a:lnSpc>
-              <a:buNone/>
-            </a:pPr>
-            <a:r>
-              <a:rPr lang="en-US" sz="3000" b="1" dirty="0">
-                <a:solidFill>
-                  <a:srgbClr val="FFFFFF"/>
-                </a:solidFill>
-                <a:latin typeface="Cambria" pitchFamily="34" charset="0"/>
-                <a:ea typeface="Cambria" pitchFamily="34" charset="-122"/>
-                <a:cs typeface="Cambria" pitchFamily="34" charset="-120"/>
-              </a:rPr>
-              <a:t>Evaluating the Robustness of AI-Based Forensic Tools</a:t>
-            </a:r>
-            <a:endParaRPr lang="en-US" sz="3000" dirty="0"/>
-          </a:p>
-          <a:p>
-            <a:pPr indent="0" marL="0">
-              <a:lnSpc>
-                <a:spcPct val="112000"/>
-              </a:lnSpc>
-              <a:buNone/>
-            </a:pPr>
-            <a:r>
-              <a:rPr lang="en-US" sz="3000" b="1" dirty="0">
-                <a:solidFill>
-                  <a:srgbClr val="FFFFFF"/>
-                </a:solidFill>
-                <a:latin typeface="Cambria" pitchFamily="34" charset="0"/>
-                <a:ea typeface="Cambria" pitchFamily="34" charset="-122"/>
-                <a:cs typeface="Cambria" pitchFamily="34" charset="-120"/>
-              </a:rPr>
-              <a:t>under Adversarial and Anti-Forensic Attacks</a:t>
-            </a:r>
-            <a:endParaRPr lang="en-US" sz="3000" dirty="0"/>
-          </a:p>
-        </p:txBody>
-      </p:sp>
-      <p:sp>
-        <p:nvSpPr>
-          <p:cNvPr id="8" name="Shape 4"/>
-          <p:cNvSpPr/>
-          <p:nvPr/>
-        </p:nvSpPr>
-        <p:spPr>
-          <a:xfrm>
-            <a:off x="722376" y="3310128"/>
-            <a:ext cx="54864" cy="54864"/>
-          </a:xfrm>
-          <a:prstGeom prst="ellipse">
-            <a:avLst/>
-          </a:prstGeom>
-          <a:solidFill>
-            <a:srgbClr val="0E8A8A"/>
-          </a:solidFill>
-          <a:ln/>
-        </p:spPr>
-      </p:sp>
-      <p:sp>
-        <p:nvSpPr>
-          <p:cNvPr id="9" name="Text 5"/>
-          <p:cNvSpPr/>
-          <p:nvPr/>
-        </p:nvSpPr>
-        <p:spPr>
-          <a:xfrm>
-            <a:off x="685800" y="3246120"/>
-            <a:ext cx="7680960" cy="685800"/>
-          </a:xfrm>
-          <a:prstGeom prst="rect">
-            <a:avLst/>
-          </a:prstGeom>
-          <a:noFill/>
-          <a:ln/>
-        </p:spPr>
-        <p:txBody>
-          <a:bodyPr wrap="square" lIns="0" tIns="0" rIns="0" bIns="0" rtlCol="0" anchor="ctr"/>
-          <a:lstStyle/>
-          <a:p>
-            <a:pPr indent="0" marL="0">
-              <a:spcAft>
-                <a:spcPts val="400"/>
-              </a:spcAft>
-              <a:buNone/>
-            </a:pPr>
-            <a:r>
-              <a:rPr lang="en-US" sz="1400" dirty="0">
-                <a:solidFill>
-                  <a:srgbClr val="C7D3E6"/>
-                </a:solidFill>
-                <a:latin typeface="Calibri" pitchFamily="34" charset="0"/>
-                <a:ea typeface="Calibri" pitchFamily="34" charset="-122"/>
-                <a:cs typeface="Calibri" pitchFamily="34" charset="-120"/>
-              </a:rPr>
-              <a:t>Master's Degree in Computer Engineering, Cybersecurity and Artificial Intelligence</a:t>
-            </a:r>
-            <a:endParaRPr lang="en-US" sz="1400" dirty="0"/>
-          </a:p>
-          <a:p>
-            <a:pPr indent="0" marL="0">
-              <a:spcAft>
-                <a:spcPts val="400"/>
-              </a:spcAft>
-              <a:buNone/>
-            </a:pPr>
-            <a:r>
-              <a:rPr lang="en-US" sz="1400" dirty="0">
-                <a:solidFill>
-                  <a:srgbClr val="C7D3E6"/>
-                </a:solidFill>
-                <a:latin typeface="Calibri" pitchFamily="34" charset="0"/>
-                <a:ea typeface="Calibri" pitchFamily="34" charset="-122"/>
-                <a:cs typeface="Calibri" pitchFamily="34" charset="-120"/>
-              </a:rPr>
-              <a:t>University of Cagliari</a:t>
-            </a:r>
-            <a:endParaRPr lang="en-US" sz="1400" dirty="0"/>
-          </a:p>
-        </p:txBody>
-      </p:sp>
-      <p:sp>
-        <p:nvSpPr>
-          <p:cNvPr id="10" name="Text 6"/>
-          <p:cNvSpPr/>
-          <p:nvPr/>
-        </p:nvSpPr>
-        <p:spPr>
-          <a:xfrm>
-            <a:off x="685800" y="4069080"/>
-            <a:ext cx="7680960" cy="640080"/>
-          </a:xfrm>
-          <a:prstGeom prst="rect">
-            <a:avLst/>
-          </a:prstGeom>
-          <a:noFill/>
-          <a:ln/>
-        </p:spPr>
-        <p:txBody>
-          <a:bodyPr wrap="square" lIns="0" tIns="0" rIns="0" bIns="0" rtlCol="0" anchor="ctr"/>
-          <a:lstStyle/>
-          <a:p>
-            <a:pPr indent="0" marL="0">
-              <a:spcAft>
-                <a:spcPts val="300"/>
-              </a:spcAft>
-              <a:buNone/>
-            </a:pPr>
-            <a:r>
-              <a:rPr lang="en-US" sz="1400" dirty="0">
-                <a:solidFill>
-                  <a:srgbClr val="9FB1CC"/>
-                </a:solidFill>
-                <a:latin typeface="Calibri" pitchFamily="34" charset="0"/>
-                <a:ea typeface="Calibri" pitchFamily="34" charset="-122"/>
-                <a:cs typeface="Calibri" pitchFamily="34" charset="-120"/>
-              </a:rPr>
-              <a:t>Candidate: </a:t>
-            </a:r>
-            <a:pPr indent="0" marL="0">
-              <a:spcAft>
-                <a:spcPts val="300"/>
-              </a:spcAft>
-              <a:buNone/>
-            </a:pPr>
-            <a:r>
-              <a:rPr lang="en-US" sz="1400" b="1" dirty="0">
-                <a:solidFill>
-                  <a:srgbClr val="FFFFFF"/>
-                </a:solidFill>
-                <a:latin typeface="Calibri" pitchFamily="34" charset="0"/>
-                <a:ea typeface="Calibri" pitchFamily="34" charset="-122"/>
-                <a:cs typeface="Calibri" pitchFamily="34" charset="-120"/>
-              </a:rPr>
-              <a:t>Lello Molinario</a:t>
-            </a:r>
-            <a:endParaRPr lang="en-US" sz="1400" dirty="0"/>
-          </a:p>
-          <a:p>
-            <a:pPr indent="0" marL="0">
-              <a:spcAft>
-                <a:spcPts val="300"/>
-              </a:spcAft>
-              <a:buNone/>
-            </a:pPr>
-            <a:r>
-              <a:rPr lang="en-US" sz="1400" dirty="0">
-                <a:solidFill>
-                  <a:srgbClr val="9FB1CC"/>
-                </a:solidFill>
-                <a:latin typeface="Calibri" pitchFamily="34" charset="0"/>
-                <a:ea typeface="Calibri" pitchFamily="34" charset="-122"/>
-                <a:cs typeface="Calibri" pitchFamily="34" charset="-120"/>
-              </a:rPr>
-              <a:t>Supervisor: </a:t>
-            </a:r>
-            <a:pPr indent="0" marL="0">
-              <a:spcAft>
-                <a:spcPts val="300"/>
-              </a:spcAft>
-              <a:buNone/>
-            </a:pPr>
-            <a:r>
-              <a:rPr lang="en-US" sz="1400" b="1" dirty="0">
-                <a:solidFill>
-                  <a:srgbClr val="FFFFFF"/>
-                </a:solidFill>
-                <a:latin typeface="Calibri" pitchFamily="34" charset="0"/>
-                <a:ea typeface="Calibri" pitchFamily="34" charset="-122"/>
-                <a:cs typeface="Calibri" pitchFamily="34" charset="-120"/>
-              </a:rPr>
-              <a:t>Davide Maiorca</a:t>
-            </a:r>
-            <a:endParaRPr lang="en-US" sz="1400" dirty="0"/>
-          </a:p>
-        </p:txBody>
-      </p:sp>
     </p:spTree>
   </p:cSld>
   <p:clrMapOvr>
@@ -2771,6 +2608,7 @@
         <a:solidFill>
           <a:srgbClr val="FFFFFF"/>
         </a:solidFill>
+        <a:effectLst/>
       </p:bgPr>
     </p:bg>
     <p:spTree>
@@ -2808,11 +2646,11 @@
           <a:bodyPr wrap="square" lIns="0" tIns="0" rIns="0" bIns="0" rtlCol="0" anchor="ctr"/>
           <a:lstStyle/>
           <a:p>
-            <a:pPr indent="0" marL="0">
-              <a:buNone/>
-            </a:pPr>
-            <a:r>
-              <a:rPr lang="en-US" sz="1250" b="1" spc="200" kern="0" dirty="0">
+            <a:pPr marL="0" indent="0">
+              <a:buNone/>
+            </a:pPr>
+            <a:r>
+              <a:rPr lang="en-US" sz="1250" b="1" kern="0" spc="200" dirty="0">
                 <a:solidFill>
                   <a:srgbClr val="0E8A8A"/>
                 </a:solidFill>
@@ -2847,7 +2685,7 @@
           <a:bodyPr wrap="square" lIns="0" tIns="0" rIns="0" bIns="0" rtlCol="0" anchor="t"/>
           <a:lstStyle/>
           <a:p>
-            <a:pPr indent="0" marL="0">
+            <a:pPr marL="0" indent="0">
               <a:buNone/>
             </a:pPr>
             <a:r>
@@ -2891,13 +2729,20 @@
             <a:prstDash val="solid"/>
           </a:ln>
           <a:effectLst>
-            <a:outerShdw sx="100000" sy="100000" kx="0" ky="0" algn="bl" rotWithShape="0" blurRad="88900" dist="25400" dir="5400000">
+            <a:outerShdw blurRad="88900" dist="25400" dir="5400000" algn="bl" rotWithShape="0">
               <a:srgbClr val="000000">
                 <a:alpha val="10000"/>
               </a:srgbClr>
             </a:outerShdw>
           </a:effectLst>
         </p:spPr>
+        <p:txBody>
+          <a:bodyPr/>
+          <a:lstStyle/>
+          <a:p>
+            <a:endParaRPr lang="it-IT"/>
+          </a:p>
+        </p:txBody>
       </p:sp>
       <p:sp>
         <p:nvSpPr>
@@ -2920,7 +2765,7 @@
           <a:bodyPr wrap="square" lIns="0" tIns="0" rIns="0" bIns="0" rtlCol="0" anchor="ctr"/>
           <a:lstStyle/>
           <a:p>
-            <a:pPr algn="ctr" indent="0" marL="0">
+            <a:pPr marL="0" indent="0" algn="ctr">
               <a:buNone/>
             </a:pPr>
             <a:r>
@@ -2964,13 +2809,20 @@
             <a:prstDash val="solid"/>
           </a:ln>
           <a:effectLst>
-            <a:outerShdw sx="100000" sy="100000" kx="0" ky="0" algn="bl" rotWithShape="0" blurRad="88900" dist="25400" dir="5400000">
+            <a:outerShdw blurRad="88900" dist="25400" dir="5400000" algn="bl" rotWithShape="0">
               <a:srgbClr val="000000">
                 <a:alpha val="10000"/>
               </a:srgbClr>
             </a:outerShdw>
           </a:effectLst>
         </p:spPr>
+        <p:txBody>
+          <a:bodyPr/>
+          <a:lstStyle/>
+          <a:p>
+            <a:endParaRPr lang="it-IT"/>
+          </a:p>
+        </p:txBody>
       </p:sp>
       <p:sp>
         <p:nvSpPr>
@@ -2993,7 +2845,7 @@
           <a:bodyPr wrap="square" lIns="0" tIns="0" rIns="0" bIns="0" rtlCol="0" anchor="ctr"/>
           <a:lstStyle/>
           <a:p>
-            <a:pPr algn="ctr" indent="0" marL="0">
+            <a:pPr marL="0" indent="0" algn="ctr">
               <a:buNone/>
             </a:pPr>
             <a:r>
@@ -3037,13 +2889,20 @@
             <a:prstDash val="solid"/>
           </a:ln>
           <a:effectLst>
-            <a:outerShdw sx="100000" sy="100000" kx="0" ky="0" algn="bl" rotWithShape="0" blurRad="88900" dist="25400" dir="5400000">
+            <a:outerShdw blurRad="88900" dist="25400" dir="5400000" algn="bl" rotWithShape="0">
               <a:srgbClr val="000000">
                 <a:alpha val="10000"/>
               </a:srgbClr>
             </a:outerShdw>
           </a:effectLst>
         </p:spPr>
+        <p:txBody>
+          <a:bodyPr/>
+          <a:lstStyle/>
+          <a:p>
+            <a:endParaRPr lang="it-IT"/>
+          </a:p>
+        </p:txBody>
       </p:sp>
       <p:sp>
         <p:nvSpPr>
@@ -3066,7 +2925,7 @@
           <a:bodyPr wrap="square" lIns="0" tIns="0" rIns="0" bIns="0" rtlCol="0" anchor="ctr"/>
           <a:lstStyle/>
           <a:p>
-            <a:pPr algn="ctr" indent="0" marL="0">
+            <a:pPr marL="0" indent="0" algn="ctr">
               <a:buNone/>
             </a:pPr>
             <a:r>
@@ -3105,7 +2964,7 @@
           <a:bodyPr wrap="square" lIns="0" tIns="0" rIns="0" bIns="0" rtlCol="0" anchor="ctr"/>
           <a:lstStyle/>
           <a:p>
-            <a:pPr algn="ctr" indent="0" marL="0">
+            <a:pPr marL="0" indent="0" algn="ctr">
               <a:buNone/>
             </a:pPr>
             <a:r>
@@ -3149,13 +3008,20 @@
             <a:prstDash val="solid"/>
           </a:ln>
           <a:effectLst>
-            <a:outerShdw sx="100000" sy="100000" kx="0" ky="0" algn="bl" rotWithShape="0" blurRad="88900" dist="25400" dir="5400000">
+            <a:outerShdw blurRad="88900" dist="25400" dir="5400000" algn="bl" rotWithShape="0">
               <a:srgbClr val="000000">
                 <a:alpha val="10000"/>
               </a:srgbClr>
             </a:outerShdw>
           </a:effectLst>
         </p:spPr>
+        <p:txBody>
+          <a:bodyPr/>
+          <a:lstStyle/>
+          <a:p>
+            <a:endParaRPr lang="it-IT"/>
+          </a:p>
+        </p:txBody>
       </p:sp>
       <p:sp>
         <p:nvSpPr>
@@ -3176,17 +3042,24 @@
           </a:solidFill>
           <a:ln/>
         </p:spPr>
+        <p:txBody>
+          <a:bodyPr/>
+          <a:lstStyle/>
+          <a:p>
+            <a:endParaRPr lang="it-IT"/>
+          </a:p>
+        </p:txBody>
       </p:sp>
       <p:pic>
         <p:nvPicPr>
-          <p:cNvPr id="13" name="Image 0" descr="preencoded.png">    </p:cNvPr>
+          <p:cNvPr id="13" name="Image 0" descr="preencoded.png"/>
           <p:cNvPicPr>
             <a:picLocks noChangeAspect="1"/>
           </p:cNvPicPr>
           <p:nvPr/>
         </p:nvPicPr>
         <p:blipFill>
-          <a:blip r:embed="rId1"/>
+          <a:blip r:embed="rId3"/>
           <a:stretch>
             <a:fillRect/>
           </a:stretch>
@@ -3222,7 +3095,7 @@
           <a:bodyPr wrap="square" lIns="0" tIns="0" rIns="0" bIns="0" rtlCol="0" anchor="t"/>
           <a:lstStyle/>
           <a:p>
-            <a:pPr algn="ctr" indent="0" marL="0">
+            <a:pPr marL="0" indent="0" algn="ctr">
               <a:lnSpc>
                 <a:spcPct val="115000"/>
               </a:lnSpc>
@@ -3242,7 +3115,7 @@
             <a:endParaRPr lang="en-US" sz="980" dirty="0"/>
           </a:p>
           <a:p>
-            <a:pPr algn="ctr" indent="0" marL="0">
+            <a:pPr marL="0" indent="0" algn="ctr">
               <a:lnSpc>
                 <a:spcPct val="115000"/>
               </a:lnSpc>
@@ -3289,13 +3162,20 @@
             <a:prstDash val="solid"/>
           </a:ln>
           <a:effectLst>
-            <a:outerShdw sx="100000" sy="100000" kx="0" ky="0" algn="bl" rotWithShape="0" blurRad="88900" dist="25400" dir="5400000">
+            <a:outerShdw blurRad="88900" dist="25400" dir="5400000" algn="bl" rotWithShape="0">
               <a:srgbClr val="000000">
                 <a:alpha val="10000"/>
               </a:srgbClr>
             </a:outerShdw>
           </a:effectLst>
         </p:spPr>
+        <p:txBody>
+          <a:bodyPr/>
+          <a:lstStyle/>
+          <a:p>
+            <a:endParaRPr lang="it-IT"/>
+          </a:p>
+        </p:txBody>
       </p:sp>
       <p:sp>
         <p:nvSpPr>
@@ -3316,17 +3196,24 @@
           </a:solidFill>
           <a:ln/>
         </p:spPr>
+        <p:txBody>
+          <a:bodyPr/>
+          <a:lstStyle/>
+          <a:p>
+            <a:endParaRPr lang="it-IT"/>
+          </a:p>
+        </p:txBody>
       </p:sp>
       <p:pic>
         <p:nvPicPr>
-          <p:cNvPr id="17" name="Image 1" descr="preencoded.png">    </p:cNvPr>
+          <p:cNvPr id="17" name="Image 1" descr="preencoded.png"/>
           <p:cNvPicPr>
             <a:picLocks noChangeAspect="1"/>
           </p:cNvPicPr>
           <p:nvPr/>
         </p:nvPicPr>
         <p:blipFill>
-          <a:blip r:embed="rId2"/>
+          <a:blip r:embed="rId4"/>
           <a:stretch>
             <a:fillRect/>
           </a:stretch>
@@ -3362,7 +3249,7 @@
           <a:bodyPr wrap="square" lIns="0" tIns="0" rIns="0" bIns="0" rtlCol="0" anchor="t"/>
           <a:lstStyle/>
           <a:p>
-            <a:pPr algn="ctr" indent="0" marL="0">
+            <a:pPr marL="0" indent="0" algn="ctr">
               <a:lnSpc>
                 <a:spcPct val="115000"/>
               </a:lnSpc>
@@ -3382,7 +3269,7 @@
             <a:endParaRPr lang="en-US" sz="980" dirty="0"/>
           </a:p>
           <a:p>
-            <a:pPr algn="ctr" indent="0" marL="0">
+            <a:pPr marL="0" indent="0" algn="ctr">
               <a:lnSpc>
                 <a:spcPct val="115000"/>
               </a:lnSpc>
@@ -3429,13 +3316,20 @@
             <a:prstDash val="solid"/>
           </a:ln>
           <a:effectLst>
-            <a:outerShdw sx="100000" sy="100000" kx="0" ky="0" algn="bl" rotWithShape="0" blurRad="88900" dist="25400" dir="5400000">
+            <a:outerShdw blurRad="88900" dist="25400" dir="5400000" algn="bl" rotWithShape="0">
               <a:srgbClr val="000000">
                 <a:alpha val="10000"/>
               </a:srgbClr>
             </a:outerShdw>
           </a:effectLst>
         </p:spPr>
+        <p:txBody>
+          <a:bodyPr/>
+          <a:lstStyle/>
+          <a:p>
+            <a:endParaRPr lang="it-IT"/>
+          </a:p>
+        </p:txBody>
       </p:sp>
       <p:sp>
         <p:nvSpPr>
@@ -3456,17 +3350,24 @@
           </a:solidFill>
           <a:ln/>
         </p:spPr>
+        <p:txBody>
+          <a:bodyPr/>
+          <a:lstStyle/>
+          <a:p>
+            <a:endParaRPr lang="it-IT"/>
+          </a:p>
+        </p:txBody>
       </p:sp>
       <p:pic>
         <p:nvPicPr>
-          <p:cNvPr id="21" name="Image 2" descr="preencoded.png">    </p:cNvPr>
+          <p:cNvPr id="21" name="Image 2" descr="preencoded.png"/>
           <p:cNvPicPr>
             <a:picLocks noChangeAspect="1"/>
           </p:cNvPicPr>
           <p:nvPr/>
         </p:nvPicPr>
         <p:blipFill>
-          <a:blip r:embed="rId3"/>
+          <a:blip r:embed="rId5"/>
           <a:stretch>
             <a:fillRect/>
           </a:stretch>
@@ -3502,7 +3403,7 @@
           <a:bodyPr wrap="square" lIns="0" tIns="0" rIns="0" bIns="0" rtlCol="0" anchor="t"/>
           <a:lstStyle/>
           <a:p>
-            <a:pPr algn="ctr" indent="0" marL="0">
+            <a:pPr marL="0" indent="0" algn="ctr">
               <a:lnSpc>
                 <a:spcPct val="115000"/>
               </a:lnSpc>
@@ -3522,7 +3423,7 @@
             <a:endParaRPr lang="en-US" sz="980" dirty="0"/>
           </a:p>
           <a:p>
-            <a:pPr algn="ctr" indent="0" marL="0">
+            <a:pPr marL="0" indent="0" algn="ctr">
               <a:lnSpc>
                 <a:spcPct val="115000"/>
               </a:lnSpc>
@@ -3569,13 +3470,20 @@
             <a:prstDash val="solid"/>
           </a:ln>
           <a:effectLst>
-            <a:outerShdw sx="100000" sy="100000" kx="0" ky="0" algn="bl" rotWithShape="0" blurRad="88900" dist="25400" dir="5400000">
+            <a:outerShdw blurRad="88900" dist="25400" dir="5400000" algn="bl" rotWithShape="0">
               <a:srgbClr val="000000">
                 <a:alpha val="10000"/>
               </a:srgbClr>
             </a:outerShdw>
           </a:effectLst>
         </p:spPr>
+        <p:txBody>
+          <a:bodyPr/>
+          <a:lstStyle/>
+          <a:p>
+            <a:endParaRPr lang="it-IT"/>
+          </a:p>
+        </p:txBody>
       </p:sp>
       <p:sp>
         <p:nvSpPr>
@@ -3596,17 +3504,24 @@
           </a:solidFill>
           <a:ln/>
         </p:spPr>
+        <p:txBody>
+          <a:bodyPr/>
+          <a:lstStyle/>
+          <a:p>
+            <a:endParaRPr lang="it-IT"/>
+          </a:p>
+        </p:txBody>
       </p:sp>
       <p:pic>
         <p:nvPicPr>
-          <p:cNvPr id="25" name="Image 3" descr="preencoded.png">    </p:cNvPr>
+          <p:cNvPr id="25" name="Image 3" descr="preencoded.png"/>
           <p:cNvPicPr>
             <a:picLocks noChangeAspect="1"/>
           </p:cNvPicPr>
           <p:nvPr/>
         </p:nvPicPr>
         <p:blipFill>
-          <a:blip r:embed="rId4"/>
+          <a:blip r:embed="rId6"/>
           <a:stretch>
             <a:fillRect/>
           </a:stretch>
@@ -3642,7 +3557,7 @@
           <a:bodyPr wrap="square" lIns="0" tIns="0" rIns="0" bIns="0" rtlCol="0" anchor="t"/>
           <a:lstStyle/>
           <a:p>
-            <a:pPr algn="ctr" indent="0" marL="0">
+            <a:pPr marL="0" indent="0" algn="ctr">
               <a:lnSpc>
                 <a:spcPct val="115000"/>
               </a:lnSpc>
@@ -3662,7 +3577,7 @@
             <a:endParaRPr lang="en-US" sz="980" dirty="0"/>
           </a:p>
           <a:p>
-            <a:pPr algn="ctr" indent="0" marL="0">
+            <a:pPr marL="0" indent="0" algn="ctr">
               <a:lnSpc>
                 <a:spcPct val="115000"/>
               </a:lnSpc>
@@ -3709,13 +3624,20 @@
             <a:prstDash val="solid"/>
           </a:ln>
           <a:effectLst>
-            <a:outerShdw sx="100000" sy="100000" kx="0" ky="0" algn="bl" rotWithShape="0" blurRad="88900" dist="25400" dir="5400000">
+            <a:outerShdw blurRad="88900" dist="25400" dir="5400000" algn="bl" rotWithShape="0">
               <a:srgbClr val="000000">
                 <a:alpha val="10000"/>
               </a:srgbClr>
             </a:outerShdw>
           </a:effectLst>
         </p:spPr>
+        <p:txBody>
+          <a:bodyPr/>
+          <a:lstStyle/>
+          <a:p>
+            <a:endParaRPr lang="it-IT"/>
+          </a:p>
+        </p:txBody>
       </p:sp>
       <p:sp>
         <p:nvSpPr>
@@ -3736,17 +3658,24 @@
           </a:solidFill>
           <a:ln/>
         </p:spPr>
+        <p:txBody>
+          <a:bodyPr/>
+          <a:lstStyle/>
+          <a:p>
+            <a:endParaRPr lang="it-IT"/>
+          </a:p>
+        </p:txBody>
       </p:sp>
       <p:pic>
         <p:nvPicPr>
-          <p:cNvPr id="29" name="Image 4" descr="preencoded.png">    </p:cNvPr>
+          <p:cNvPr id="29" name="Image 4" descr="preencoded.png"/>
           <p:cNvPicPr>
             <a:picLocks noChangeAspect="1"/>
           </p:cNvPicPr>
           <p:nvPr/>
         </p:nvPicPr>
         <p:blipFill>
-          <a:blip r:embed="rId5"/>
+          <a:blip r:embed="rId7"/>
           <a:stretch>
             <a:fillRect/>
           </a:stretch>
@@ -3782,7 +3711,7 @@
           <a:bodyPr wrap="square" lIns="0" tIns="0" rIns="0" bIns="0" rtlCol="0" anchor="t"/>
           <a:lstStyle/>
           <a:p>
-            <a:pPr algn="ctr" indent="0" marL="0">
+            <a:pPr marL="0" indent="0" algn="ctr">
               <a:lnSpc>
                 <a:spcPct val="115000"/>
               </a:lnSpc>
@@ -3802,7 +3731,7 @@
             <a:endParaRPr lang="en-US" sz="980" dirty="0"/>
           </a:p>
           <a:p>
-            <a:pPr algn="ctr" indent="0" marL="0">
+            <a:pPr marL="0" indent="0" algn="ctr">
               <a:lnSpc>
                 <a:spcPct val="115000"/>
               </a:lnSpc>
@@ -3844,7 +3773,7 @@
           <a:bodyPr wrap="square" lIns="0" tIns="0" rIns="0" bIns="0" rtlCol="0" anchor="ctr"/>
           <a:lstStyle/>
           <a:p>
-            <a:pPr indent="0" marL="0">
+            <a:pPr marL="0" indent="0">
               <a:buNone/>
             </a:pPr>
             <a:r>
@@ -3858,9 +3787,6 @@
               </a:rPr>
               <a:t>Role in the thesis: </a:t>
             </a:r>
-            <a:pPr indent="0" marL="0">
-              <a:buNone/>
-            </a:pPr>
             <a:r>
               <a:rPr lang="en-US" sz="1080" dirty="0">
                 <a:solidFill>
@@ -3897,7 +3823,7 @@
           <a:bodyPr wrap="square" lIns="0" tIns="0" rIns="0" bIns="0" rtlCol="0" anchor="ctr"/>
           <a:lstStyle/>
           <a:p>
-            <a:pPr indent="0" marL="0">
+            <a:pPr marL="0" indent="0">
               <a:buNone/>
             </a:pPr>
             <a:r>
@@ -3936,7 +3862,7 @@
           <a:bodyPr wrap="square" lIns="0" tIns="0" rIns="0" bIns="0" rtlCol="0" anchor="ctr"/>
           <a:lstStyle/>
           <a:p>
-            <a:pPr algn="r" indent="0" marL="0">
+            <a:pPr marL="0" indent="0" algn="r">
               <a:buNone/>
             </a:pPr>
             <a:r>
@@ -3970,6 +3896,7 @@
         <a:solidFill>
           <a:srgbClr val="FFFFFF"/>
         </a:solidFill>
+        <a:effectLst/>
       </p:bgPr>
     </p:bg>
     <p:spTree>
@@ -4007,11 +3934,11 @@
           <a:bodyPr wrap="square" lIns="0" tIns="0" rIns="0" bIns="0" rtlCol="0" anchor="ctr"/>
           <a:lstStyle/>
           <a:p>
-            <a:pPr indent="0" marL="0">
-              <a:buNone/>
-            </a:pPr>
-            <a:r>
-              <a:rPr lang="en-US" sz="1250" b="1" spc="200" kern="0" dirty="0">
+            <a:pPr marL="0" indent="0">
+              <a:buNone/>
+            </a:pPr>
+            <a:r>
+              <a:rPr lang="en-US" sz="1250" b="1" kern="0" spc="200" dirty="0">
                 <a:solidFill>
                   <a:srgbClr val="0E8A8A"/>
                 </a:solidFill>
@@ -4046,7 +3973,7 @@
           <a:bodyPr wrap="square" lIns="0" tIns="0" rIns="0" bIns="0" rtlCol="0" anchor="t"/>
           <a:lstStyle/>
           <a:p>
-            <a:pPr indent="0" marL="0">
+            <a:pPr marL="0" indent="0">
               <a:buNone/>
             </a:pPr>
             <a:r>
@@ -4090,24 +4017,31 @@
             <a:prstDash val="solid"/>
           </a:ln>
           <a:effectLst>
-            <a:outerShdw sx="100000" sy="100000" kx="0" ky="0" algn="bl" rotWithShape="0" blurRad="88900" dist="25400" dir="5400000">
+            <a:outerShdw blurRad="88900" dist="25400" dir="5400000" algn="bl" rotWithShape="0">
               <a:srgbClr val="000000">
                 <a:alpha val="10000"/>
               </a:srgbClr>
             </a:outerShdw>
           </a:effectLst>
         </p:spPr>
+        <p:txBody>
+          <a:bodyPr/>
+          <a:lstStyle/>
+          <a:p>
+            <a:endParaRPr lang="it-IT"/>
+          </a:p>
+        </p:txBody>
       </p:sp>
       <p:pic>
         <p:nvPicPr>
-          <p:cNvPr id="5" name="Image 0" descr="preencoded.png">    </p:cNvPr>
+          <p:cNvPr id="5" name="Image 0" descr="preencoded.png"/>
           <p:cNvPicPr>
             <a:picLocks noChangeAspect="1"/>
           </p:cNvPicPr>
           <p:nvPr/>
         </p:nvPicPr>
         <p:blipFill>
-          <a:blip r:embed="rId1"/>
+          <a:blip r:embed="rId3"/>
           <a:stretch>
             <a:fillRect/>
           </a:stretch>
@@ -4143,7 +4077,7 @@
           <a:bodyPr wrap="square" lIns="0" tIns="0" rIns="0" bIns="0" rtlCol="0" anchor="t"/>
           <a:lstStyle/>
           <a:p>
-            <a:pPr algn="ctr" indent="0" marL="0">
+            <a:pPr marL="0" indent="0" algn="ctr">
               <a:lnSpc>
                 <a:spcPct val="110000"/>
               </a:lnSpc>
@@ -4163,7 +4097,7 @@
             <a:endParaRPr lang="en-US" sz="930" dirty="0"/>
           </a:p>
           <a:p>
-            <a:pPr algn="ctr" indent="0" marL="0">
+            <a:pPr marL="0" indent="0" algn="ctr">
               <a:lnSpc>
                 <a:spcPct val="110000"/>
               </a:lnSpc>
@@ -4203,6 +4137,13 @@
           </a:solidFill>
           <a:ln/>
         </p:spPr>
+        <p:txBody>
+          <a:bodyPr/>
+          <a:lstStyle/>
+          <a:p>
+            <a:endParaRPr lang="it-IT"/>
+          </a:p>
+        </p:txBody>
       </p:sp>
       <p:sp>
         <p:nvSpPr>
@@ -4225,24 +4166,31 @@
           </a:solidFill>
           <a:ln/>
           <a:effectLst>
-            <a:outerShdw sx="100000" sy="100000" kx="0" ky="0" algn="bl" rotWithShape="0" blurRad="88900" dist="25400" dir="5400000">
+            <a:outerShdw blurRad="88900" dist="25400" dir="5400000" algn="bl" rotWithShape="0">
               <a:srgbClr val="000000">
                 <a:alpha val="10000"/>
               </a:srgbClr>
             </a:outerShdw>
           </a:effectLst>
         </p:spPr>
+        <p:txBody>
+          <a:bodyPr/>
+          <a:lstStyle/>
+          <a:p>
+            <a:endParaRPr lang="it-IT"/>
+          </a:p>
+        </p:txBody>
       </p:sp>
       <p:pic>
         <p:nvPicPr>
-          <p:cNvPr id="9" name="Image 1" descr="preencoded.png">    </p:cNvPr>
+          <p:cNvPr id="9" name="Image 1" descr="preencoded.png"/>
           <p:cNvPicPr>
             <a:picLocks noChangeAspect="1"/>
           </p:cNvPicPr>
           <p:nvPr/>
         </p:nvPicPr>
         <p:blipFill>
-          <a:blip r:embed="rId2"/>
+          <a:blip r:embed="rId4"/>
           <a:stretch>
             <a:fillRect/>
           </a:stretch>
@@ -4278,7 +4226,7 @@
           <a:bodyPr wrap="square" lIns="0" tIns="0" rIns="0" bIns="0" rtlCol="0" anchor="t"/>
           <a:lstStyle/>
           <a:p>
-            <a:pPr algn="ctr" indent="0" marL="0">
+            <a:pPr marL="0" indent="0" algn="ctr">
               <a:lnSpc>
                 <a:spcPct val="110000"/>
               </a:lnSpc>
@@ -4298,7 +4246,7 @@
             <a:endParaRPr lang="en-US" sz="930" dirty="0"/>
           </a:p>
           <a:p>
-            <a:pPr algn="ctr" indent="0" marL="0">
+            <a:pPr marL="0" indent="0" algn="ctr">
               <a:lnSpc>
                 <a:spcPct val="110000"/>
               </a:lnSpc>
@@ -4338,6 +4286,13 @@
           </a:solidFill>
           <a:ln/>
         </p:spPr>
+        <p:txBody>
+          <a:bodyPr/>
+          <a:lstStyle/>
+          <a:p>
+            <a:endParaRPr lang="it-IT"/>
+          </a:p>
+        </p:txBody>
       </p:sp>
       <p:sp>
         <p:nvSpPr>
@@ -4365,24 +4320,31 @@
             <a:prstDash val="solid"/>
           </a:ln>
           <a:effectLst>
-            <a:outerShdw sx="100000" sy="100000" kx="0" ky="0" algn="bl" rotWithShape="0" blurRad="88900" dist="25400" dir="5400000">
+            <a:outerShdw blurRad="88900" dist="25400" dir="5400000" algn="bl" rotWithShape="0">
               <a:srgbClr val="000000">
                 <a:alpha val="10000"/>
               </a:srgbClr>
             </a:outerShdw>
           </a:effectLst>
         </p:spPr>
+        <p:txBody>
+          <a:bodyPr/>
+          <a:lstStyle/>
+          <a:p>
+            <a:endParaRPr lang="it-IT"/>
+          </a:p>
+        </p:txBody>
       </p:sp>
       <p:pic>
         <p:nvPicPr>
-          <p:cNvPr id="13" name="Image 2" descr="preencoded.png">    </p:cNvPr>
+          <p:cNvPr id="13" name="Image 2" descr="preencoded.png"/>
           <p:cNvPicPr>
             <a:picLocks noChangeAspect="1"/>
           </p:cNvPicPr>
           <p:nvPr/>
         </p:nvPicPr>
         <p:blipFill>
-          <a:blip r:embed="rId3"/>
+          <a:blip r:embed="rId5"/>
           <a:stretch>
             <a:fillRect/>
           </a:stretch>
@@ -4418,7 +4380,7 @@
           <a:bodyPr wrap="square" lIns="0" tIns="0" rIns="0" bIns="0" rtlCol="0" anchor="t"/>
           <a:lstStyle/>
           <a:p>
-            <a:pPr algn="ctr" indent="0" marL="0">
+            <a:pPr marL="0" indent="0" algn="ctr">
               <a:lnSpc>
                 <a:spcPct val="110000"/>
               </a:lnSpc>
@@ -4438,7 +4400,7 @@
             <a:endParaRPr lang="en-US" sz="930" dirty="0"/>
           </a:p>
           <a:p>
-            <a:pPr algn="ctr" indent="0" marL="0">
+            <a:pPr marL="0" indent="0" algn="ctr">
               <a:lnSpc>
                 <a:spcPct val="110000"/>
               </a:lnSpc>
@@ -4478,6 +4440,13 @@
           </a:solidFill>
           <a:ln/>
         </p:spPr>
+        <p:txBody>
+          <a:bodyPr/>
+          <a:lstStyle/>
+          <a:p>
+            <a:endParaRPr lang="it-IT"/>
+          </a:p>
+        </p:txBody>
       </p:sp>
       <p:sp>
         <p:nvSpPr>
@@ -4505,24 +4474,31 @@
             <a:prstDash val="solid"/>
           </a:ln>
           <a:effectLst>
-            <a:outerShdw sx="100000" sy="100000" kx="0" ky="0" algn="bl" rotWithShape="0" blurRad="88900" dist="25400" dir="5400000">
+            <a:outerShdw blurRad="88900" dist="25400" dir="5400000" algn="bl" rotWithShape="0">
               <a:srgbClr val="000000">
                 <a:alpha val="10000"/>
               </a:srgbClr>
             </a:outerShdw>
           </a:effectLst>
         </p:spPr>
+        <p:txBody>
+          <a:bodyPr/>
+          <a:lstStyle/>
+          <a:p>
+            <a:endParaRPr lang="it-IT"/>
+          </a:p>
+        </p:txBody>
       </p:sp>
       <p:pic>
         <p:nvPicPr>
-          <p:cNvPr id="17" name="Image 3" descr="preencoded.png">    </p:cNvPr>
+          <p:cNvPr id="17" name="Image 3" descr="preencoded.png"/>
           <p:cNvPicPr>
             <a:picLocks noChangeAspect="1"/>
           </p:cNvPicPr>
           <p:nvPr/>
         </p:nvPicPr>
         <p:blipFill>
-          <a:blip r:embed="rId4"/>
+          <a:blip r:embed="rId6"/>
           <a:stretch>
             <a:fillRect/>
           </a:stretch>
@@ -4558,7 +4534,7 @@
           <a:bodyPr wrap="square" lIns="0" tIns="0" rIns="0" bIns="0" rtlCol="0" anchor="t"/>
           <a:lstStyle/>
           <a:p>
-            <a:pPr algn="ctr" indent="0" marL="0">
+            <a:pPr marL="0" indent="0" algn="ctr">
               <a:lnSpc>
                 <a:spcPct val="110000"/>
               </a:lnSpc>
@@ -4578,7 +4554,7 @@
             <a:endParaRPr lang="en-US" sz="930" dirty="0"/>
           </a:p>
           <a:p>
-            <a:pPr algn="ctr" indent="0" marL="0">
+            <a:pPr marL="0" indent="0" algn="ctr">
               <a:lnSpc>
                 <a:spcPct val="110000"/>
               </a:lnSpc>
@@ -4618,6 +4594,13 @@
           </a:solidFill>
           <a:ln/>
         </p:spPr>
+        <p:txBody>
+          <a:bodyPr/>
+          <a:lstStyle/>
+          <a:p>
+            <a:endParaRPr lang="it-IT"/>
+          </a:p>
+        </p:txBody>
       </p:sp>
       <p:sp>
         <p:nvSpPr>
@@ -4645,24 +4628,31 @@
             <a:prstDash val="solid"/>
           </a:ln>
           <a:effectLst>
-            <a:outerShdw sx="100000" sy="100000" kx="0" ky="0" algn="bl" rotWithShape="0" blurRad="88900" dist="25400" dir="5400000">
+            <a:outerShdw blurRad="88900" dist="25400" dir="5400000" algn="bl" rotWithShape="0">
               <a:srgbClr val="000000">
                 <a:alpha val="10000"/>
               </a:srgbClr>
             </a:outerShdw>
           </a:effectLst>
         </p:spPr>
+        <p:txBody>
+          <a:bodyPr/>
+          <a:lstStyle/>
+          <a:p>
+            <a:endParaRPr lang="it-IT"/>
+          </a:p>
+        </p:txBody>
       </p:sp>
       <p:pic>
         <p:nvPicPr>
-          <p:cNvPr id="21" name="Image 4" descr="preencoded.png">    </p:cNvPr>
+          <p:cNvPr id="21" name="Image 4" descr="preencoded.png"/>
           <p:cNvPicPr>
             <a:picLocks noChangeAspect="1"/>
           </p:cNvPicPr>
           <p:nvPr/>
         </p:nvPicPr>
         <p:blipFill>
-          <a:blip r:embed="rId5"/>
+          <a:blip r:embed="rId7"/>
           <a:stretch>
             <a:fillRect/>
           </a:stretch>
@@ -4698,7 +4688,7 @@
           <a:bodyPr wrap="square" lIns="0" tIns="0" rIns="0" bIns="0" rtlCol="0" anchor="t"/>
           <a:lstStyle/>
           <a:p>
-            <a:pPr algn="ctr" indent="0" marL="0">
+            <a:pPr marL="0" indent="0" algn="ctr">
               <a:lnSpc>
                 <a:spcPct val="110000"/>
               </a:lnSpc>
@@ -4851,13 +4841,20 @@
             <a:prstDash val="solid"/>
           </a:ln>
           <a:effectLst>
-            <a:outerShdw sx="100000" sy="100000" kx="0" ky="0" algn="bl" rotWithShape="0" blurRad="88900" dist="25400" dir="5400000">
+            <a:outerShdw blurRad="88900" dist="25400" dir="5400000" algn="bl" rotWithShape="0">
               <a:srgbClr val="000000">
                 <a:alpha val="10000"/>
               </a:srgbClr>
             </a:outerShdw>
           </a:effectLst>
         </p:spPr>
+        <p:txBody>
+          <a:bodyPr/>
+          <a:lstStyle/>
+          <a:p>
+            <a:endParaRPr lang="it-IT"/>
+          </a:p>
+        </p:txBody>
       </p:sp>
       <p:sp>
         <p:nvSpPr>
@@ -4880,7 +4877,7 @@
           <a:bodyPr wrap="square" lIns="0" tIns="0" rIns="0" bIns="0" rtlCol="0" anchor="ctr"/>
           <a:lstStyle/>
           <a:p>
-            <a:pPr indent="0" marL="0">
+            <a:pPr marL="0" indent="0">
               <a:buNone/>
             </a:pPr>
             <a:r>
@@ -5004,7 +5001,7 @@
           <a:bodyPr wrap="square" lIns="0" tIns="0" rIns="0" bIns="0" rtlCol="0" anchor="ctr"/>
           <a:lstStyle/>
           <a:p>
-            <a:pPr indent="0" marL="0">
+            <a:pPr marL="0" indent="0">
               <a:buNone/>
             </a:pPr>
             <a:r>
@@ -5043,7 +5040,7 @@
           <a:bodyPr wrap="square" lIns="0" tIns="0" rIns="0" bIns="0" rtlCol="0" anchor="ctr"/>
           <a:lstStyle/>
           <a:p>
-            <a:pPr algn="r" indent="0" marL="0">
+            <a:pPr marL="0" indent="0" algn="r">
               <a:buNone/>
             </a:pPr>
             <a:r>
@@ -5077,6 +5074,7 @@
         <a:solidFill>
           <a:srgbClr val="FFFFFF"/>
         </a:solidFill>
+        <a:effectLst/>
       </p:bgPr>
     </p:bg>
     <p:spTree>
@@ -5114,11 +5112,11 @@
           <a:bodyPr wrap="square" lIns="0" tIns="0" rIns="0" bIns="0" rtlCol="0" anchor="ctr"/>
           <a:lstStyle/>
           <a:p>
-            <a:pPr indent="0" marL="0">
-              <a:buNone/>
-            </a:pPr>
-            <a:r>
-              <a:rPr lang="en-US" sz="1250" b="1" spc="200" kern="0" dirty="0">
+            <a:pPr marL="0" indent="0">
+              <a:buNone/>
+            </a:pPr>
+            <a:r>
+              <a:rPr lang="en-US" sz="1250" b="1" kern="0" spc="200" dirty="0">
                 <a:solidFill>
                   <a:srgbClr val="0E8A8A"/>
                 </a:solidFill>
@@ -5153,7 +5151,7 @@
           <a:bodyPr wrap="square" lIns="0" tIns="0" rIns="0" bIns="0" rtlCol="0" anchor="t"/>
           <a:lstStyle/>
           <a:p>
-            <a:pPr indent="0" marL="0">
+            <a:pPr marL="0" indent="0">
               <a:buNone/>
             </a:pPr>
             <a:r>
@@ -5197,13 +5195,20 @@
             <a:prstDash val="solid"/>
           </a:ln>
           <a:effectLst>
-            <a:outerShdw sx="100000" sy="100000" kx="0" ky="0" algn="bl" rotWithShape="0" blurRad="88900" dist="25400" dir="5400000">
+            <a:outerShdw blurRad="88900" dist="25400" dir="5400000" algn="bl" rotWithShape="0">
               <a:srgbClr val="000000">
                 <a:alpha val="10000"/>
               </a:srgbClr>
             </a:outerShdw>
           </a:effectLst>
         </p:spPr>
+        <p:txBody>
+          <a:bodyPr/>
+          <a:lstStyle/>
+          <a:p>
+            <a:endParaRPr lang="it-IT"/>
+          </a:p>
+        </p:txBody>
       </p:sp>
       <p:sp>
         <p:nvSpPr>
@@ -5224,17 +5229,24 @@
           </a:solidFill>
           <a:ln/>
         </p:spPr>
+        <p:txBody>
+          <a:bodyPr/>
+          <a:lstStyle/>
+          <a:p>
+            <a:endParaRPr lang="it-IT"/>
+          </a:p>
+        </p:txBody>
       </p:sp>
       <p:pic>
         <p:nvPicPr>
-          <p:cNvPr id="6" name="Image 0" descr="preencoded.png">    </p:cNvPr>
+          <p:cNvPr id="6" name="Image 0" descr="preencoded.png"/>
           <p:cNvPicPr>
             <a:picLocks noChangeAspect="1"/>
           </p:cNvPicPr>
           <p:nvPr/>
         </p:nvPicPr>
         <p:blipFill>
-          <a:blip r:embed="rId1"/>
+          <a:blip r:embed="rId3"/>
           <a:stretch>
             <a:fillRect/>
           </a:stretch>
@@ -5270,7 +5282,7 @@
           <a:bodyPr wrap="square" lIns="0" tIns="0" rIns="0" bIns="0" rtlCol="0" anchor="t"/>
           <a:lstStyle/>
           <a:p>
-            <a:pPr algn="ctr" indent="0" marL="0">
+            <a:pPr marL="0" indent="0" algn="ctr">
               <a:lnSpc>
                 <a:spcPct val="115000"/>
               </a:lnSpc>
@@ -5290,7 +5302,7 @@
             <a:endParaRPr lang="en-US" sz="1200" dirty="0"/>
           </a:p>
           <a:p>
-            <a:pPr algn="ctr" indent="0" marL="0">
+            <a:pPr marL="0" indent="0" algn="ctr">
               <a:lnSpc>
                 <a:spcPct val="115000"/>
               </a:lnSpc>
@@ -5337,13 +5349,20 @@
             <a:prstDash val="solid"/>
           </a:ln>
           <a:effectLst>
-            <a:outerShdw sx="100000" sy="100000" kx="0" ky="0" algn="bl" rotWithShape="0" blurRad="88900" dist="25400" dir="5400000">
+            <a:outerShdw blurRad="88900" dist="25400" dir="5400000" algn="bl" rotWithShape="0">
               <a:srgbClr val="000000">
                 <a:alpha val="10000"/>
               </a:srgbClr>
             </a:outerShdw>
           </a:effectLst>
         </p:spPr>
+        <p:txBody>
+          <a:bodyPr/>
+          <a:lstStyle/>
+          <a:p>
+            <a:endParaRPr lang="it-IT"/>
+          </a:p>
+        </p:txBody>
       </p:sp>
       <p:sp>
         <p:nvSpPr>
@@ -5364,17 +5383,24 @@
           </a:solidFill>
           <a:ln/>
         </p:spPr>
+        <p:txBody>
+          <a:bodyPr/>
+          <a:lstStyle/>
+          <a:p>
+            <a:endParaRPr lang="it-IT"/>
+          </a:p>
+        </p:txBody>
       </p:sp>
       <p:pic>
         <p:nvPicPr>
-          <p:cNvPr id="10" name="Image 1" descr="preencoded.png">    </p:cNvPr>
+          <p:cNvPr id="10" name="Image 1" descr="preencoded.png"/>
           <p:cNvPicPr>
             <a:picLocks noChangeAspect="1"/>
           </p:cNvPicPr>
           <p:nvPr/>
         </p:nvPicPr>
         <p:blipFill>
-          <a:blip r:embed="rId2"/>
+          <a:blip r:embed="rId4"/>
           <a:stretch>
             <a:fillRect/>
           </a:stretch>
@@ -5410,7 +5436,7 @@
           <a:bodyPr wrap="square" lIns="0" tIns="0" rIns="0" bIns="0" rtlCol="0" anchor="t"/>
           <a:lstStyle/>
           <a:p>
-            <a:pPr algn="ctr" indent="0" marL="0">
+            <a:pPr marL="0" indent="0" algn="ctr">
               <a:lnSpc>
                 <a:spcPct val="115000"/>
               </a:lnSpc>
@@ -5430,7 +5456,7 @@
             <a:endParaRPr lang="en-US" sz="1200" dirty="0"/>
           </a:p>
           <a:p>
-            <a:pPr algn="ctr" indent="0" marL="0">
+            <a:pPr marL="0" indent="0" algn="ctr">
               <a:lnSpc>
                 <a:spcPct val="115000"/>
               </a:lnSpc>
@@ -5477,13 +5503,20 @@
             <a:prstDash val="solid"/>
           </a:ln>
           <a:effectLst>
-            <a:outerShdw sx="100000" sy="100000" kx="0" ky="0" algn="bl" rotWithShape="0" blurRad="88900" dist="25400" dir="5400000">
+            <a:outerShdw blurRad="88900" dist="25400" dir="5400000" algn="bl" rotWithShape="0">
               <a:srgbClr val="000000">
                 <a:alpha val="10000"/>
               </a:srgbClr>
             </a:outerShdw>
           </a:effectLst>
         </p:spPr>
+        <p:txBody>
+          <a:bodyPr/>
+          <a:lstStyle/>
+          <a:p>
+            <a:endParaRPr lang="it-IT"/>
+          </a:p>
+        </p:txBody>
       </p:sp>
       <p:sp>
         <p:nvSpPr>
@@ -5504,17 +5537,24 @@
           </a:solidFill>
           <a:ln/>
         </p:spPr>
+        <p:txBody>
+          <a:bodyPr/>
+          <a:lstStyle/>
+          <a:p>
+            <a:endParaRPr lang="it-IT"/>
+          </a:p>
+        </p:txBody>
       </p:sp>
       <p:pic>
         <p:nvPicPr>
-          <p:cNvPr id="14" name="Image 2" descr="preencoded.png">    </p:cNvPr>
+          <p:cNvPr id="14" name="Image 2" descr="preencoded.png"/>
           <p:cNvPicPr>
             <a:picLocks noChangeAspect="1"/>
           </p:cNvPicPr>
           <p:nvPr/>
         </p:nvPicPr>
         <p:blipFill>
-          <a:blip r:embed="rId3"/>
+          <a:blip r:embed="rId5"/>
           <a:stretch>
             <a:fillRect/>
           </a:stretch>
@@ -5550,7 +5590,7 @@
           <a:bodyPr wrap="square" lIns="0" tIns="0" rIns="0" bIns="0" rtlCol="0" anchor="t"/>
           <a:lstStyle/>
           <a:p>
-            <a:pPr algn="ctr" indent="0" marL="0">
+            <a:pPr marL="0" indent="0" algn="ctr">
               <a:lnSpc>
                 <a:spcPct val="115000"/>
               </a:lnSpc>
@@ -5570,7 +5610,7 @@
             <a:endParaRPr lang="en-US" sz="1200" dirty="0"/>
           </a:p>
           <a:p>
-            <a:pPr algn="ctr" indent="0" marL="0">
+            <a:pPr marL="0" indent="0" algn="ctr">
               <a:lnSpc>
                 <a:spcPct val="115000"/>
               </a:lnSpc>
@@ -5617,13 +5657,20 @@
             <a:prstDash val="solid"/>
           </a:ln>
           <a:effectLst>
-            <a:outerShdw sx="100000" sy="100000" kx="0" ky="0" algn="bl" rotWithShape="0" blurRad="88900" dist="25400" dir="5400000">
+            <a:outerShdw blurRad="88900" dist="25400" dir="5400000" algn="bl" rotWithShape="0">
               <a:srgbClr val="000000">
                 <a:alpha val="10000"/>
               </a:srgbClr>
             </a:outerShdw>
           </a:effectLst>
         </p:spPr>
+        <p:txBody>
+          <a:bodyPr/>
+          <a:lstStyle/>
+          <a:p>
+            <a:endParaRPr lang="it-IT"/>
+          </a:p>
+        </p:txBody>
       </p:sp>
       <p:sp>
         <p:nvSpPr>
@@ -5644,17 +5691,24 @@
           </a:solidFill>
           <a:ln/>
         </p:spPr>
+        <p:txBody>
+          <a:bodyPr/>
+          <a:lstStyle/>
+          <a:p>
+            <a:endParaRPr lang="it-IT"/>
+          </a:p>
+        </p:txBody>
       </p:sp>
       <p:pic>
         <p:nvPicPr>
-          <p:cNvPr id="18" name="Image 3" descr="preencoded.png">    </p:cNvPr>
+          <p:cNvPr id="18" name="Image 3" descr="preencoded.png"/>
           <p:cNvPicPr>
             <a:picLocks noChangeAspect="1"/>
           </p:cNvPicPr>
           <p:nvPr/>
         </p:nvPicPr>
         <p:blipFill>
-          <a:blip r:embed="rId4"/>
+          <a:blip r:embed="rId6"/>
           <a:stretch>
             <a:fillRect/>
           </a:stretch>
@@ -5690,7 +5744,7 @@
           <a:bodyPr wrap="square" lIns="0" tIns="0" rIns="0" bIns="0" rtlCol="0" anchor="t"/>
           <a:lstStyle/>
           <a:p>
-            <a:pPr algn="ctr" indent="0" marL="0">
+            <a:pPr marL="0" indent="0" algn="ctr">
               <a:lnSpc>
                 <a:spcPct val="115000"/>
               </a:lnSpc>
@@ -5710,7 +5764,7 @@
             <a:endParaRPr lang="en-US" sz="1200" dirty="0"/>
           </a:p>
           <a:p>
-            <a:pPr algn="ctr" indent="0" marL="0">
+            <a:pPr marL="0" indent="0" algn="ctr">
               <a:lnSpc>
                 <a:spcPct val="115000"/>
               </a:lnSpc>
@@ -5752,13 +5806,20 @@
           </a:solidFill>
           <a:ln/>
           <a:effectLst>
-            <a:outerShdw sx="100000" sy="100000" kx="0" ky="0" algn="bl" rotWithShape="0" blurRad="88900" dist="25400" dir="5400000">
+            <a:outerShdw blurRad="88900" dist="25400" dir="5400000" algn="bl" rotWithShape="0">
               <a:srgbClr val="000000">
                 <a:alpha val="10000"/>
               </a:srgbClr>
             </a:outerShdw>
           </a:effectLst>
         </p:spPr>
+        <p:txBody>
+          <a:bodyPr/>
+          <a:lstStyle/>
+          <a:p>
+            <a:endParaRPr lang="it-IT"/>
+          </a:p>
+        </p:txBody>
       </p:sp>
       <p:sp>
         <p:nvSpPr>
@@ -5781,7 +5842,7 @@
           <a:bodyPr wrap="square" lIns="0" tIns="0" rIns="0" bIns="0" rtlCol="0" anchor="ctr"/>
           <a:lstStyle/>
           <a:p>
-            <a:pPr indent="0" marL="0">
+            <a:pPr marL="0" indent="0">
               <a:buNone/>
             </a:pPr>
             <a:r>
@@ -5945,6 +6006,13 @@
           </a:solidFill>
           <a:ln/>
         </p:spPr>
+        <p:txBody>
+          <a:bodyPr/>
+          <a:lstStyle/>
+          <a:p>
+            <a:endParaRPr lang="it-IT"/>
+          </a:p>
+        </p:txBody>
       </p:sp>
       <p:sp>
         <p:nvSpPr>
@@ -5967,7 +6035,7 @@
           <a:bodyPr wrap="square" lIns="0" tIns="0" rIns="0" bIns="0" rtlCol="0" anchor="ctr"/>
           <a:lstStyle/>
           <a:p>
-            <a:pPr indent="0" marL="0">
+            <a:pPr marL="0" indent="0">
               <a:buNone/>
             </a:pPr>
             <a:r>
@@ -6004,6 +6072,13 @@
           </a:solidFill>
           <a:ln/>
         </p:spPr>
+        <p:txBody>
+          <a:bodyPr/>
+          <a:lstStyle/>
+          <a:p>
+            <a:endParaRPr lang="it-IT"/>
+          </a:p>
+        </p:txBody>
       </p:sp>
       <p:sp>
         <p:nvSpPr>
@@ -6026,7 +6101,7 @@
           <a:bodyPr wrap="square" lIns="0" tIns="0" rIns="0" bIns="0" rtlCol="0" anchor="ctr"/>
           <a:lstStyle/>
           <a:p>
-            <a:pPr indent="0" marL="0">
+            <a:pPr marL="0" indent="0">
               <a:buNone/>
             </a:pPr>
             <a:r>
@@ -6063,6 +6138,13 @@
           </a:solidFill>
           <a:ln/>
         </p:spPr>
+        <p:txBody>
+          <a:bodyPr/>
+          <a:lstStyle/>
+          <a:p>
+            <a:endParaRPr lang="it-IT"/>
+          </a:p>
+        </p:txBody>
       </p:sp>
       <p:sp>
         <p:nvSpPr>
@@ -6085,7 +6167,7 @@
           <a:bodyPr wrap="square" lIns="0" tIns="0" rIns="0" bIns="0" rtlCol="0" anchor="ctr"/>
           <a:lstStyle/>
           <a:p>
-            <a:pPr indent="0" marL="0">
+            <a:pPr marL="0" indent="0">
               <a:buNone/>
             </a:pPr>
             <a:r>
@@ -6124,7 +6206,7 @@
           <a:bodyPr wrap="square" lIns="0" tIns="0" rIns="0" bIns="0" rtlCol="0" anchor="ctr"/>
           <a:lstStyle/>
           <a:p>
-            <a:pPr indent="0" marL="0">
+            <a:pPr marL="0" indent="0">
               <a:buNone/>
             </a:pPr>
             <a:r>
@@ -6163,7 +6245,7 @@
           <a:bodyPr wrap="square" lIns="0" tIns="0" rIns="0" bIns="0" rtlCol="0" anchor="ctr"/>
           <a:lstStyle/>
           <a:p>
-            <a:pPr indent="0" marL="0">
+            <a:pPr marL="0" indent="0">
               <a:buNone/>
             </a:pPr>
             <a:r>
@@ -6202,7 +6284,7 @@
           <a:bodyPr wrap="square" lIns="0" tIns="0" rIns="0" bIns="0" rtlCol="0" anchor="ctr"/>
           <a:lstStyle/>
           <a:p>
-            <a:pPr algn="r" indent="0" marL="0">
+            <a:pPr marL="0" indent="0" algn="r">
               <a:buNone/>
             </a:pPr>
             <a:r>
@@ -6236,6 +6318,7 @@
         <a:solidFill>
           <a:srgbClr val="FFFFFF"/>
         </a:solidFill>
+        <a:effectLst/>
       </p:bgPr>
     </p:bg>
     <p:spTree>
@@ -6273,11 +6356,11 @@
           <a:bodyPr wrap="square" lIns="0" tIns="0" rIns="0" bIns="0" rtlCol="0" anchor="ctr"/>
           <a:lstStyle/>
           <a:p>
-            <a:pPr indent="0" marL="0">
-              <a:buNone/>
-            </a:pPr>
-            <a:r>
-              <a:rPr lang="en-US" sz="1250" b="1" spc="200" kern="0" dirty="0">
+            <a:pPr marL="0" indent="0">
+              <a:buNone/>
+            </a:pPr>
+            <a:r>
+              <a:rPr lang="en-US" sz="1250" b="1" kern="0" spc="200" dirty="0">
                 <a:solidFill>
                   <a:srgbClr val="0E8A8A"/>
                 </a:solidFill>
@@ -6312,7 +6395,7 @@
           <a:bodyPr wrap="square" lIns="0" tIns="0" rIns="0" bIns="0" rtlCol="0" anchor="t"/>
           <a:lstStyle/>
           <a:p>
-            <a:pPr indent="0" marL="0">
+            <a:pPr marL="0" indent="0">
               <a:buNone/>
             </a:pPr>
             <a:r>
@@ -6351,7 +6434,7 @@
           <a:bodyPr wrap="square" lIns="0" tIns="0" rIns="0" bIns="0" rtlCol="0" anchor="ctr"/>
           <a:lstStyle/>
           <a:p>
-            <a:pPr indent="0" marL="0">
+            <a:pPr marL="0" indent="0">
               <a:buNone/>
             </a:pPr>
             <a:r>
@@ -6395,13 +6478,20 @@
             <a:prstDash val="solid"/>
           </a:ln>
           <a:effectLst>
-            <a:outerShdw sx="100000" sy="100000" kx="0" ky="0" algn="bl" rotWithShape="0" blurRad="88900" dist="25400" dir="5400000">
+            <a:outerShdw blurRad="88900" dist="25400" dir="5400000" algn="bl" rotWithShape="0">
               <a:srgbClr val="000000">
                 <a:alpha val="10000"/>
               </a:srgbClr>
             </a:outerShdw>
           </a:effectLst>
         </p:spPr>
+        <p:txBody>
+          <a:bodyPr/>
+          <a:lstStyle/>
+          <a:p>
+            <a:endParaRPr lang="it-IT"/>
+          </a:p>
+        </p:txBody>
       </p:sp>
       <p:sp>
         <p:nvSpPr>
@@ -6422,17 +6512,24 @@
           </a:solidFill>
           <a:ln/>
         </p:spPr>
+        <p:txBody>
+          <a:bodyPr/>
+          <a:lstStyle/>
+          <a:p>
+            <a:endParaRPr lang="it-IT"/>
+          </a:p>
+        </p:txBody>
       </p:sp>
       <p:pic>
         <p:nvPicPr>
-          <p:cNvPr id="7" name="Image 0" descr="preencoded.png">    </p:cNvPr>
+          <p:cNvPr id="7" name="Image 0" descr="preencoded.png"/>
           <p:cNvPicPr>
             <a:picLocks noChangeAspect="1"/>
           </p:cNvPicPr>
           <p:nvPr/>
         </p:nvPicPr>
         <p:blipFill>
-          <a:blip r:embed="rId1"/>
+          <a:blip r:embed="rId3"/>
           <a:stretch>
             <a:fillRect/>
           </a:stretch>
@@ -6468,7 +6565,7 @@
           <a:bodyPr wrap="square" lIns="0" tIns="0" rIns="0" bIns="0" rtlCol="0" anchor="t"/>
           <a:lstStyle/>
           <a:p>
-            <a:pPr algn="ctr" indent="0" marL="0">
+            <a:pPr marL="0" indent="0" algn="ctr">
               <a:buNone/>
             </a:pPr>
             <a:r>
@@ -6507,7 +6604,7 @@
           <a:bodyPr wrap="square" lIns="0" tIns="0" rIns="0" bIns="0" rtlCol="0" anchor="t"/>
           <a:lstStyle/>
           <a:p>
-            <a:pPr algn="ctr" indent="0" marL="0">
+            <a:pPr marL="0" indent="0" algn="ctr">
               <a:lnSpc>
                 <a:spcPct val="115000"/>
               </a:lnSpc>
@@ -6554,13 +6651,20 @@
             <a:prstDash val="solid"/>
           </a:ln>
           <a:effectLst>
-            <a:outerShdw sx="100000" sy="100000" kx="0" ky="0" algn="bl" rotWithShape="0" blurRad="88900" dist="25400" dir="5400000">
+            <a:outerShdw blurRad="88900" dist="25400" dir="5400000" algn="bl" rotWithShape="0">
               <a:srgbClr val="000000">
                 <a:alpha val="10000"/>
               </a:srgbClr>
             </a:outerShdw>
           </a:effectLst>
         </p:spPr>
+        <p:txBody>
+          <a:bodyPr/>
+          <a:lstStyle/>
+          <a:p>
+            <a:endParaRPr lang="it-IT"/>
+          </a:p>
+        </p:txBody>
       </p:sp>
       <p:sp>
         <p:nvSpPr>
@@ -6581,17 +6685,24 @@
           </a:solidFill>
           <a:ln/>
         </p:spPr>
+        <p:txBody>
+          <a:bodyPr/>
+          <a:lstStyle/>
+          <a:p>
+            <a:endParaRPr lang="it-IT"/>
+          </a:p>
+        </p:txBody>
       </p:sp>
       <p:pic>
         <p:nvPicPr>
-          <p:cNvPr id="12" name="Image 1" descr="preencoded.png">    </p:cNvPr>
+          <p:cNvPr id="12" name="Image 1" descr="preencoded.png"/>
           <p:cNvPicPr>
             <a:picLocks noChangeAspect="1"/>
           </p:cNvPicPr>
           <p:nvPr/>
         </p:nvPicPr>
         <p:blipFill>
-          <a:blip r:embed="rId2"/>
+          <a:blip r:embed="rId4"/>
           <a:stretch>
             <a:fillRect/>
           </a:stretch>
@@ -6627,7 +6738,7 @@
           <a:bodyPr wrap="square" lIns="0" tIns="0" rIns="0" bIns="0" rtlCol="0" anchor="t"/>
           <a:lstStyle/>
           <a:p>
-            <a:pPr algn="ctr" indent="0" marL="0">
+            <a:pPr marL="0" indent="0" algn="ctr">
               <a:buNone/>
             </a:pPr>
             <a:r>
@@ -6666,7 +6777,7 @@
           <a:bodyPr wrap="square" lIns="0" tIns="0" rIns="0" bIns="0" rtlCol="0" anchor="t"/>
           <a:lstStyle/>
           <a:p>
-            <a:pPr algn="ctr" indent="0" marL="0">
+            <a:pPr marL="0" indent="0" algn="ctr">
               <a:lnSpc>
                 <a:spcPct val="115000"/>
               </a:lnSpc>
@@ -6713,13 +6824,20 @@
             <a:prstDash val="solid"/>
           </a:ln>
           <a:effectLst>
-            <a:outerShdw sx="100000" sy="100000" kx="0" ky="0" algn="bl" rotWithShape="0" blurRad="88900" dist="25400" dir="5400000">
+            <a:outerShdw blurRad="88900" dist="25400" dir="5400000" algn="bl" rotWithShape="0">
               <a:srgbClr val="000000">
                 <a:alpha val="10000"/>
               </a:srgbClr>
             </a:outerShdw>
           </a:effectLst>
         </p:spPr>
+        <p:txBody>
+          <a:bodyPr/>
+          <a:lstStyle/>
+          <a:p>
+            <a:endParaRPr lang="it-IT"/>
+          </a:p>
+        </p:txBody>
       </p:sp>
       <p:sp>
         <p:nvSpPr>
@@ -6740,17 +6858,24 @@
           </a:solidFill>
           <a:ln/>
         </p:spPr>
+        <p:txBody>
+          <a:bodyPr/>
+          <a:lstStyle/>
+          <a:p>
+            <a:endParaRPr lang="it-IT"/>
+          </a:p>
+        </p:txBody>
       </p:sp>
       <p:pic>
         <p:nvPicPr>
-          <p:cNvPr id="17" name="Image 2" descr="preencoded.png">    </p:cNvPr>
+          <p:cNvPr id="17" name="Image 2" descr="preencoded.png"/>
           <p:cNvPicPr>
             <a:picLocks noChangeAspect="1"/>
           </p:cNvPicPr>
           <p:nvPr/>
         </p:nvPicPr>
         <p:blipFill>
-          <a:blip r:embed="rId3"/>
+          <a:blip r:embed="rId5"/>
           <a:stretch>
             <a:fillRect/>
           </a:stretch>
@@ -6786,7 +6911,7 @@
           <a:bodyPr wrap="square" lIns="0" tIns="0" rIns="0" bIns="0" rtlCol="0" anchor="t"/>
           <a:lstStyle/>
           <a:p>
-            <a:pPr algn="ctr" indent="0" marL="0">
+            <a:pPr marL="0" indent="0" algn="ctr">
               <a:buNone/>
             </a:pPr>
             <a:r>
@@ -6825,7 +6950,7 @@
           <a:bodyPr wrap="square" lIns="0" tIns="0" rIns="0" bIns="0" rtlCol="0" anchor="t"/>
           <a:lstStyle/>
           <a:p>
-            <a:pPr algn="ctr" indent="0" marL="0">
+            <a:pPr marL="0" indent="0" algn="ctr">
               <a:lnSpc>
                 <a:spcPct val="115000"/>
               </a:lnSpc>
@@ -6872,13 +6997,20 @@
             <a:prstDash val="solid"/>
           </a:ln>
           <a:effectLst>
-            <a:outerShdw sx="100000" sy="100000" kx="0" ky="0" algn="bl" rotWithShape="0" blurRad="88900" dist="25400" dir="5400000">
+            <a:outerShdw blurRad="88900" dist="25400" dir="5400000" algn="bl" rotWithShape="0">
               <a:srgbClr val="000000">
                 <a:alpha val="10000"/>
               </a:srgbClr>
             </a:outerShdw>
           </a:effectLst>
         </p:spPr>
+        <p:txBody>
+          <a:bodyPr/>
+          <a:lstStyle/>
+          <a:p>
+            <a:endParaRPr lang="it-IT"/>
+          </a:p>
+        </p:txBody>
       </p:sp>
       <p:sp>
         <p:nvSpPr>
@@ -6899,17 +7031,24 @@
           </a:solidFill>
           <a:ln/>
         </p:spPr>
+        <p:txBody>
+          <a:bodyPr/>
+          <a:lstStyle/>
+          <a:p>
+            <a:endParaRPr lang="it-IT"/>
+          </a:p>
+        </p:txBody>
       </p:sp>
       <p:pic>
         <p:nvPicPr>
-          <p:cNvPr id="22" name="Image 3" descr="preencoded.png">    </p:cNvPr>
+          <p:cNvPr id="22" name="Image 3" descr="preencoded.png"/>
           <p:cNvPicPr>
             <a:picLocks noChangeAspect="1"/>
           </p:cNvPicPr>
           <p:nvPr/>
         </p:nvPicPr>
         <p:blipFill>
-          <a:blip r:embed="rId4"/>
+          <a:blip r:embed="rId6"/>
           <a:stretch>
             <a:fillRect/>
           </a:stretch>
@@ -6945,7 +7084,7 @@
           <a:bodyPr wrap="square" lIns="0" tIns="0" rIns="0" bIns="0" rtlCol="0" anchor="t"/>
           <a:lstStyle/>
           <a:p>
-            <a:pPr algn="ctr" indent="0" marL="0">
+            <a:pPr marL="0" indent="0" algn="ctr">
               <a:buNone/>
             </a:pPr>
             <a:r>
@@ -6984,7 +7123,7 @@
           <a:bodyPr wrap="square" lIns="0" tIns="0" rIns="0" bIns="0" rtlCol="0" anchor="t"/>
           <a:lstStyle/>
           <a:p>
-            <a:pPr algn="ctr" indent="0" marL="0">
+            <a:pPr marL="0" indent="0" algn="ctr">
               <a:lnSpc>
                 <a:spcPct val="115000"/>
               </a:lnSpc>
@@ -7031,13 +7170,20 @@
             <a:prstDash val="solid"/>
           </a:ln>
           <a:effectLst>
-            <a:outerShdw sx="100000" sy="100000" kx="0" ky="0" algn="bl" rotWithShape="0" blurRad="88900" dist="25400" dir="5400000">
+            <a:outerShdw blurRad="88900" dist="25400" dir="5400000" algn="bl" rotWithShape="0">
               <a:srgbClr val="000000">
                 <a:alpha val="10000"/>
               </a:srgbClr>
             </a:outerShdw>
           </a:effectLst>
         </p:spPr>
+        <p:txBody>
+          <a:bodyPr/>
+          <a:lstStyle/>
+          <a:p>
+            <a:endParaRPr lang="it-IT"/>
+          </a:p>
+        </p:txBody>
       </p:sp>
       <p:sp>
         <p:nvSpPr>
@@ -7058,17 +7204,24 @@
           </a:solidFill>
           <a:ln/>
         </p:spPr>
+        <p:txBody>
+          <a:bodyPr/>
+          <a:lstStyle/>
+          <a:p>
+            <a:endParaRPr lang="it-IT"/>
+          </a:p>
+        </p:txBody>
       </p:sp>
       <p:pic>
         <p:nvPicPr>
-          <p:cNvPr id="27" name="Image 4" descr="preencoded.png">    </p:cNvPr>
+          <p:cNvPr id="27" name="Image 4" descr="preencoded.png"/>
           <p:cNvPicPr>
             <a:picLocks noChangeAspect="1"/>
           </p:cNvPicPr>
           <p:nvPr/>
         </p:nvPicPr>
         <p:blipFill>
-          <a:blip r:embed="rId5"/>
+          <a:blip r:embed="rId7"/>
           <a:stretch>
             <a:fillRect/>
           </a:stretch>
@@ -7104,7 +7257,7 @@
           <a:bodyPr wrap="square" lIns="0" tIns="0" rIns="0" bIns="0" rtlCol="0" anchor="t"/>
           <a:lstStyle/>
           <a:p>
-            <a:pPr algn="ctr" indent="0" marL="0">
+            <a:pPr marL="0" indent="0" algn="ctr">
               <a:buNone/>
             </a:pPr>
             <a:r>
@@ -7143,7 +7296,7 @@
           <a:bodyPr wrap="square" lIns="0" tIns="0" rIns="0" bIns="0" rtlCol="0" anchor="t"/>
           <a:lstStyle/>
           <a:p>
-            <a:pPr algn="ctr" indent="0" marL="0">
+            <a:pPr marL="0" indent="0" algn="ctr">
               <a:lnSpc>
                 <a:spcPct val="115000"/>
               </a:lnSpc>
@@ -7185,7 +7338,7 @@
           <a:bodyPr wrap="square" lIns="0" tIns="0" rIns="0" bIns="0" rtlCol="0" anchor="ctr"/>
           <a:lstStyle/>
           <a:p>
-            <a:pPr algn="ctr" indent="0" marL="0">
+            <a:pPr marL="0" indent="0" algn="ctr">
               <a:buNone/>
             </a:pPr>
             <a:r>
@@ -7224,7 +7377,7 @@
           <a:bodyPr wrap="square" lIns="0" tIns="0" rIns="0" bIns="0" rtlCol="0" anchor="ctr"/>
           <a:lstStyle/>
           <a:p>
-            <a:pPr indent="0" marL="0">
+            <a:pPr marL="0" indent="0">
               <a:buNone/>
             </a:pPr>
             <a:r>
@@ -7263,7 +7416,7 @@
           <a:bodyPr wrap="square" lIns="0" tIns="0" rIns="0" bIns="0" rtlCol="0" anchor="ctr"/>
           <a:lstStyle/>
           <a:p>
-            <a:pPr algn="r" indent="0" marL="0">
+            <a:pPr marL="0" indent="0" algn="r">
               <a:buNone/>
             </a:pPr>
             <a:r>
@@ -7297,6 +7450,7 @@
         <a:solidFill>
           <a:srgbClr val="FFFFFF"/>
         </a:solidFill>
+        <a:effectLst/>
       </p:bgPr>
     </p:bg>
     <p:spTree>
@@ -7334,11 +7488,11 @@
           <a:bodyPr wrap="square" lIns="0" tIns="0" rIns="0" bIns="0" rtlCol="0" anchor="ctr"/>
           <a:lstStyle/>
           <a:p>
-            <a:pPr indent="0" marL="0">
-              <a:buNone/>
-            </a:pPr>
-            <a:r>
-              <a:rPr lang="en-US" sz="1250" b="1" spc="200" kern="0" dirty="0">
+            <a:pPr marL="0" indent="0">
+              <a:buNone/>
+            </a:pPr>
+            <a:r>
+              <a:rPr lang="en-US" sz="1250" b="1" kern="0" spc="200" dirty="0">
                 <a:solidFill>
                   <a:srgbClr val="0E8A8A"/>
                 </a:solidFill>
@@ -7373,7 +7527,7 @@
           <a:bodyPr wrap="square" lIns="0" tIns="0" rIns="0" bIns="0" rtlCol="0" anchor="t"/>
           <a:lstStyle/>
           <a:p>
-            <a:pPr indent="0" marL="0">
+            <a:pPr marL="0" indent="0">
               <a:buNone/>
             </a:pPr>
             <a:r>
@@ -7417,13 +7571,20 @@
             <a:prstDash val="solid"/>
           </a:ln>
           <a:effectLst>
-            <a:outerShdw sx="100000" sy="100000" kx="0" ky="0" algn="bl" rotWithShape="0" blurRad="88900" dist="25400" dir="5400000">
+            <a:outerShdw blurRad="88900" dist="25400" dir="5400000" algn="bl" rotWithShape="0">
               <a:srgbClr val="000000">
                 <a:alpha val="10000"/>
               </a:srgbClr>
             </a:outerShdw>
           </a:effectLst>
         </p:spPr>
+        <p:txBody>
+          <a:bodyPr/>
+          <a:lstStyle/>
+          <a:p>
+            <a:endParaRPr lang="it-IT"/>
+          </a:p>
+        </p:txBody>
       </p:sp>
       <p:sp>
         <p:nvSpPr>
@@ -7444,17 +7605,24 @@
           </a:solidFill>
           <a:ln/>
         </p:spPr>
+        <p:txBody>
+          <a:bodyPr/>
+          <a:lstStyle/>
+          <a:p>
+            <a:endParaRPr lang="it-IT"/>
+          </a:p>
+        </p:txBody>
       </p:sp>
       <p:pic>
         <p:nvPicPr>
-          <p:cNvPr id="6" name="Image 0" descr="preencoded.png">    </p:cNvPr>
+          <p:cNvPr id="6" name="Image 0" descr="preencoded.png"/>
           <p:cNvPicPr>
             <a:picLocks noChangeAspect="1"/>
           </p:cNvPicPr>
           <p:nvPr/>
         </p:nvPicPr>
         <p:blipFill>
-          <a:blip r:embed="rId1"/>
+          <a:blip r:embed="rId3"/>
           <a:stretch>
             <a:fillRect/>
           </a:stretch>
@@ -7622,13 +7790,20 @@
             <a:prstDash val="solid"/>
           </a:ln>
           <a:effectLst>
-            <a:outerShdw sx="100000" sy="100000" kx="0" ky="0" algn="bl" rotWithShape="0" blurRad="88900" dist="25400" dir="5400000">
+            <a:outerShdw blurRad="88900" dist="25400" dir="5400000" algn="bl" rotWithShape="0">
               <a:srgbClr val="000000">
                 <a:alpha val="10000"/>
               </a:srgbClr>
             </a:outerShdw>
           </a:effectLst>
         </p:spPr>
+        <p:txBody>
+          <a:bodyPr/>
+          <a:lstStyle/>
+          <a:p>
+            <a:endParaRPr lang="it-IT"/>
+          </a:p>
+        </p:txBody>
       </p:sp>
       <p:sp>
         <p:nvSpPr>
@@ -7651,7 +7826,7 @@
           <a:bodyPr wrap="square" lIns="0" tIns="0" rIns="0" bIns="0" rtlCol="0" anchor="ctr"/>
           <a:lstStyle/>
           <a:p>
-            <a:pPr indent="0" marL="0">
+            <a:pPr marL="0" indent="0">
               <a:buNone/>
             </a:pPr>
             <a:r>
@@ -7690,7 +7865,7 @@
           <a:bodyPr wrap="square" lIns="0" tIns="0" rIns="0" bIns="0" rtlCol="0" anchor="ctr"/>
           <a:lstStyle/>
           <a:p>
-            <a:pPr indent="0" marL="0">
+            <a:pPr marL="0" indent="0">
               <a:buNone/>
             </a:pPr>
             <a:r>
@@ -7729,7 +7904,7 @@
           <a:bodyPr wrap="square" lIns="0" tIns="0" rIns="0" bIns="0" rtlCol="0" anchor="ctr"/>
           <a:lstStyle/>
           <a:p>
-            <a:pPr algn="r" indent="0" marL="0">
+            <a:pPr marL="0" indent="0" algn="r">
               <a:buNone/>
             </a:pPr>
             <a:r>
@@ -7763,6 +7938,7 @@
         <a:solidFill>
           <a:srgbClr val="0A1F3D"/>
         </a:solidFill>
+        <a:effectLst/>
       </p:bgPr>
     </p:bg>
     <p:spTree>
@@ -7800,11 +7976,11 @@
           <a:bodyPr wrap="square" lIns="0" tIns="0" rIns="0" bIns="0" rtlCol="0" anchor="ctr"/>
           <a:lstStyle/>
           <a:p>
-            <a:pPr indent="0" marL="0">
-              <a:buNone/>
-            </a:pPr>
-            <a:r>
-              <a:rPr lang="en-US" sz="1250" b="1" spc="200" kern="0" dirty="0">
+            <a:pPr marL="0" indent="0">
+              <a:buNone/>
+            </a:pPr>
+            <a:r>
+              <a:rPr lang="en-US" sz="1250" b="1" kern="0" spc="200" dirty="0">
                 <a:solidFill>
                   <a:srgbClr val="0E8A8A"/>
                 </a:solidFill>
@@ -7839,7 +8015,7 @@
           <a:bodyPr wrap="square" lIns="0" tIns="0" rIns="0" bIns="0" rtlCol="0" anchor="ctr"/>
           <a:lstStyle/>
           <a:p>
-            <a:pPr indent="0" marL="0">
+            <a:pPr marL="0" indent="0">
               <a:buNone/>
             </a:pPr>
             <a:r>
@@ -7878,13 +8054,20 @@
           </a:solidFill>
           <a:ln/>
           <a:effectLst>
-            <a:outerShdw sx="100000" sy="100000" kx="0" ky="0" algn="bl" rotWithShape="0" blurRad="88900" dist="25400" dir="5400000">
+            <a:outerShdw blurRad="88900" dist="25400" dir="5400000" algn="bl" rotWithShape="0">
               <a:srgbClr val="000000">
                 <a:alpha val="10000"/>
               </a:srgbClr>
             </a:outerShdw>
           </a:effectLst>
         </p:spPr>
+        <p:txBody>
+          <a:bodyPr/>
+          <a:lstStyle/>
+          <a:p>
+            <a:endParaRPr lang="it-IT"/>
+          </a:p>
+        </p:txBody>
       </p:sp>
       <p:sp>
         <p:nvSpPr>
@@ -7907,7 +8090,7 @@
           <a:bodyPr wrap="square" lIns="0" tIns="0" rIns="0" bIns="0" rtlCol="0" anchor="ctr"/>
           <a:lstStyle/>
           <a:p>
-            <a:pPr indent="0" marL="0">
+            <a:pPr marL="0" indent="0">
               <a:buNone/>
             </a:pPr>
             <a:r>
@@ -8052,13 +8235,20 @@
           </a:solidFill>
           <a:ln/>
           <a:effectLst>
-            <a:outerShdw sx="100000" sy="100000" kx="0" ky="0" algn="bl" rotWithShape="0" blurRad="88900" dist="25400" dir="5400000">
+            <a:outerShdw blurRad="88900" dist="25400" dir="5400000" algn="bl" rotWithShape="0">
               <a:srgbClr val="000000">
                 <a:alpha val="10000"/>
               </a:srgbClr>
             </a:outerShdw>
           </a:effectLst>
         </p:spPr>
+        <p:txBody>
+          <a:bodyPr/>
+          <a:lstStyle/>
+          <a:p>
+            <a:endParaRPr lang="it-IT"/>
+          </a:p>
+        </p:txBody>
       </p:sp>
       <p:sp>
         <p:nvSpPr>
@@ -8081,7 +8271,7 @@
           <a:bodyPr wrap="square" lIns="0" tIns="0" rIns="0" bIns="0" rtlCol="0" anchor="ctr"/>
           <a:lstStyle/>
           <a:p>
-            <a:pPr indent="0" marL="0">
+            <a:pPr marL="0" indent="0">
               <a:buNone/>
             </a:pPr>
             <a:r>
@@ -8247,13 +8437,20 @@
           </a:solidFill>
           <a:ln/>
           <a:effectLst>
-            <a:outerShdw sx="100000" sy="100000" kx="0" ky="0" algn="bl" rotWithShape="0" blurRad="88900" dist="25400" dir="5400000">
+            <a:outerShdw blurRad="88900" dist="25400" dir="5400000" algn="bl" rotWithShape="0">
               <a:srgbClr val="000000">
                 <a:alpha val="10000"/>
               </a:srgbClr>
             </a:outerShdw>
           </a:effectLst>
         </p:spPr>
+        <p:txBody>
+          <a:bodyPr/>
+          <a:lstStyle/>
+          <a:p>
+            <a:endParaRPr lang="it-IT"/>
+          </a:p>
+        </p:txBody>
       </p:sp>
       <p:sp>
         <p:nvSpPr>
@@ -8276,7 +8473,7 @@
           <a:bodyPr wrap="square" lIns="0" tIns="0" rIns="0" bIns="0" rtlCol="0" anchor="ctr"/>
           <a:lstStyle/>
           <a:p>
-            <a:pPr algn="ctr" indent="0" marL="0">
+            <a:pPr marL="0" indent="0" algn="ctr">
               <a:buNone/>
             </a:pPr>
             <a:r>
@@ -8310,6 +8507,7 @@
         <a:solidFill>
           <a:srgbClr val="FFFFFF"/>
         </a:solidFill>
+        <a:effectLst/>
       </p:bgPr>
     </p:bg>
     <p:spTree>
@@ -8347,11 +8545,11 @@
           <a:bodyPr wrap="square" lIns="0" tIns="0" rIns="0" bIns="0" rtlCol="0" anchor="ctr"/>
           <a:lstStyle/>
           <a:p>
-            <a:pPr indent="0" marL="0">
-              <a:buNone/>
-            </a:pPr>
-            <a:r>
-              <a:rPr lang="en-US" sz="1250" b="1" spc="200" kern="0" dirty="0">
+            <a:pPr marL="0" indent="0">
+              <a:buNone/>
+            </a:pPr>
+            <a:r>
+              <a:rPr lang="en-US" sz="1250" b="1" kern="0" spc="200" dirty="0">
                 <a:solidFill>
                   <a:srgbClr val="E2692C"/>
                 </a:solidFill>
@@ -8386,7 +8584,7 @@
           <a:bodyPr wrap="square" lIns="0" tIns="0" rIns="0" bIns="0" rtlCol="0" anchor="t"/>
           <a:lstStyle/>
           <a:p>
-            <a:pPr indent="0" marL="0">
+            <a:pPr marL="0" indent="0">
               <a:buNone/>
             </a:pPr>
             <a:r>
@@ -8427,8 +8625,20 @@
             <a:tbl>
               <a:tblPr/>
               <a:tblGrid>
-                <a:gridCol w="2194560"/>
-                <a:gridCol w="5943600"/>
+                <a:gridCol w="2194560">
+                  <a:extLst>
+                    <a:ext uri="{9D8B030D-6E8A-4147-A177-3AD203B41FA5}">
+                      <a16:colId xmlns:a16="http://schemas.microsoft.com/office/drawing/2014/main" val="20000"/>
+                    </a:ext>
+                  </a:extLst>
+                </a:gridCol>
+                <a:gridCol w="5943600">
+                  <a:extLst>
+                    <a:ext uri="{9D8B030D-6E8A-4147-A177-3AD203B41FA5}">
+                      <a16:colId xmlns:a16="http://schemas.microsoft.com/office/drawing/2014/main" val="20001"/>
+                    </a:ext>
+                  </a:extLst>
+                </a:gridCol>
               </a:tblGrid>
               <a:tr h="0">
                 <a:tc>
@@ -8436,7 +8646,7 @@
                     <a:bodyPr/>
                     <a:lstStyle/>
                     <a:p>
-                      <a:pPr indent="0" marL="0">
+                      <a:pPr marL="0" indent="0">
                         <a:buNone/>
                       </a:pPr>
                       <a:r>
@@ -8504,7 +8714,7 @@
                     <a:bodyPr/>
                     <a:lstStyle/>
                     <a:p>
-                      <a:pPr indent="0" marL="0">
+                      <a:pPr marL="0" indent="0">
                         <a:buNone/>
                       </a:pPr>
                       <a:r>
@@ -8564,6 +8774,11 @@
                     </a:lnB>
                   </a:tcPr>
                 </a:tc>
+                <a:extLst>
+                  <a:ext uri="{0D108BD9-81ED-4DB2-BD59-A6C34878D82A}">
+                    <a16:rowId xmlns:a16="http://schemas.microsoft.com/office/drawing/2014/main" val="10000"/>
+                  </a:ext>
+                </a:extLst>
               </a:tr>
               <a:tr h="0">
                 <a:tc>
@@ -8571,7 +8786,7 @@
                     <a:bodyPr/>
                     <a:lstStyle/>
                     <a:p>
-                      <a:pPr indent="0" marL="0">
+                      <a:pPr marL="0" indent="0">
                         <a:buNone/>
                       </a:pPr>
                       <a:r>
@@ -8639,7 +8854,7 @@
                     <a:bodyPr/>
                     <a:lstStyle/>
                     <a:p>
-                      <a:pPr indent="0" marL="0">
+                      <a:pPr marL="0" indent="0">
                         <a:buNone/>
                       </a:pPr>
                       <a:r>
@@ -8699,6 +8914,11 @@
                     </a:lnB>
                   </a:tcPr>
                 </a:tc>
+                <a:extLst>
+                  <a:ext uri="{0D108BD9-81ED-4DB2-BD59-A6C34878D82A}">
+                    <a16:rowId xmlns:a16="http://schemas.microsoft.com/office/drawing/2014/main" val="10001"/>
+                  </a:ext>
+                </a:extLst>
               </a:tr>
               <a:tr h="0">
                 <a:tc>
@@ -8706,7 +8926,7 @@
                     <a:bodyPr/>
                     <a:lstStyle/>
                     <a:p>
-                      <a:pPr indent="0" marL="0">
+                      <a:pPr marL="0" indent="0">
                         <a:buNone/>
                       </a:pPr>
                       <a:r>
@@ -8774,7 +8994,7 @@
                     <a:bodyPr/>
                     <a:lstStyle/>
                     <a:p>
-                      <a:pPr indent="0" marL="0">
+                      <a:pPr marL="0" indent="0">
                         <a:buNone/>
                       </a:pPr>
                       <a:r>
@@ -8834,6 +9054,11 @@
                     </a:lnB>
                   </a:tcPr>
                 </a:tc>
+                <a:extLst>
+                  <a:ext uri="{0D108BD9-81ED-4DB2-BD59-A6C34878D82A}">
+                    <a16:rowId xmlns:a16="http://schemas.microsoft.com/office/drawing/2014/main" val="10002"/>
+                  </a:ext>
+                </a:extLst>
               </a:tr>
               <a:tr h="0">
                 <a:tc>
@@ -8841,7 +9066,7 @@
                     <a:bodyPr/>
                     <a:lstStyle/>
                     <a:p>
-                      <a:pPr indent="0" marL="0">
+                      <a:pPr marL="0" indent="0">
                         <a:buNone/>
                       </a:pPr>
                       <a:r>
@@ -8909,7 +9134,7 @@
                     <a:bodyPr/>
                     <a:lstStyle/>
                     <a:p>
-                      <a:pPr indent="0" marL="0">
+                      <a:pPr marL="0" indent="0">
                         <a:buNone/>
                       </a:pPr>
                       <a:r>
@@ -8969,6 +9194,11 @@
                     </a:lnB>
                   </a:tcPr>
                 </a:tc>
+                <a:extLst>
+                  <a:ext uri="{0D108BD9-81ED-4DB2-BD59-A6C34878D82A}">
+                    <a16:rowId xmlns:a16="http://schemas.microsoft.com/office/drawing/2014/main" val="10003"/>
+                  </a:ext>
+                </a:extLst>
               </a:tr>
               <a:tr h="0">
                 <a:tc>
@@ -8976,7 +9206,7 @@
                     <a:bodyPr/>
                     <a:lstStyle/>
                     <a:p>
-                      <a:pPr indent="0" marL="0">
+                      <a:pPr marL="0" indent="0">
                         <a:buNone/>
                       </a:pPr>
                       <a:r>
@@ -9044,7 +9274,7 @@
                     <a:bodyPr/>
                     <a:lstStyle/>
                     <a:p>
-                      <a:pPr indent="0" marL="0">
+                      <a:pPr marL="0" indent="0">
                         <a:buNone/>
                       </a:pPr>
                       <a:r>
@@ -9104,6 +9334,11 @@
                     </a:lnB>
                   </a:tcPr>
                 </a:tc>
+                <a:extLst>
+                  <a:ext uri="{0D108BD9-81ED-4DB2-BD59-A6C34878D82A}">
+                    <a16:rowId xmlns:a16="http://schemas.microsoft.com/office/drawing/2014/main" val="10004"/>
+                  </a:ext>
+                </a:extLst>
               </a:tr>
             </a:tbl>
           </a:graphicData>
@@ -9130,7 +9365,7 @@
           <a:bodyPr wrap="square" lIns="0" tIns="0" rIns="0" bIns="0" rtlCol="0" anchor="ctr"/>
           <a:lstStyle/>
           <a:p>
-            <a:pPr indent="0" marL="0">
+            <a:pPr marL="0" indent="0">
               <a:buNone/>
             </a:pPr>
             <a:r>
@@ -9169,7 +9404,7 @@
           <a:bodyPr wrap="square" lIns="0" tIns="0" rIns="0" bIns="0" rtlCol="0" anchor="ctr"/>
           <a:lstStyle/>
           <a:p>
-            <a:pPr algn="r" indent="0" marL="0">
+            <a:pPr marL="0" indent="0" algn="r">
               <a:buNone/>
             </a:pPr>
             <a:r>
@@ -9203,6 +9438,7 @@
         <a:solidFill>
           <a:srgbClr val="FFFFFF"/>
         </a:solidFill>
+        <a:effectLst/>
       </p:bgPr>
     </p:bg>
     <p:spTree>
@@ -9240,11 +9476,11 @@
           <a:bodyPr wrap="square" lIns="0" tIns="0" rIns="0" bIns="0" rtlCol="0" anchor="ctr"/>
           <a:lstStyle/>
           <a:p>
-            <a:pPr indent="0" marL="0">
-              <a:buNone/>
-            </a:pPr>
-            <a:r>
-              <a:rPr lang="en-US" sz="1250" b="1" spc="200" kern="0" dirty="0">
+            <a:pPr marL="0" indent="0">
+              <a:buNone/>
+            </a:pPr>
+            <a:r>
+              <a:rPr lang="en-US" sz="1250" b="1" kern="0" spc="200" dirty="0">
                 <a:solidFill>
                   <a:srgbClr val="E2692C"/>
                 </a:solidFill>
@@ -9279,7 +9515,7 @@
           <a:bodyPr wrap="square" lIns="0" tIns="0" rIns="0" bIns="0" rtlCol="0" anchor="t"/>
           <a:lstStyle/>
           <a:p>
-            <a:pPr indent="0" marL="0">
+            <a:pPr marL="0" indent="0">
               <a:buNone/>
             </a:pPr>
             <a:r>
@@ -9323,13 +9559,20 @@
             <a:prstDash val="solid"/>
           </a:ln>
           <a:effectLst>
-            <a:outerShdw sx="100000" sy="100000" kx="0" ky="0" algn="bl" rotWithShape="0" blurRad="88900" dist="25400" dir="5400000">
+            <a:outerShdw blurRad="88900" dist="25400" dir="5400000" algn="bl" rotWithShape="0">
               <a:srgbClr val="000000">
                 <a:alpha val="10000"/>
               </a:srgbClr>
             </a:outerShdw>
           </a:effectLst>
         </p:spPr>
+        <p:txBody>
+          <a:bodyPr/>
+          <a:lstStyle/>
+          <a:p>
+            <a:endParaRPr lang="it-IT"/>
+          </a:p>
+        </p:txBody>
       </p:sp>
       <p:sp>
         <p:nvSpPr>
@@ -9352,7 +9595,7 @@
           <a:bodyPr wrap="square" lIns="0" tIns="0" rIns="0" bIns="0" rtlCol="0" anchor="ctr"/>
           <a:lstStyle/>
           <a:p>
-            <a:pPr indent="0" marL="0">
+            <a:pPr marL="0" indent="0">
               <a:buNone/>
             </a:pPr>
             <a:r>
@@ -9476,7 +9719,7 @@
           <a:bodyPr wrap="square" lIns="0" tIns="0" rIns="0" bIns="0" rtlCol="0" anchor="ctr"/>
           <a:lstStyle/>
           <a:p>
-            <a:pPr indent="0" marL="0">
+            <a:pPr marL="0" indent="0">
               <a:buNone/>
             </a:pPr>
             <a:r>
@@ -9515,7 +9758,7 @@
           <a:bodyPr wrap="square" lIns="0" tIns="0" rIns="0" bIns="0" rtlCol="0" anchor="ctr"/>
           <a:lstStyle/>
           <a:p>
-            <a:pPr algn="r" indent="0" marL="0">
+            <a:pPr marL="0" indent="0" algn="r">
               <a:buNone/>
             </a:pPr>
             <a:r>
@@ -9549,6 +9792,7 @@
         <a:solidFill>
           <a:srgbClr val="FFFFFF"/>
         </a:solidFill>
+        <a:effectLst/>
       </p:bgPr>
     </p:bg>
     <p:spTree>
@@ -9586,11 +9830,11 @@
           <a:bodyPr wrap="square" lIns="0" tIns="0" rIns="0" bIns="0" rtlCol="0" anchor="ctr"/>
           <a:lstStyle/>
           <a:p>
-            <a:pPr indent="0" marL="0">
-              <a:buNone/>
-            </a:pPr>
-            <a:r>
-              <a:rPr lang="en-US" sz="1250" b="1" spc="200" kern="0" dirty="0">
+            <a:pPr marL="0" indent="0">
+              <a:buNone/>
+            </a:pPr>
+            <a:r>
+              <a:rPr lang="en-US" sz="1250" b="1" kern="0" spc="200" dirty="0">
                 <a:solidFill>
                   <a:srgbClr val="E2692C"/>
                 </a:solidFill>
@@ -9625,7 +9869,7 @@
           <a:bodyPr wrap="square" lIns="0" tIns="0" rIns="0" bIns="0" rtlCol="0" anchor="t"/>
           <a:lstStyle/>
           <a:p>
-            <a:pPr indent="0" marL="0">
+            <a:pPr marL="0" indent="0">
               <a:buNone/>
             </a:pPr>
             <a:r>
@@ -9669,13 +9913,20 @@
             <a:prstDash val="solid"/>
           </a:ln>
           <a:effectLst>
-            <a:outerShdw sx="100000" sy="100000" kx="0" ky="0" algn="bl" rotWithShape="0" blurRad="88900" dist="25400" dir="5400000">
+            <a:outerShdw blurRad="88900" dist="25400" dir="5400000" algn="bl" rotWithShape="0">
               <a:srgbClr val="000000">
                 <a:alpha val="10000"/>
               </a:srgbClr>
             </a:outerShdw>
           </a:effectLst>
         </p:spPr>
+        <p:txBody>
+          <a:bodyPr/>
+          <a:lstStyle/>
+          <a:p>
+            <a:endParaRPr lang="it-IT"/>
+          </a:p>
+        </p:txBody>
       </p:sp>
       <p:sp>
         <p:nvSpPr>
@@ -9696,17 +9947,24 @@
           </a:solidFill>
           <a:ln/>
         </p:spPr>
+        <p:txBody>
+          <a:bodyPr/>
+          <a:lstStyle/>
+          <a:p>
+            <a:endParaRPr lang="it-IT"/>
+          </a:p>
+        </p:txBody>
       </p:sp>
       <p:pic>
         <p:nvPicPr>
-          <p:cNvPr id="6" name="Image 0" descr="preencoded.png">    </p:cNvPr>
+          <p:cNvPr id="6" name="Image 0" descr="preencoded.png"/>
           <p:cNvPicPr>
             <a:picLocks noChangeAspect="1"/>
           </p:cNvPicPr>
           <p:nvPr/>
         </p:nvPicPr>
         <p:blipFill>
-          <a:blip r:embed="rId1"/>
+          <a:blip r:embed="rId3"/>
           <a:stretch>
             <a:fillRect/>
           </a:stretch>
@@ -9742,7 +10000,7 @@
           <a:bodyPr wrap="square" lIns="0" tIns="0" rIns="0" bIns="0" rtlCol="0" anchor="t"/>
           <a:lstStyle/>
           <a:p>
-            <a:pPr algn="ctr" indent="0" marL="0">
+            <a:pPr marL="0" indent="0" algn="ctr">
               <a:buNone/>
             </a:pPr>
             <a:r>
@@ -9781,7 +10039,7 @@
           <a:bodyPr wrap="square" lIns="0" tIns="0" rIns="0" bIns="0" rtlCol="0" anchor="t"/>
           <a:lstStyle/>
           <a:p>
-            <a:pPr algn="ctr" indent="0" marL="0">
+            <a:pPr marL="0" indent="0" algn="ctr">
               <a:lnSpc>
                 <a:spcPct val="115000"/>
               </a:lnSpc>
@@ -9828,13 +10086,20 @@
             <a:prstDash val="solid"/>
           </a:ln>
           <a:effectLst>
-            <a:outerShdw sx="100000" sy="100000" kx="0" ky="0" algn="bl" rotWithShape="0" blurRad="88900" dist="25400" dir="5400000">
+            <a:outerShdw blurRad="88900" dist="25400" dir="5400000" algn="bl" rotWithShape="0">
               <a:srgbClr val="000000">
                 <a:alpha val="10000"/>
               </a:srgbClr>
             </a:outerShdw>
           </a:effectLst>
         </p:spPr>
+        <p:txBody>
+          <a:bodyPr/>
+          <a:lstStyle/>
+          <a:p>
+            <a:endParaRPr lang="it-IT"/>
+          </a:p>
+        </p:txBody>
       </p:sp>
       <p:sp>
         <p:nvSpPr>
@@ -9855,17 +10120,24 @@
           </a:solidFill>
           <a:ln/>
         </p:spPr>
+        <p:txBody>
+          <a:bodyPr/>
+          <a:lstStyle/>
+          <a:p>
+            <a:endParaRPr lang="it-IT"/>
+          </a:p>
+        </p:txBody>
       </p:sp>
       <p:pic>
         <p:nvPicPr>
-          <p:cNvPr id="11" name="Image 1" descr="preencoded.png">    </p:cNvPr>
+          <p:cNvPr id="11" name="Image 1" descr="preencoded.png"/>
           <p:cNvPicPr>
             <a:picLocks noChangeAspect="1"/>
           </p:cNvPicPr>
           <p:nvPr/>
         </p:nvPicPr>
         <p:blipFill>
-          <a:blip r:embed="rId2"/>
+          <a:blip r:embed="rId4"/>
           <a:stretch>
             <a:fillRect/>
           </a:stretch>
@@ -9901,7 +10173,7 @@
           <a:bodyPr wrap="square" lIns="0" tIns="0" rIns="0" bIns="0" rtlCol="0" anchor="t"/>
           <a:lstStyle/>
           <a:p>
-            <a:pPr algn="ctr" indent="0" marL="0">
+            <a:pPr marL="0" indent="0" algn="ctr">
               <a:buNone/>
             </a:pPr>
             <a:r>
@@ -9940,7 +10212,7 @@
           <a:bodyPr wrap="square" lIns="0" tIns="0" rIns="0" bIns="0" rtlCol="0" anchor="t"/>
           <a:lstStyle/>
           <a:p>
-            <a:pPr algn="ctr" indent="0" marL="0">
+            <a:pPr marL="0" indent="0" algn="ctr">
               <a:lnSpc>
                 <a:spcPct val="115000"/>
               </a:lnSpc>
@@ -9987,13 +10259,20 @@
             <a:prstDash val="solid"/>
           </a:ln>
           <a:effectLst>
-            <a:outerShdw sx="100000" sy="100000" kx="0" ky="0" algn="bl" rotWithShape="0" blurRad="88900" dist="25400" dir="5400000">
+            <a:outerShdw blurRad="88900" dist="25400" dir="5400000" algn="bl" rotWithShape="0">
               <a:srgbClr val="000000">
                 <a:alpha val="10000"/>
               </a:srgbClr>
             </a:outerShdw>
           </a:effectLst>
         </p:spPr>
+        <p:txBody>
+          <a:bodyPr/>
+          <a:lstStyle/>
+          <a:p>
+            <a:endParaRPr lang="it-IT"/>
+          </a:p>
+        </p:txBody>
       </p:sp>
       <p:sp>
         <p:nvSpPr>
@@ -10014,17 +10293,24 @@
           </a:solidFill>
           <a:ln/>
         </p:spPr>
+        <p:txBody>
+          <a:bodyPr/>
+          <a:lstStyle/>
+          <a:p>
+            <a:endParaRPr lang="it-IT"/>
+          </a:p>
+        </p:txBody>
       </p:sp>
       <p:pic>
         <p:nvPicPr>
-          <p:cNvPr id="16" name="Image 2" descr="preencoded.png">    </p:cNvPr>
+          <p:cNvPr id="16" name="Image 2" descr="preencoded.png"/>
           <p:cNvPicPr>
             <a:picLocks noChangeAspect="1"/>
           </p:cNvPicPr>
           <p:nvPr/>
         </p:nvPicPr>
         <p:blipFill>
-          <a:blip r:embed="rId3"/>
+          <a:blip r:embed="rId5"/>
           <a:stretch>
             <a:fillRect/>
           </a:stretch>
@@ -10060,7 +10346,7 @@
           <a:bodyPr wrap="square" lIns="0" tIns="0" rIns="0" bIns="0" rtlCol="0" anchor="t"/>
           <a:lstStyle/>
           <a:p>
-            <a:pPr algn="ctr" indent="0" marL="0">
+            <a:pPr marL="0" indent="0" algn="ctr">
               <a:buNone/>
             </a:pPr>
             <a:r>
@@ -10099,7 +10385,7 @@
           <a:bodyPr wrap="square" lIns="0" tIns="0" rIns="0" bIns="0" rtlCol="0" anchor="t"/>
           <a:lstStyle/>
           <a:p>
-            <a:pPr algn="ctr" indent="0" marL="0">
+            <a:pPr marL="0" indent="0" algn="ctr">
               <a:lnSpc>
                 <a:spcPct val="115000"/>
               </a:lnSpc>
@@ -10146,13 +10432,20 @@
             <a:prstDash val="solid"/>
           </a:ln>
           <a:effectLst>
-            <a:outerShdw sx="100000" sy="100000" kx="0" ky="0" algn="bl" rotWithShape="0" blurRad="88900" dist="25400" dir="5400000">
+            <a:outerShdw blurRad="88900" dist="25400" dir="5400000" algn="bl" rotWithShape="0">
               <a:srgbClr val="000000">
                 <a:alpha val="10000"/>
               </a:srgbClr>
             </a:outerShdw>
           </a:effectLst>
         </p:spPr>
+        <p:txBody>
+          <a:bodyPr/>
+          <a:lstStyle/>
+          <a:p>
+            <a:endParaRPr lang="it-IT"/>
+          </a:p>
+        </p:txBody>
       </p:sp>
       <p:sp>
         <p:nvSpPr>
@@ -10173,17 +10466,24 @@
           </a:solidFill>
           <a:ln/>
         </p:spPr>
+        <p:txBody>
+          <a:bodyPr/>
+          <a:lstStyle/>
+          <a:p>
+            <a:endParaRPr lang="it-IT"/>
+          </a:p>
+        </p:txBody>
       </p:sp>
       <p:pic>
         <p:nvPicPr>
-          <p:cNvPr id="21" name="Image 3" descr="preencoded.png">    </p:cNvPr>
+          <p:cNvPr id="21" name="Image 3" descr="preencoded.png"/>
           <p:cNvPicPr>
             <a:picLocks noChangeAspect="1"/>
           </p:cNvPicPr>
           <p:nvPr/>
         </p:nvPicPr>
         <p:blipFill>
-          <a:blip r:embed="rId4"/>
+          <a:blip r:embed="rId6"/>
           <a:stretch>
             <a:fillRect/>
           </a:stretch>
@@ -10219,7 +10519,7 @@
           <a:bodyPr wrap="square" lIns="0" tIns="0" rIns="0" bIns="0" rtlCol="0" anchor="t"/>
           <a:lstStyle/>
           <a:p>
-            <a:pPr algn="ctr" indent="0" marL="0">
+            <a:pPr marL="0" indent="0" algn="ctr">
               <a:buNone/>
             </a:pPr>
             <a:r>
@@ -10258,7 +10558,7 @@
           <a:bodyPr wrap="square" lIns="0" tIns="0" rIns="0" bIns="0" rtlCol="0" anchor="t"/>
           <a:lstStyle/>
           <a:p>
-            <a:pPr algn="ctr" indent="0" marL="0">
+            <a:pPr marL="0" indent="0" algn="ctr">
               <a:lnSpc>
                 <a:spcPct val="115000"/>
               </a:lnSpc>
@@ -10300,7 +10600,7 @@
           <a:bodyPr wrap="square" lIns="0" tIns="0" rIns="0" bIns="0" rtlCol="0" anchor="ctr"/>
           <a:lstStyle/>
           <a:p>
-            <a:pPr algn="ctr" indent="0" marL="0">
+            <a:pPr marL="0" indent="0" algn="ctr">
               <a:buNone/>
             </a:pPr>
             <a:r>
@@ -10339,7 +10639,7 @@
           <a:bodyPr wrap="square" lIns="0" tIns="0" rIns="0" bIns="0" rtlCol="0" anchor="ctr"/>
           <a:lstStyle/>
           <a:p>
-            <a:pPr indent="0" marL="0">
+            <a:pPr marL="0" indent="0">
               <a:buNone/>
             </a:pPr>
             <a:r>
@@ -10378,7 +10678,7 @@
           <a:bodyPr wrap="square" lIns="0" tIns="0" rIns="0" bIns="0" rtlCol="0" anchor="ctr"/>
           <a:lstStyle/>
           <a:p>
-            <a:pPr algn="r" indent="0" marL="0">
+            <a:pPr marL="0" indent="0" algn="r">
               <a:buNone/>
             </a:pPr>
             <a:r>
@@ -10412,6 +10712,7 @@
         <a:solidFill>
           <a:srgbClr val="FFFFFF"/>
         </a:solidFill>
+        <a:effectLst/>
       </p:bgPr>
     </p:bg>
     <p:spTree>
@@ -10449,11 +10750,11 @@
           <a:bodyPr wrap="square" lIns="0" tIns="0" rIns="0" bIns="0" rtlCol="0" anchor="ctr"/>
           <a:lstStyle/>
           <a:p>
-            <a:pPr indent="0" marL="0">
-              <a:buNone/>
-            </a:pPr>
-            <a:r>
-              <a:rPr lang="en-US" sz="1250" b="1" spc="200" kern="0" dirty="0">
+            <a:pPr marL="0" indent="0">
+              <a:buNone/>
+            </a:pPr>
+            <a:r>
+              <a:rPr lang="en-US" sz="1250" b="1" kern="0" spc="200" dirty="0">
                 <a:solidFill>
                   <a:srgbClr val="0E8A8A"/>
                 </a:solidFill>
@@ -10488,7 +10789,7 @@
           <a:bodyPr wrap="square" lIns="0" tIns="0" rIns="0" bIns="0" rtlCol="0" anchor="t"/>
           <a:lstStyle/>
           <a:p>
-            <a:pPr indent="0" marL="0">
+            <a:pPr marL="0" indent="0">
               <a:buNone/>
             </a:pPr>
             <a:r>
@@ -10638,24 +10939,31 @@
             <a:prstDash val="solid"/>
           </a:ln>
           <a:effectLst>
-            <a:outerShdw sx="100000" sy="100000" kx="0" ky="0" algn="bl" rotWithShape="0" blurRad="88900" dist="25400" dir="5400000">
+            <a:outerShdw blurRad="88900" dist="25400" dir="5400000" algn="bl" rotWithShape="0">
               <a:srgbClr val="000000">
                 <a:alpha val="10000"/>
               </a:srgbClr>
             </a:outerShdw>
           </a:effectLst>
         </p:spPr>
+        <p:txBody>
+          <a:bodyPr/>
+          <a:lstStyle/>
+          <a:p>
+            <a:endParaRPr lang="it-IT"/>
+          </a:p>
+        </p:txBody>
       </p:sp>
       <p:pic>
         <p:nvPicPr>
-          <p:cNvPr id="6" name="Image 0" descr="preencoded.png">    </p:cNvPr>
+          <p:cNvPr id="6" name="Image 0" descr="preencoded.png"/>
           <p:cNvPicPr>
             <a:picLocks noChangeAspect="1"/>
           </p:cNvPicPr>
           <p:nvPr/>
         </p:nvPicPr>
         <p:blipFill>
-          <a:blip r:embed="rId1"/>
+          <a:blip r:embed="rId3"/>
           <a:stretch>
             <a:fillRect/>
           </a:stretch>
@@ -10691,7 +10999,7 @@
           <a:bodyPr wrap="square" lIns="0" tIns="0" rIns="0" bIns="0" rtlCol="0" anchor="ctr"/>
           <a:lstStyle/>
           <a:p>
-            <a:pPr indent="0" marL="0">
+            <a:pPr marL="0" indent="0">
               <a:buNone/>
             </a:pPr>
             <a:r>
@@ -10735,24 +11043,31 @@
             <a:prstDash val="solid"/>
           </a:ln>
           <a:effectLst>
-            <a:outerShdw sx="100000" sy="100000" kx="0" ky="0" algn="bl" rotWithShape="0" blurRad="88900" dist="25400" dir="5400000">
+            <a:outerShdw blurRad="88900" dist="25400" dir="5400000" algn="bl" rotWithShape="0">
               <a:srgbClr val="000000">
                 <a:alpha val="10000"/>
               </a:srgbClr>
             </a:outerShdw>
           </a:effectLst>
         </p:spPr>
+        <p:txBody>
+          <a:bodyPr/>
+          <a:lstStyle/>
+          <a:p>
+            <a:endParaRPr lang="it-IT"/>
+          </a:p>
+        </p:txBody>
       </p:sp>
       <p:pic>
         <p:nvPicPr>
-          <p:cNvPr id="9" name="Image 1" descr="preencoded.png">    </p:cNvPr>
+          <p:cNvPr id="9" name="Image 1" descr="preencoded.png"/>
           <p:cNvPicPr>
             <a:picLocks noChangeAspect="1"/>
           </p:cNvPicPr>
           <p:nvPr/>
         </p:nvPicPr>
         <p:blipFill>
-          <a:blip r:embed="rId2"/>
+          <a:blip r:embed="rId4"/>
           <a:stretch>
             <a:fillRect/>
           </a:stretch>
@@ -10788,7 +11103,7 @@
           <a:bodyPr wrap="square" lIns="0" tIns="0" rIns="0" bIns="0" rtlCol="0" anchor="ctr"/>
           <a:lstStyle/>
           <a:p>
-            <a:pPr algn="ctr" indent="0" marL="0">
+            <a:pPr marL="0" indent="0" algn="ctr">
               <a:buNone/>
             </a:pPr>
             <a:r>
@@ -10805,7 +11120,7 @@
             <a:endParaRPr lang="en-US" sz="1050" dirty="0"/>
           </a:p>
           <a:p>
-            <a:pPr algn="ctr" indent="0" marL="0">
+            <a:pPr marL="0" indent="0" algn="ctr">
               <a:buNone/>
             </a:pPr>
             <a:r>
@@ -10849,24 +11164,31 @@
             <a:prstDash val="solid"/>
           </a:ln>
           <a:effectLst>
-            <a:outerShdw sx="100000" sy="100000" kx="0" ky="0" algn="bl" rotWithShape="0" blurRad="88900" dist="25400" dir="5400000">
+            <a:outerShdw blurRad="88900" dist="25400" dir="5400000" algn="bl" rotWithShape="0">
               <a:srgbClr val="000000">
                 <a:alpha val="10000"/>
               </a:srgbClr>
             </a:outerShdw>
           </a:effectLst>
         </p:spPr>
+        <p:txBody>
+          <a:bodyPr/>
+          <a:lstStyle/>
+          <a:p>
+            <a:endParaRPr lang="it-IT"/>
+          </a:p>
+        </p:txBody>
       </p:sp>
       <p:pic>
         <p:nvPicPr>
-          <p:cNvPr id="12" name="Image 2" descr="preencoded.png">    </p:cNvPr>
+          <p:cNvPr id="12" name="Image 2" descr="preencoded.png"/>
           <p:cNvPicPr>
             <a:picLocks noChangeAspect="1"/>
           </p:cNvPicPr>
           <p:nvPr/>
         </p:nvPicPr>
         <p:blipFill>
-          <a:blip r:embed="rId3"/>
+          <a:blip r:embed="rId5"/>
           <a:stretch>
             <a:fillRect/>
           </a:stretch>
@@ -10902,7 +11224,7 @@
           <a:bodyPr wrap="square" lIns="0" tIns="0" rIns="0" bIns="0" rtlCol="0" anchor="ctr"/>
           <a:lstStyle/>
           <a:p>
-            <a:pPr algn="ctr" indent="0" marL="0">
+            <a:pPr marL="0" indent="0" algn="ctr">
               <a:buNone/>
             </a:pPr>
             <a:r>
@@ -10919,7 +11241,7 @@
             <a:endParaRPr lang="en-US" sz="1050" dirty="0"/>
           </a:p>
           <a:p>
-            <a:pPr algn="ctr" indent="0" marL="0">
+            <a:pPr marL="0" indent="0" algn="ctr">
               <a:buNone/>
             </a:pPr>
             <a:r>
@@ -10963,24 +11285,31 @@
             <a:prstDash val="solid"/>
           </a:ln>
           <a:effectLst>
-            <a:outerShdw sx="100000" sy="100000" kx="0" ky="0" algn="bl" rotWithShape="0" blurRad="88900" dist="25400" dir="5400000">
+            <a:outerShdw blurRad="88900" dist="25400" dir="5400000" algn="bl" rotWithShape="0">
               <a:srgbClr val="000000">
                 <a:alpha val="10000"/>
               </a:srgbClr>
             </a:outerShdw>
           </a:effectLst>
         </p:spPr>
+        <p:txBody>
+          <a:bodyPr/>
+          <a:lstStyle/>
+          <a:p>
+            <a:endParaRPr lang="it-IT"/>
+          </a:p>
+        </p:txBody>
       </p:sp>
       <p:pic>
         <p:nvPicPr>
-          <p:cNvPr id="15" name="Image 3" descr="preencoded.png">    </p:cNvPr>
+          <p:cNvPr id="15" name="Image 3" descr="preencoded.png"/>
           <p:cNvPicPr>
             <a:picLocks noChangeAspect="1"/>
           </p:cNvPicPr>
           <p:nvPr/>
         </p:nvPicPr>
         <p:blipFill>
-          <a:blip r:embed="rId4"/>
+          <a:blip r:embed="rId6"/>
           <a:stretch>
             <a:fillRect/>
           </a:stretch>
@@ -11016,7 +11345,7 @@
           <a:bodyPr wrap="square" lIns="0" tIns="0" rIns="0" bIns="0" rtlCol="0" anchor="ctr"/>
           <a:lstStyle/>
           <a:p>
-            <a:pPr algn="ctr" indent="0" marL="0">
+            <a:pPr marL="0" indent="0" algn="ctr">
               <a:buNone/>
             </a:pPr>
             <a:r>
@@ -11033,7 +11362,7 @@
             <a:endParaRPr lang="en-US" sz="1050" dirty="0"/>
           </a:p>
           <a:p>
-            <a:pPr algn="ctr" indent="0" marL="0">
+            <a:pPr marL="0" indent="0" algn="ctr">
               <a:buNone/>
             </a:pPr>
             <a:r>
@@ -11070,6 +11399,13 @@
           </a:solidFill>
           <a:ln/>
         </p:spPr>
+        <p:txBody>
+          <a:bodyPr/>
+          <a:lstStyle/>
+          <a:p>
+            <a:endParaRPr lang="it-IT"/>
+          </a:p>
+        </p:txBody>
       </p:sp>
       <p:sp>
         <p:nvSpPr>
@@ -11090,6 +11426,13 @@
           </a:solidFill>
           <a:ln/>
         </p:spPr>
+        <p:txBody>
+          <a:bodyPr/>
+          <a:lstStyle/>
+          <a:p>
+            <a:endParaRPr lang="it-IT"/>
+          </a:p>
+        </p:txBody>
       </p:sp>
       <p:sp>
         <p:nvSpPr>
@@ -11115,17 +11458,24 @@
             <a:prstDash val="solid"/>
           </a:ln>
         </p:spPr>
+        <p:txBody>
+          <a:bodyPr/>
+          <a:lstStyle/>
+          <a:p>
+            <a:endParaRPr lang="it-IT"/>
+          </a:p>
+        </p:txBody>
       </p:sp>
       <p:pic>
         <p:nvPicPr>
-          <p:cNvPr id="20" name="Image 4" descr="preencoded.png">    </p:cNvPr>
+          <p:cNvPr id="20" name="Image 4" descr="preencoded.png"/>
           <p:cNvPicPr>
             <a:picLocks noChangeAspect="1"/>
           </p:cNvPicPr>
           <p:nvPr/>
         </p:nvPicPr>
         <p:blipFill>
-          <a:blip r:embed="rId5"/>
+          <a:blip r:embed="rId7"/>
           <a:stretch>
             <a:fillRect/>
           </a:stretch>
@@ -11161,7 +11511,7 @@
           <a:bodyPr wrap="square" lIns="0" tIns="0" rIns="0" bIns="0" rtlCol="0" anchor="ctr"/>
           <a:lstStyle/>
           <a:p>
-            <a:pPr algn="ctr" indent="0" marL="0">
+            <a:pPr marL="0" indent="0" algn="ctr">
               <a:buNone/>
             </a:pPr>
             <a:r>
@@ -11200,7 +11550,7 @@
           <a:bodyPr wrap="square" lIns="0" tIns="0" rIns="0" bIns="0" rtlCol="0" anchor="ctr"/>
           <a:lstStyle/>
           <a:p>
-            <a:pPr indent="0" marL="0">
+            <a:pPr marL="0" indent="0">
               <a:buNone/>
             </a:pPr>
             <a:r>
@@ -11239,7 +11589,7 @@
           <a:bodyPr wrap="square" lIns="0" tIns="0" rIns="0" bIns="0" rtlCol="0" anchor="ctr"/>
           <a:lstStyle/>
           <a:p>
-            <a:pPr algn="r" indent="0" marL="0">
+            <a:pPr marL="0" indent="0" algn="r">
               <a:buNone/>
             </a:pPr>
             <a:r>
@@ -11273,6 +11623,7 @@
         <a:solidFill>
           <a:srgbClr val="FFFFFF"/>
         </a:solidFill>
+        <a:effectLst/>
       </p:bgPr>
     </p:bg>
     <p:spTree>
@@ -11310,11 +11661,11 @@
           <a:bodyPr wrap="square" lIns="0" tIns="0" rIns="0" bIns="0" rtlCol="0" anchor="ctr"/>
           <a:lstStyle/>
           <a:p>
-            <a:pPr indent="0" marL="0">
-              <a:buNone/>
-            </a:pPr>
-            <a:r>
-              <a:rPr lang="en-US" sz="1250" b="1" spc="200" kern="0" dirty="0">
+            <a:pPr marL="0" indent="0">
+              <a:buNone/>
+            </a:pPr>
+            <a:r>
+              <a:rPr lang="en-US" sz="1250" b="1" kern="0" spc="200" dirty="0">
                 <a:solidFill>
                   <a:srgbClr val="0E8A8A"/>
                 </a:solidFill>
@@ -11349,7 +11700,7 @@
           <a:bodyPr wrap="square" lIns="0" tIns="0" rIns="0" bIns="0" rtlCol="0" anchor="t"/>
           <a:lstStyle/>
           <a:p>
-            <a:pPr indent="0" marL="0">
+            <a:pPr marL="0" indent="0">
               <a:buNone/>
             </a:pPr>
             <a:r>
@@ -11388,13 +11739,20 @@
           </a:solidFill>
           <a:ln/>
           <a:effectLst>
-            <a:outerShdw sx="100000" sy="100000" kx="0" ky="0" algn="bl" rotWithShape="0" blurRad="88900" dist="25400" dir="5400000">
+            <a:outerShdw blurRad="88900" dist="25400" dir="5400000" algn="bl" rotWithShape="0">
               <a:srgbClr val="000000">
                 <a:alpha val="10000"/>
               </a:srgbClr>
             </a:outerShdw>
           </a:effectLst>
         </p:spPr>
+        <p:txBody>
+          <a:bodyPr/>
+          <a:lstStyle/>
+          <a:p>
+            <a:endParaRPr lang="it-IT"/>
+          </a:p>
+        </p:txBody>
       </p:sp>
       <p:sp>
         <p:nvSpPr>
@@ -11417,7 +11775,7 @@
           <a:bodyPr wrap="square" lIns="0" tIns="0" rIns="0" bIns="0" rtlCol="0" anchor="ctr"/>
           <a:lstStyle/>
           <a:p>
-            <a:pPr algn="ctr" indent="0" marL="0">
+            <a:pPr marL="0" indent="0" algn="ctr">
               <a:buNone/>
             </a:pPr>
             <a:r>
@@ -11434,7 +11792,7 @@
             <a:endParaRPr lang="en-US" sz="1250" dirty="0"/>
           </a:p>
           <a:p>
-            <a:pPr algn="ctr" indent="0" marL="0">
+            <a:pPr marL="0" indent="0" algn="ctr">
               <a:buNone/>
             </a:pPr>
             <a:r>
@@ -11451,7 +11809,7 @@
             <a:endParaRPr lang="en-US" sz="1250" dirty="0"/>
           </a:p>
           <a:p>
-            <a:pPr algn="ctr" indent="0" marL="0">
+            <a:pPr marL="0" indent="0" algn="ctr">
               <a:buNone/>
             </a:pPr>
             <a:r>
@@ -11495,24 +11853,31 @@
             <a:prstDash val="solid"/>
           </a:ln>
           <a:effectLst>
-            <a:outerShdw sx="100000" sy="100000" kx="0" ky="0" algn="bl" rotWithShape="0" blurRad="88900" dist="25400" dir="5400000">
+            <a:outerShdw blurRad="88900" dist="25400" dir="5400000" algn="bl" rotWithShape="0">
               <a:srgbClr val="000000">
                 <a:alpha val="10000"/>
               </a:srgbClr>
             </a:outerShdw>
           </a:effectLst>
         </p:spPr>
+        <p:txBody>
+          <a:bodyPr/>
+          <a:lstStyle/>
+          <a:p>
+            <a:endParaRPr lang="it-IT"/>
+          </a:p>
+        </p:txBody>
       </p:sp>
       <p:pic>
         <p:nvPicPr>
-          <p:cNvPr id="7" name="Image 0" descr="preencoded.png">    </p:cNvPr>
+          <p:cNvPr id="7" name="Image 0" descr="preencoded.png"/>
           <p:cNvPicPr>
             <a:picLocks noChangeAspect="1"/>
           </p:cNvPicPr>
           <p:nvPr/>
         </p:nvPicPr>
         <p:blipFill>
-          <a:blip r:embed="rId1"/>
+          <a:blip r:embed="rId3"/>
           <a:stretch>
             <a:fillRect/>
           </a:stretch>
@@ -11548,7 +11913,7 @@
           <a:bodyPr wrap="square" lIns="0" tIns="0" rIns="0" bIns="0" rtlCol="0" anchor="ctr"/>
           <a:lstStyle/>
           <a:p>
-            <a:pPr algn="ctr" indent="0" marL="0">
+            <a:pPr marL="0" indent="0" algn="ctr">
               <a:buNone/>
             </a:pPr>
             <a:r>
@@ -11565,7 +11930,7 @@
             <a:endParaRPr lang="en-US" sz="1100" dirty="0"/>
           </a:p>
           <a:p>
-            <a:pPr algn="ctr" indent="0" marL="0">
+            <a:pPr marL="0" indent="0" algn="ctr">
               <a:buNone/>
             </a:pPr>
             <a:r>
@@ -11609,24 +11974,31 @@
             <a:prstDash val="solid"/>
           </a:ln>
           <a:effectLst>
-            <a:outerShdw sx="100000" sy="100000" kx="0" ky="0" algn="bl" rotWithShape="0" blurRad="88900" dist="25400" dir="5400000">
+            <a:outerShdw blurRad="88900" dist="25400" dir="5400000" algn="bl" rotWithShape="0">
               <a:srgbClr val="000000">
                 <a:alpha val="10000"/>
               </a:srgbClr>
             </a:outerShdw>
           </a:effectLst>
         </p:spPr>
+        <p:txBody>
+          <a:bodyPr/>
+          <a:lstStyle/>
+          <a:p>
+            <a:endParaRPr lang="it-IT"/>
+          </a:p>
+        </p:txBody>
       </p:sp>
       <p:pic>
         <p:nvPicPr>
-          <p:cNvPr id="10" name="Image 1" descr="preencoded.png">    </p:cNvPr>
+          <p:cNvPr id="10" name="Image 1" descr="preencoded.png"/>
           <p:cNvPicPr>
             <a:picLocks noChangeAspect="1"/>
           </p:cNvPicPr>
           <p:nvPr/>
         </p:nvPicPr>
         <p:blipFill>
-          <a:blip r:embed="rId2"/>
+          <a:blip r:embed="rId4"/>
           <a:stretch>
             <a:fillRect/>
           </a:stretch>
@@ -11662,7 +12034,7 @@
           <a:bodyPr wrap="square" lIns="0" tIns="0" rIns="0" bIns="0" rtlCol="0" anchor="ctr"/>
           <a:lstStyle/>
           <a:p>
-            <a:pPr algn="ctr" indent="0" marL="0">
+            <a:pPr marL="0" indent="0" algn="ctr">
               <a:buNone/>
             </a:pPr>
             <a:r>
@@ -11679,7 +12051,7 @@
             <a:endParaRPr lang="en-US" sz="1100" dirty="0"/>
           </a:p>
           <a:p>
-            <a:pPr algn="ctr" indent="0" marL="0">
+            <a:pPr marL="0" indent="0" algn="ctr">
               <a:buNone/>
             </a:pPr>
             <a:r>
@@ -11723,24 +12095,31 @@
             <a:prstDash val="solid"/>
           </a:ln>
           <a:effectLst>
-            <a:outerShdw sx="100000" sy="100000" kx="0" ky="0" algn="bl" rotWithShape="0" blurRad="88900" dist="25400" dir="5400000">
+            <a:outerShdw blurRad="88900" dist="25400" dir="5400000" algn="bl" rotWithShape="0">
               <a:srgbClr val="000000">
                 <a:alpha val="10000"/>
               </a:srgbClr>
             </a:outerShdw>
           </a:effectLst>
         </p:spPr>
+        <p:txBody>
+          <a:bodyPr/>
+          <a:lstStyle/>
+          <a:p>
+            <a:endParaRPr lang="it-IT"/>
+          </a:p>
+        </p:txBody>
       </p:sp>
       <p:pic>
         <p:nvPicPr>
-          <p:cNvPr id="13" name="Image 2" descr="preencoded.png">    </p:cNvPr>
+          <p:cNvPr id="13" name="Image 2" descr="preencoded.png"/>
           <p:cNvPicPr>
             <a:picLocks noChangeAspect="1"/>
           </p:cNvPicPr>
           <p:nvPr/>
         </p:nvPicPr>
         <p:blipFill>
-          <a:blip r:embed="rId3"/>
+          <a:blip r:embed="rId5"/>
           <a:stretch>
             <a:fillRect/>
           </a:stretch>
@@ -11776,7 +12155,7 @@
           <a:bodyPr wrap="square" lIns="0" tIns="0" rIns="0" bIns="0" rtlCol="0" anchor="ctr"/>
           <a:lstStyle/>
           <a:p>
-            <a:pPr algn="ctr" indent="0" marL="0">
+            <a:pPr marL="0" indent="0" algn="ctr">
               <a:buNone/>
             </a:pPr>
             <a:r>
@@ -11793,7 +12172,7 @@
             <a:endParaRPr lang="en-US" sz="1100" dirty="0"/>
           </a:p>
           <a:p>
-            <a:pPr algn="ctr" indent="0" marL="0">
+            <a:pPr marL="0" indent="0" algn="ctr">
               <a:buNone/>
             </a:pPr>
             <a:r>
@@ -11837,24 +12216,31 @@
             <a:prstDash val="solid"/>
           </a:ln>
           <a:effectLst>
-            <a:outerShdw sx="100000" sy="100000" kx="0" ky="0" algn="bl" rotWithShape="0" blurRad="88900" dist="25400" dir="5400000">
+            <a:outerShdw blurRad="88900" dist="25400" dir="5400000" algn="bl" rotWithShape="0">
               <a:srgbClr val="000000">
                 <a:alpha val="10000"/>
               </a:srgbClr>
             </a:outerShdw>
           </a:effectLst>
         </p:spPr>
+        <p:txBody>
+          <a:bodyPr/>
+          <a:lstStyle/>
+          <a:p>
+            <a:endParaRPr lang="it-IT"/>
+          </a:p>
+        </p:txBody>
       </p:sp>
       <p:pic>
         <p:nvPicPr>
-          <p:cNvPr id="16" name="Image 3" descr="preencoded.png">    </p:cNvPr>
+          <p:cNvPr id="16" name="Image 3" descr="preencoded.png"/>
           <p:cNvPicPr>
             <a:picLocks noChangeAspect="1"/>
           </p:cNvPicPr>
           <p:nvPr/>
         </p:nvPicPr>
         <p:blipFill>
-          <a:blip r:embed="rId4"/>
+          <a:blip r:embed="rId6"/>
           <a:stretch>
             <a:fillRect/>
           </a:stretch>
@@ -11890,7 +12276,7 @@
           <a:bodyPr wrap="square" lIns="0" tIns="0" rIns="0" bIns="0" rtlCol="0" anchor="ctr"/>
           <a:lstStyle/>
           <a:p>
-            <a:pPr algn="ctr" indent="0" marL="0">
+            <a:pPr marL="0" indent="0" algn="ctr">
               <a:buNone/>
             </a:pPr>
             <a:r>
@@ -11907,7 +12293,7 @@
             <a:endParaRPr lang="en-US" sz="1100" dirty="0"/>
           </a:p>
           <a:p>
-            <a:pPr algn="ctr" indent="0" marL="0">
+            <a:pPr marL="0" indent="0" algn="ctr">
               <a:buNone/>
             </a:pPr>
             <a:r>
@@ -11947,6 +12333,13 @@
             <a:prstDash val="solid"/>
           </a:ln>
         </p:spPr>
+        <p:txBody>
+          <a:bodyPr/>
+          <a:lstStyle/>
+          <a:p>
+            <a:endParaRPr lang="it-IT"/>
+          </a:p>
+        </p:txBody>
       </p:sp>
       <p:sp>
         <p:nvSpPr>
@@ -11969,7 +12362,7 @@
           <a:bodyPr wrap="square" lIns="0" tIns="0" rIns="0" bIns="0" rtlCol="0" anchor="ctr"/>
           <a:lstStyle/>
           <a:p>
-            <a:pPr indent="0" marL="0">
+            <a:pPr marL="0" indent="0">
               <a:buNone/>
             </a:pPr>
             <a:r>
@@ -12008,7 +12401,7 @@
           <a:bodyPr wrap="square" lIns="0" tIns="0" rIns="0" bIns="0" rtlCol="0" anchor="ctr"/>
           <a:lstStyle/>
           <a:p>
-            <a:pPr algn="r" indent="0" marL="0">
+            <a:pPr marL="0" indent="0" algn="r">
               <a:buNone/>
             </a:pPr>
             <a:r>
@@ -12042,6 +12435,7 @@
         <a:solidFill>
           <a:srgbClr val="FFFFFF"/>
         </a:solidFill>
+        <a:effectLst/>
       </p:bgPr>
     </p:bg>
     <p:spTree>
@@ -12079,11 +12473,11 @@
           <a:bodyPr wrap="square" lIns="0" tIns="0" rIns="0" bIns="0" rtlCol="0" anchor="ctr"/>
           <a:lstStyle/>
           <a:p>
-            <a:pPr indent="0" marL="0">
-              <a:buNone/>
-            </a:pPr>
-            <a:r>
-              <a:rPr lang="en-US" sz="1250" b="1" spc="200" kern="0" dirty="0">
+            <a:pPr marL="0" indent="0">
+              <a:buNone/>
+            </a:pPr>
+            <a:r>
+              <a:rPr lang="en-US" sz="1250" b="1" kern="0" spc="200" dirty="0">
                 <a:solidFill>
                   <a:srgbClr val="0E8A8A"/>
                 </a:solidFill>
@@ -12118,7 +12512,7 @@
           <a:bodyPr wrap="square" lIns="0" tIns="0" rIns="0" bIns="0" rtlCol="0" anchor="t"/>
           <a:lstStyle/>
           <a:p>
-            <a:pPr indent="0" marL="0">
+            <a:pPr marL="0" indent="0">
               <a:buNone/>
             </a:pPr>
             <a:r>
@@ -12162,13 +12556,20 @@
             <a:prstDash val="solid"/>
           </a:ln>
           <a:effectLst>
-            <a:outerShdw sx="100000" sy="100000" kx="0" ky="0" algn="bl" rotWithShape="0" blurRad="88900" dist="25400" dir="5400000">
+            <a:outerShdw blurRad="88900" dist="25400" dir="5400000" algn="bl" rotWithShape="0">
               <a:srgbClr val="000000">
                 <a:alpha val="10000"/>
               </a:srgbClr>
             </a:outerShdw>
           </a:effectLst>
         </p:spPr>
+        <p:txBody>
+          <a:bodyPr/>
+          <a:lstStyle/>
+          <a:p>
+            <a:endParaRPr lang="it-IT"/>
+          </a:p>
+        </p:txBody>
       </p:sp>
       <p:sp>
         <p:nvSpPr>
@@ -12191,7 +12592,7 @@
           <a:bodyPr wrap="square" lIns="0" tIns="0" rIns="0" bIns="0" rtlCol="0" anchor="ctr"/>
           <a:lstStyle/>
           <a:p>
-            <a:pPr indent="0" marL="0">
+            <a:pPr marL="0" indent="0">
               <a:buNone/>
             </a:pPr>
             <a:r>
@@ -12205,9 +12606,6 @@
               </a:rPr>
               <a:t>Objective: </a:t>
             </a:r>
-            <a:pPr indent="0" marL="0">
-              <a:buNone/>
-            </a:pPr>
             <a:r>
               <a:rPr lang="en-US" sz="1350" dirty="0">
                 <a:solidFill>
@@ -12249,13 +12647,20 @@
             <a:prstDash val="solid"/>
           </a:ln>
           <a:effectLst>
-            <a:outerShdw sx="100000" sy="100000" kx="0" ky="0" algn="bl" rotWithShape="0" blurRad="88900" dist="25400" dir="5400000">
+            <a:outerShdw blurRad="88900" dist="25400" dir="5400000" algn="bl" rotWithShape="0">
               <a:srgbClr val="000000">
                 <a:alpha val="10000"/>
               </a:srgbClr>
             </a:outerShdw>
           </a:effectLst>
         </p:spPr>
+        <p:txBody>
+          <a:bodyPr/>
+          <a:lstStyle/>
+          <a:p>
+            <a:endParaRPr lang="it-IT"/>
+          </a:p>
+        </p:txBody>
       </p:sp>
       <p:sp>
         <p:nvSpPr>
@@ -12276,17 +12681,24 @@
           </a:solidFill>
           <a:ln/>
         </p:spPr>
+        <p:txBody>
+          <a:bodyPr/>
+          <a:lstStyle/>
+          <a:p>
+            <a:endParaRPr lang="it-IT"/>
+          </a:p>
+        </p:txBody>
       </p:sp>
       <p:pic>
         <p:nvPicPr>
-          <p:cNvPr id="8" name="Image 0" descr="preencoded.png">    </p:cNvPr>
+          <p:cNvPr id="8" name="Image 0" descr="preencoded.png"/>
           <p:cNvPicPr>
             <a:picLocks noChangeAspect="1"/>
           </p:cNvPicPr>
           <p:nvPr/>
         </p:nvPicPr>
         <p:blipFill>
-          <a:blip r:embed="rId1"/>
+          <a:blip r:embed="rId3"/>
           <a:stretch>
             <a:fillRect/>
           </a:stretch>
@@ -12322,7 +12734,7 @@
           <a:bodyPr wrap="square" lIns="0" tIns="0" rIns="0" bIns="0" rtlCol="0" anchor="t"/>
           <a:lstStyle/>
           <a:p>
-            <a:pPr algn="ctr" indent="0" marL="0">
+            <a:pPr marL="0" indent="0" algn="ctr">
               <a:buNone/>
             </a:pPr>
             <a:r>
@@ -12339,7 +12751,7 @@
             <a:endParaRPr lang="en-US" sz="1050" dirty="0"/>
           </a:p>
           <a:p>
-            <a:pPr algn="ctr" indent="0" marL="0">
+            <a:pPr marL="0" indent="0" algn="ctr">
               <a:buNone/>
             </a:pPr>
             <a:r>
@@ -12383,13 +12795,20 @@
             <a:prstDash val="solid"/>
           </a:ln>
           <a:effectLst>
-            <a:outerShdw sx="100000" sy="100000" kx="0" ky="0" algn="bl" rotWithShape="0" blurRad="88900" dist="25400" dir="5400000">
+            <a:outerShdw blurRad="88900" dist="25400" dir="5400000" algn="bl" rotWithShape="0">
               <a:srgbClr val="000000">
                 <a:alpha val="10000"/>
               </a:srgbClr>
             </a:outerShdw>
           </a:effectLst>
         </p:spPr>
+        <p:txBody>
+          <a:bodyPr/>
+          <a:lstStyle/>
+          <a:p>
+            <a:endParaRPr lang="it-IT"/>
+          </a:p>
+        </p:txBody>
       </p:sp>
       <p:sp>
         <p:nvSpPr>
@@ -12410,17 +12829,24 @@
           </a:solidFill>
           <a:ln/>
         </p:spPr>
+        <p:txBody>
+          <a:bodyPr/>
+          <a:lstStyle/>
+          <a:p>
+            <a:endParaRPr lang="it-IT"/>
+          </a:p>
+        </p:txBody>
       </p:sp>
       <p:pic>
         <p:nvPicPr>
-          <p:cNvPr id="12" name="Image 1" descr="preencoded.png">    </p:cNvPr>
+          <p:cNvPr id="12" name="Image 1" descr="preencoded.png"/>
           <p:cNvPicPr>
             <a:picLocks noChangeAspect="1"/>
           </p:cNvPicPr>
           <p:nvPr/>
         </p:nvPicPr>
         <p:blipFill>
-          <a:blip r:embed="rId2"/>
+          <a:blip r:embed="rId4"/>
           <a:stretch>
             <a:fillRect/>
           </a:stretch>
@@ -12456,7 +12882,7 @@
           <a:bodyPr wrap="square" lIns="0" tIns="0" rIns="0" bIns="0" rtlCol="0" anchor="t"/>
           <a:lstStyle/>
           <a:p>
-            <a:pPr algn="ctr" indent="0" marL="0">
+            <a:pPr marL="0" indent="0" algn="ctr">
               <a:buNone/>
             </a:pPr>
             <a:r>
@@ -12473,7 +12899,7 @@
             <a:endParaRPr lang="en-US" sz="1050" dirty="0"/>
           </a:p>
           <a:p>
-            <a:pPr algn="ctr" indent="0" marL="0">
+            <a:pPr marL="0" indent="0" algn="ctr">
               <a:buNone/>
             </a:pPr>
             <a:r>
@@ -12517,13 +12943,20 @@
             <a:prstDash val="solid"/>
           </a:ln>
           <a:effectLst>
-            <a:outerShdw sx="100000" sy="100000" kx="0" ky="0" algn="bl" rotWithShape="0" blurRad="88900" dist="25400" dir="5400000">
+            <a:outerShdw blurRad="88900" dist="25400" dir="5400000" algn="bl" rotWithShape="0">
               <a:srgbClr val="000000">
                 <a:alpha val="10000"/>
               </a:srgbClr>
             </a:outerShdw>
           </a:effectLst>
         </p:spPr>
+        <p:txBody>
+          <a:bodyPr/>
+          <a:lstStyle/>
+          <a:p>
+            <a:endParaRPr lang="it-IT"/>
+          </a:p>
+        </p:txBody>
       </p:sp>
       <p:sp>
         <p:nvSpPr>
@@ -12544,17 +12977,24 @@
           </a:solidFill>
           <a:ln/>
         </p:spPr>
+        <p:txBody>
+          <a:bodyPr/>
+          <a:lstStyle/>
+          <a:p>
+            <a:endParaRPr lang="it-IT"/>
+          </a:p>
+        </p:txBody>
       </p:sp>
       <p:pic>
         <p:nvPicPr>
-          <p:cNvPr id="16" name="Image 2" descr="preencoded.png">    </p:cNvPr>
+          <p:cNvPr id="16" name="Image 2" descr="preencoded.png"/>
           <p:cNvPicPr>
             <a:picLocks noChangeAspect="1"/>
           </p:cNvPicPr>
           <p:nvPr/>
         </p:nvPicPr>
         <p:blipFill>
-          <a:blip r:embed="rId3"/>
+          <a:blip r:embed="rId5"/>
           <a:stretch>
             <a:fillRect/>
           </a:stretch>
@@ -12590,7 +13030,7 @@
           <a:bodyPr wrap="square" lIns="0" tIns="0" rIns="0" bIns="0" rtlCol="0" anchor="t"/>
           <a:lstStyle/>
           <a:p>
-            <a:pPr algn="ctr" indent="0" marL="0">
+            <a:pPr marL="0" indent="0" algn="ctr">
               <a:buNone/>
             </a:pPr>
             <a:r>
@@ -12607,7 +13047,7 @@
             <a:endParaRPr lang="en-US" sz="1050" dirty="0"/>
           </a:p>
           <a:p>
-            <a:pPr algn="ctr" indent="0" marL="0">
+            <a:pPr marL="0" indent="0" algn="ctr">
               <a:buNone/>
             </a:pPr>
             <a:r>
@@ -12651,13 +13091,20 @@
             <a:prstDash val="solid"/>
           </a:ln>
           <a:effectLst>
-            <a:outerShdw sx="100000" sy="100000" kx="0" ky="0" algn="bl" rotWithShape="0" blurRad="88900" dist="25400" dir="5400000">
+            <a:outerShdw blurRad="88900" dist="25400" dir="5400000" algn="bl" rotWithShape="0">
               <a:srgbClr val="000000">
                 <a:alpha val="10000"/>
               </a:srgbClr>
             </a:outerShdw>
           </a:effectLst>
         </p:spPr>
+        <p:txBody>
+          <a:bodyPr/>
+          <a:lstStyle/>
+          <a:p>
+            <a:endParaRPr lang="it-IT"/>
+          </a:p>
+        </p:txBody>
       </p:sp>
       <p:sp>
         <p:nvSpPr>
@@ -12678,17 +13125,24 @@
           </a:solidFill>
           <a:ln/>
         </p:spPr>
+        <p:txBody>
+          <a:bodyPr/>
+          <a:lstStyle/>
+          <a:p>
+            <a:endParaRPr lang="it-IT"/>
+          </a:p>
+        </p:txBody>
       </p:sp>
       <p:pic>
         <p:nvPicPr>
-          <p:cNvPr id="20" name="Image 3" descr="preencoded.png">    </p:cNvPr>
+          <p:cNvPr id="20" name="Image 3" descr="preencoded.png"/>
           <p:cNvPicPr>
             <a:picLocks noChangeAspect="1"/>
           </p:cNvPicPr>
           <p:nvPr/>
         </p:nvPicPr>
         <p:blipFill>
-          <a:blip r:embed="rId4"/>
+          <a:blip r:embed="rId6"/>
           <a:stretch>
             <a:fillRect/>
           </a:stretch>
@@ -12724,7 +13178,7 @@
           <a:bodyPr wrap="square" lIns="0" tIns="0" rIns="0" bIns="0" rtlCol="0" anchor="t"/>
           <a:lstStyle/>
           <a:p>
-            <a:pPr algn="ctr" indent="0" marL="0">
+            <a:pPr marL="0" indent="0" algn="ctr">
               <a:buNone/>
             </a:pPr>
             <a:r>
@@ -12741,7 +13195,7 @@
             <a:endParaRPr lang="en-US" sz="1050" dirty="0"/>
           </a:p>
           <a:p>
-            <a:pPr algn="ctr" indent="0" marL="0">
+            <a:pPr marL="0" indent="0" algn="ctr">
               <a:buNone/>
             </a:pPr>
             <a:r>
@@ -12785,13 +13239,20 @@
             <a:prstDash val="solid"/>
           </a:ln>
           <a:effectLst>
-            <a:outerShdw sx="100000" sy="100000" kx="0" ky="0" algn="bl" rotWithShape="0" blurRad="88900" dist="25400" dir="5400000">
+            <a:outerShdw blurRad="88900" dist="25400" dir="5400000" algn="bl" rotWithShape="0">
               <a:srgbClr val="000000">
                 <a:alpha val="10000"/>
               </a:srgbClr>
             </a:outerShdw>
           </a:effectLst>
         </p:spPr>
+        <p:txBody>
+          <a:bodyPr/>
+          <a:lstStyle/>
+          <a:p>
+            <a:endParaRPr lang="it-IT"/>
+          </a:p>
+        </p:txBody>
       </p:sp>
       <p:sp>
         <p:nvSpPr>
@@ -12812,17 +13273,24 @@
           </a:solidFill>
           <a:ln/>
         </p:spPr>
+        <p:txBody>
+          <a:bodyPr/>
+          <a:lstStyle/>
+          <a:p>
+            <a:endParaRPr lang="it-IT"/>
+          </a:p>
+        </p:txBody>
       </p:sp>
       <p:pic>
         <p:nvPicPr>
-          <p:cNvPr id="24" name="Image 4" descr="preencoded.png">    </p:cNvPr>
+          <p:cNvPr id="24" name="Image 4" descr="preencoded.png"/>
           <p:cNvPicPr>
             <a:picLocks noChangeAspect="1"/>
           </p:cNvPicPr>
           <p:nvPr/>
         </p:nvPicPr>
         <p:blipFill>
-          <a:blip r:embed="rId5"/>
+          <a:blip r:embed="rId7"/>
           <a:stretch>
             <a:fillRect/>
           </a:stretch>
@@ -12858,7 +13326,7 @@
           <a:bodyPr wrap="square" lIns="0" tIns="0" rIns="0" bIns="0" rtlCol="0" anchor="t"/>
           <a:lstStyle/>
           <a:p>
-            <a:pPr algn="ctr" indent="0" marL="0">
+            <a:pPr marL="0" indent="0" algn="ctr">
               <a:buNone/>
             </a:pPr>
             <a:r>
@@ -12875,7 +13343,7 @@
             <a:endParaRPr lang="en-US" sz="1050" dirty="0"/>
           </a:p>
           <a:p>
-            <a:pPr algn="ctr" indent="0" marL="0">
+            <a:pPr marL="0" indent="0" algn="ctr">
               <a:buNone/>
             </a:pPr>
             <a:r>
@@ -12914,7 +13382,7 @@
           <a:bodyPr wrap="square" lIns="0" tIns="0" rIns="0" bIns="0" rtlCol="0" anchor="ctr"/>
           <a:lstStyle/>
           <a:p>
-            <a:pPr indent="0" marL="0">
+            <a:pPr marL="0" indent="0">
               <a:buNone/>
             </a:pPr>
             <a:r>
@@ -12953,7 +13421,7 @@
           <a:bodyPr wrap="square" lIns="0" tIns="0" rIns="0" bIns="0" rtlCol="0" anchor="ctr"/>
           <a:lstStyle/>
           <a:p>
-            <a:pPr indent="0" marL="0">
+            <a:pPr marL="0" indent="0">
               <a:buNone/>
             </a:pPr>
             <a:r>
@@ -12992,7 +13460,7 @@
           <a:bodyPr wrap="square" lIns="0" tIns="0" rIns="0" bIns="0" rtlCol="0" anchor="ctr"/>
           <a:lstStyle/>
           <a:p>
-            <a:pPr algn="r" indent="0" marL="0">
+            <a:pPr marL="0" indent="0" algn="r">
               <a:buNone/>
             </a:pPr>
             <a:r>
@@ -13026,6 +13494,7 @@
         <a:solidFill>
           <a:srgbClr val="FFFFFF"/>
         </a:solidFill>
+        <a:effectLst/>
       </p:bgPr>
     </p:bg>
     <p:spTree>
@@ -13063,11 +13532,11 @@
           <a:bodyPr wrap="square" lIns="0" tIns="0" rIns="0" bIns="0" rtlCol="0" anchor="ctr"/>
           <a:lstStyle/>
           <a:p>
-            <a:pPr indent="0" marL="0">
-              <a:buNone/>
-            </a:pPr>
-            <a:r>
-              <a:rPr lang="en-US" sz="1250" b="1" spc="200" kern="0" dirty="0">
+            <a:pPr marL="0" indent="0">
+              <a:buNone/>
+            </a:pPr>
+            <a:r>
+              <a:rPr lang="en-US" sz="1250" b="1" kern="0" spc="200" dirty="0">
                 <a:solidFill>
                   <a:srgbClr val="0E8A8A"/>
                 </a:solidFill>
@@ -13102,7 +13571,7 @@
           <a:bodyPr wrap="square" lIns="0" tIns="0" rIns="0" bIns="0" rtlCol="0" anchor="t"/>
           <a:lstStyle/>
           <a:p>
-            <a:pPr indent="0" marL="0">
+            <a:pPr marL="0" indent="0">
               <a:buNone/>
             </a:pPr>
             <a:r>
@@ -13146,13 +13615,20 @@
             <a:prstDash val="solid"/>
           </a:ln>
           <a:effectLst>
-            <a:outerShdw sx="100000" sy="100000" kx="0" ky="0" algn="bl" rotWithShape="0" blurRad="88900" dist="25400" dir="5400000">
+            <a:outerShdw blurRad="88900" dist="25400" dir="5400000" algn="bl" rotWithShape="0">
               <a:srgbClr val="000000">
                 <a:alpha val="10000"/>
               </a:srgbClr>
             </a:outerShdw>
           </a:effectLst>
         </p:spPr>
+        <p:txBody>
+          <a:bodyPr/>
+          <a:lstStyle/>
+          <a:p>
+            <a:endParaRPr lang="it-IT"/>
+          </a:p>
+        </p:txBody>
       </p:sp>
       <p:sp>
         <p:nvSpPr>
@@ -13173,17 +13649,24 @@
           </a:solidFill>
           <a:ln/>
         </p:spPr>
+        <p:txBody>
+          <a:bodyPr/>
+          <a:lstStyle/>
+          <a:p>
+            <a:endParaRPr lang="it-IT"/>
+          </a:p>
+        </p:txBody>
       </p:sp>
       <p:pic>
         <p:nvPicPr>
-          <p:cNvPr id="6" name="Image 0" descr="preencoded.png">    </p:cNvPr>
+          <p:cNvPr id="6" name="Image 0" descr="preencoded.png"/>
           <p:cNvPicPr>
             <a:picLocks noChangeAspect="1"/>
           </p:cNvPicPr>
           <p:nvPr/>
         </p:nvPicPr>
         <p:blipFill>
-          <a:blip r:embed="rId1"/>
+          <a:blip r:embed="rId3"/>
           <a:stretch>
             <a:fillRect/>
           </a:stretch>
@@ -13219,7 +13702,7 @@
           <a:bodyPr wrap="square" lIns="0" tIns="0" rIns="0" bIns="0" rtlCol="0" anchor="ctr"/>
           <a:lstStyle/>
           <a:p>
-            <a:pPr indent="0" marL="0">
+            <a:pPr marL="0" indent="0">
               <a:buNone/>
             </a:pPr>
             <a:r>
@@ -13258,7 +13741,7 @@
           <a:bodyPr wrap="square" lIns="0" tIns="0" rIns="0" bIns="0" rtlCol="0" anchor="ctr"/>
           <a:lstStyle/>
           <a:p>
-            <a:pPr indent="0" marL="0">
+            <a:pPr marL="0" indent="0">
               <a:buNone/>
             </a:pPr>
             <a:r>
@@ -13387,13 +13870,20 @@
             <a:prstDash val="solid"/>
           </a:ln>
           <a:effectLst>
-            <a:outerShdw sx="100000" sy="100000" kx="0" ky="0" algn="bl" rotWithShape="0" blurRad="88900" dist="25400" dir="5400000">
+            <a:outerShdw blurRad="88900" dist="25400" dir="5400000" algn="bl" rotWithShape="0">
               <a:srgbClr val="000000">
                 <a:alpha val="10000"/>
               </a:srgbClr>
             </a:outerShdw>
           </a:effectLst>
         </p:spPr>
+        <p:txBody>
+          <a:bodyPr/>
+          <a:lstStyle/>
+          <a:p>
+            <a:endParaRPr lang="it-IT"/>
+          </a:p>
+        </p:txBody>
       </p:sp>
       <p:sp>
         <p:nvSpPr>
@@ -13414,17 +13904,24 @@
           </a:solidFill>
           <a:ln/>
         </p:spPr>
+        <p:txBody>
+          <a:bodyPr/>
+          <a:lstStyle/>
+          <a:p>
+            <a:endParaRPr lang="it-IT"/>
+          </a:p>
+        </p:txBody>
       </p:sp>
       <p:pic>
         <p:nvPicPr>
-          <p:cNvPr id="12" name="Image 1" descr="preencoded.png">    </p:cNvPr>
+          <p:cNvPr id="12" name="Image 1" descr="preencoded.png"/>
           <p:cNvPicPr>
             <a:picLocks noChangeAspect="1"/>
           </p:cNvPicPr>
           <p:nvPr/>
         </p:nvPicPr>
         <p:blipFill>
-          <a:blip r:embed="rId2"/>
+          <a:blip r:embed="rId4"/>
           <a:stretch>
             <a:fillRect/>
           </a:stretch>
@@ -13460,7 +13957,7 @@
           <a:bodyPr wrap="square" lIns="0" tIns="0" rIns="0" bIns="0" rtlCol="0" anchor="ctr"/>
           <a:lstStyle/>
           <a:p>
-            <a:pPr indent="0" marL="0">
+            <a:pPr marL="0" indent="0">
               <a:buNone/>
             </a:pPr>
             <a:r>
@@ -13499,7 +13996,7 @@
           <a:bodyPr wrap="square" lIns="0" tIns="0" rIns="0" bIns="0" rtlCol="0" anchor="ctr"/>
           <a:lstStyle/>
           <a:p>
-            <a:pPr indent="0" marL="0">
+            <a:pPr marL="0" indent="0">
               <a:buNone/>
             </a:pPr>
             <a:r>
@@ -13626,13 +14123,20 @@
             <a:prstDash val="solid"/>
           </a:ln>
           <a:effectLst>
-            <a:outerShdw sx="100000" sy="100000" kx="0" ky="0" algn="bl" rotWithShape="0" blurRad="101600" dist="38100" dir="5400000">
+            <a:outerShdw blurRad="101600" dist="38100" dir="5400000" algn="bl" rotWithShape="0">
               <a:srgbClr val="000000">
                 <a:alpha val="18000"/>
               </a:srgbClr>
             </a:outerShdw>
           </a:effectLst>
         </p:spPr>
+        <p:txBody>
+          <a:bodyPr/>
+          <a:lstStyle/>
+          <a:p>
+            <a:endParaRPr lang="it-IT"/>
+          </a:p>
+        </p:txBody>
       </p:sp>
       <p:sp>
         <p:nvSpPr>
@@ -13655,7 +14159,7 @@
           <a:bodyPr wrap="square" lIns="0" tIns="0" rIns="0" bIns="0" rtlCol="0" anchor="ctr"/>
           <a:lstStyle/>
           <a:p>
-            <a:pPr algn="ctr" indent="0" marL="0">
+            <a:pPr marL="0" indent="0" algn="ctr">
               <a:buNone/>
             </a:pPr>
             <a:r>
@@ -13672,7 +14176,7 @@
             <a:endParaRPr lang="en-US" sz="850" dirty="0"/>
           </a:p>
           <a:p>
-            <a:pPr algn="ctr" indent="0" marL="0">
+            <a:pPr marL="0" indent="0" algn="ctr">
               <a:buNone/>
             </a:pPr>
             <a:r>
@@ -13711,7 +14215,7 @@
           <a:bodyPr wrap="square" lIns="0" tIns="0" rIns="0" bIns="0" rtlCol="0" anchor="ctr"/>
           <a:lstStyle/>
           <a:p>
-            <a:pPr indent="0" marL="0">
+            <a:pPr marL="0" indent="0">
               <a:buNone/>
             </a:pPr>
             <a:r>
@@ -13750,7 +14254,7 @@
           <a:bodyPr wrap="square" lIns="0" tIns="0" rIns="0" bIns="0" rtlCol="0" anchor="ctr"/>
           <a:lstStyle/>
           <a:p>
-            <a:pPr algn="r" indent="0" marL="0">
+            <a:pPr marL="0" indent="0" algn="r">
               <a:buNone/>
             </a:pPr>
             <a:r>
@@ -13784,6 +14288,7 @@
         <a:solidFill>
           <a:srgbClr val="FFFFFF"/>
         </a:solidFill>
+        <a:effectLst/>
       </p:bgPr>
     </p:bg>
     <p:spTree>
@@ -13821,11 +14326,11 @@
           <a:bodyPr wrap="square" lIns="0" tIns="0" rIns="0" bIns="0" rtlCol="0" anchor="ctr"/>
           <a:lstStyle/>
           <a:p>
-            <a:pPr indent="0" marL="0">
-              <a:buNone/>
-            </a:pPr>
-            <a:r>
-              <a:rPr lang="en-US" sz="1250" b="1" spc="200" kern="0" dirty="0">
+            <a:pPr marL="0" indent="0">
+              <a:buNone/>
+            </a:pPr>
+            <a:r>
+              <a:rPr lang="en-US" sz="1250" b="1" kern="0" spc="200" dirty="0">
                 <a:solidFill>
                   <a:srgbClr val="0E8A8A"/>
                 </a:solidFill>
@@ -13860,7 +14365,7 @@
           <a:bodyPr wrap="square" lIns="0" tIns="0" rIns="0" bIns="0" rtlCol="0" anchor="t"/>
           <a:lstStyle/>
           <a:p>
-            <a:pPr indent="0" marL="0">
+            <a:pPr marL="0" indent="0">
               <a:buNone/>
             </a:pPr>
             <a:r>
@@ -13899,13 +14404,20 @@
           </a:solidFill>
           <a:ln/>
           <a:effectLst>
-            <a:outerShdw sx="100000" sy="100000" kx="0" ky="0" algn="bl" rotWithShape="0" blurRad="88900" dist="25400" dir="5400000">
+            <a:outerShdw blurRad="88900" dist="25400" dir="5400000" algn="bl" rotWithShape="0">
               <a:srgbClr val="000000">
                 <a:alpha val="10000"/>
               </a:srgbClr>
             </a:outerShdw>
           </a:effectLst>
         </p:spPr>
+        <p:txBody>
+          <a:bodyPr/>
+          <a:lstStyle/>
+          <a:p>
+            <a:endParaRPr lang="it-IT"/>
+          </a:p>
+        </p:txBody>
       </p:sp>
       <p:sp>
         <p:nvSpPr>
@@ -13928,7 +14440,7 @@
           <a:bodyPr wrap="square" lIns="0" tIns="0" rIns="0" bIns="0" rtlCol="0" anchor="ctr"/>
           <a:lstStyle/>
           <a:p>
-            <a:pPr algn="ctr" indent="0" marL="0">
+            <a:pPr marL="0" indent="0" algn="ctr">
               <a:buNone/>
             </a:pPr>
             <a:r>
@@ -13967,13 +14479,20 @@
           </a:solidFill>
           <a:ln/>
           <a:effectLst>
-            <a:outerShdw sx="100000" sy="100000" kx="0" ky="0" algn="bl" rotWithShape="0" blurRad="88900" dist="25400" dir="5400000">
+            <a:outerShdw blurRad="88900" dist="25400" dir="5400000" algn="bl" rotWithShape="0">
               <a:srgbClr val="000000">
                 <a:alpha val="10000"/>
               </a:srgbClr>
             </a:outerShdw>
           </a:effectLst>
         </p:spPr>
+        <p:txBody>
+          <a:bodyPr/>
+          <a:lstStyle/>
+          <a:p>
+            <a:endParaRPr lang="it-IT"/>
+          </a:p>
+        </p:txBody>
       </p:sp>
       <p:sp>
         <p:nvSpPr>
@@ -13996,7 +14515,7 @@
           <a:bodyPr wrap="square" lIns="0" tIns="0" rIns="0" bIns="0" rtlCol="0" anchor="ctr"/>
           <a:lstStyle/>
           <a:p>
-            <a:pPr algn="ctr" indent="0" marL="0">
+            <a:pPr marL="0" indent="0" algn="ctr">
               <a:buNone/>
             </a:pPr>
             <a:r>
@@ -14035,7 +14554,7 @@
           <a:bodyPr wrap="square" lIns="0" tIns="0" rIns="0" bIns="0" rtlCol="0" anchor="ctr"/>
           <a:lstStyle/>
           <a:p>
-            <a:pPr algn="ctr" indent="0" marL="0">
+            <a:pPr marL="0" indent="0" algn="ctr">
               <a:buNone/>
             </a:pPr>
             <a:r>
@@ -14055,14 +14574,14 @@
       </p:sp>
       <p:pic>
         <p:nvPicPr>
-          <p:cNvPr id="9" name="Image 0" descr="preencoded.png">    </p:cNvPr>
+          <p:cNvPr id="9" name="Image 0" descr="preencoded.png"/>
           <p:cNvPicPr>
             <a:picLocks noChangeAspect="1"/>
           </p:cNvPicPr>
           <p:nvPr/>
         </p:nvPicPr>
         <p:blipFill>
-          <a:blip r:embed="rId1"/>
+          <a:blip r:embed="rId3"/>
           <a:stretch>
             <a:fillRect/>
           </a:stretch>
@@ -14103,13 +14622,20 @@
             <a:prstDash val="solid"/>
           </a:ln>
           <a:effectLst>
-            <a:outerShdw sx="100000" sy="100000" kx="0" ky="0" algn="bl" rotWithShape="0" blurRad="88900" dist="25400" dir="5400000">
+            <a:outerShdw blurRad="88900" dist="25400" dir="5400000" algn="bl" rotWithShape="0">
               <a:srgbClr val="000000">
                 <a:alpha val="10000"/>
               </a:srgbClr>
             </a:outerShdw>
           </a:effectLst>
         </p:spPr>
+        <p:txBody>
+          <a:bodyPr/>
+          <a:lstStyle/>
+          <a:p>
+            <a:endParaRPr lang="it-IT"/>
+          </a:p>
+        </p:txBody>
       </p:sp>
       <p:sp>
         <p:nvSpPr>
@@ -14132,7 +14658,7 @@
           <a:bodyPr wrap="square" lIns="0" tIns="0" rIns="0" bIns="0" rtlCol="0" anchor="ctr"/>
           <a:lstStyle/>
           <a:p>
-            <a:pPr indent="0" marL="0">
+            <a:pPr marL="0" indent="0">
               <a:buNone/>
             </a:pPr>
             <a:r>
@@ -14171,7 +14697,7 @@
           <a:bodyPr wrap="square" lIns="0" tIns="0" rIns="0" bIns="0" rtlCol="0" anchor="ctr"/>
           <a:lstStyle/>
           <a:p>
-            <a:pPr indent="0" marL="0">
+            <a:pPr marL="0" indent="0">
               <a:lnSpc>
                 <a:spcPct val="125000"/>
               </a:lnSpc>
@@ -14191,7 +14717,7 @@
             <a:endParaRPr lang="en-US" sz="1150" dirty="0"/>
           </a:p>
           <a:p>
-            <a:pPr indent="0" marL="0">
+            <a:pPr marL="0" indent="0">
               <a:lnSpc>
                 <a:spcPct val="125000"/>
               </a:lnSpc>
@@ -14238,24 +14764,31 @@
             <a:prstDash val="solid"/>
           </a:ln>
           <a:effectLst>
-            <a:outerShdw sx="100000" sy="100000" kx="0" ky="0" algn="bl" rotWithShape="0" blurRad="88900" dist="25400" dir="5400000">
+            <a:outerShdw blurRad="88900" dist="25400" dir="5400000" algn="bl" rotWithShape="0">
               <a:srgbClr val="000000">
                 <a:alpha val="10000"/>
               </a:srgbClr>
             </a:outerShdw>
           </a:effectLst>
         </p:spPr>
+        <p:txBody>
+          <a:bodyPr/>
+          <a:lstStyle/>
+          <a:p>
+            <a:endParaRPr lang="it-IT"/>
+          </a:p>
+        </p:txBody>
       </p:sp>
       <p:pic>
         <p:nvPicPr>
-          <p:cNvPr id="14" name="Image 1" descr="preencoded.png">    </p:cNvPr>
+          <p:cNvPr id="14" name="Image 1" descr="preencoded.png"/>
           <p:cNvPicPr>
             <a:picLocks noChangeAspect="1"/>
           </p:cNvPicPr>
           <p:nvPr/>
         </p:nvPicPr>
         <p:blipFill>
-          <a:blip r:embed="rId2"/>
+          <a:blip r:embed="rId4"/>
           <a:stretch>
             <a:fillRect/>
           </a:stretch>
@@ -14291,7 +14824,7 @@
           <a:bodyPr wrap="square" lIns="0" tIns="0" rIns="0" bIns="0" rtlCol="0" anchor="ctr"/>
           <a:lstStyle/>
           <a:p>
-            <a:pPr indent="0" marL="0">
+            <a:pPr marL="0" indent="0">
               <a:buNone/>
             </a:pPr>
             <a:r>
@@ -14330,7 +14863,7 @@
           <a:bodyPr wrap="square" lIns="0" tIns="0" rIns="0" bIns="0" rtlCol="0" anchor="ctr"/>
           <a:lstStyle/>
           <a:p>
-            <a:pPr indent="0" marL="0">
+            <a:pPr marL="0" indent="0">
               <a:lnSpc>
                 <a:spcPct val="125000"/>
               </a:lnSpc>
@@ -14350,7 +14883,7 @@
             <a:endParaRPr lang="en-US" sz="1150" dirty="0"/>
           </a:p>
           <a:p>
-            <a:pPr indent="0" marL="0">
+            <a:pPr marL="0" indent="0">
               <a:lnSpc>
                 <a:spcPct val="125000"/>
               </a:lnSpc>
@@ -14370,7 +14903,7 @@
             <a:endParaRPr lang="en-US" sz="1150" dirty="0"/>
           </a:p>
           <a:p>
-            <a:pPr indent="0" marL="0">
+            <a:pPr marL="0" indent="0">
               <a:lnSpc>
                 <a:spcPct val="125000"/>
               </a:lnSpc>
@@ -14412,24 +14945,31 @@
           </a:solidFill>
           <a:ln/>
           <a:effectLst>
-            <a:outerShdw sx="100000" sy="100000" kx="0" ky="0" algn="bl" rotWithShape="0" blurRad="88900" dist="25400" dir="5400000">
+            <a:outerShdw blurRad="88900" dist="25400" dir="5400000" algn="bl" rotWithShape="0">
               <a:srgbClr val="000000">
                 <a:alpha val="10000"/>
               </a:srgbClr>
             </a:outerShdw>
           </a:effectLst>
         </p:spPr>
+        <p:txBody>
+          <a:bodyPr/>
+          <a:lstStyle/>
+          <a:p>
+            <a:endParaRPr lang="it-IT"/>
+          </a:p>
+        </p:txBody>
       </p:sp>
       <p:pic>
         <p:nvPicPr>
-          <p:cNvPr id="18" name="Image 2" descr="preencoded.png">    </p:cNvPr>
+          <p:cNvPr id="18" name="Image 2" descr="preencoded.png"/>
           <p:cNvPicPr>
             <a:picLocks noChangeAspect="1"/>
           </p:cNvPicPr>
           <p:nvPr/>
         </p:nvPicPr>
         <p:blipFill>
-          <a:blip r:embed="rId3"/>
+          <a:blip r:embed="rId5"/>
           <a:stretch>
             <a:fillRect/>
           </a:stretch>
@@ -14465,7 +15005,7 @@
           <a:bodyPr wrap="square" lIns="0" tIns="0" rIns="0" bIns="0" rtlCol="0" anchor="ctr"/>
           <a:lstStyle/>
           <a:p>
-            <a:pPr indent="0" marL="0">
+            <a:pPr marL="0" indent="0">
               <a:buNone/>
             </a:pPr>
             <a:r>
@@ -14504,7 +15044,7 @@
           <a:bodyPr wrap="square" lIns="0" tIns="0" rIns="0" bIns="0" rtlCol="0" anchor="ctr"/>
           <a:lstStyle/>
           <a:p>
-            <a:pPr indent="0" marL="0">
+            <a:pPr marL="0" indent="0">
               <a:buNone/>
             </a:pPr>
             <a:r>
@@ -14543,7 +15083,7 @@
           <a:bodyPr wrap="square" lIns="0" tIns="0" rIns="0" bIns="0" rtlCol="0" anchor="ctr"/>
           <a:lstStyle/>
           <a:p>
-            <a:pPr indent="0" marL="0">
+            <a:pPr marL="0" indent="0">
               <a:buNone/>
             </a:pPr>
             <a:r>
@@ -14582,7 +15122,7 @@
           <a:bodyPr wrap="square" lIns="0" tIns="0" rIns="0" bIns="0" rtlCol="0" anchor="ctr"/>
           <a:lstStyle/>
           <a:p>
-            <a:pPr algn="r" indent="0" marL="0">
+            <a:pPr marL="0" indent="0" algn="r">
               <a:buNone/>
             </a:pPr>
             <a:r>
@@ -14616,6 +15156,7 @@
         <a:solidFill>
           <a:srgbClr val="FFFFFF"/>
         </a:solidFill>
+        <a:effectLst/>
       </p:bgPr>
     </p:bg>
     <p:spTree>
@@ -14653,11 +15194,11 @@
           <a:bodyPr wrap="square" lIns="0" tIns="0" rIns="0" bIns="0" rtlCol="0" anchor="ctr"/>
           <a:lstStyle/>
           <a:p>
-            <a:pPr indent="0" marL="0">
-              <a:buNone/>
-            </a:pPr>
-            <a:r>
-              <a:rPr lang="en-US" sz="1250" b="1" spc="200" kern="0" dirty="0">
+            <a:pPr marL="0" indent="0">
+              <a:buNone/>
+            </a:pPr>
+            <a:r>
+              <a:rPr lang="en-US" sz="1250" b="1" kern="0" spc="200" dirty="0">
                 <a:solidFill>
                   <a:srgbClr val="0E8A8A"/>
                 </a:solidFill>
@@ -14692,7 +15233,7 @@
           <a:bodyPr wrap="square" lIns="0" tIns="0" rIns="0" bIns="0" rtlCol="0" anchor="t"/>
           <a:lstStyle/>
           <a:p>
-            <a:pPr indent="0" marL="0">
+            <a:pPr marL="0" indent="0">
               <a:buNone/>
             </a:pPr>
             <a:r>
@@ -14736,13 +15277,20 @@
             <a:prstDash val="solid"/>
           </a:ln>
           <a:effectLst>
-            <a:outerShdw sx="100000" sy="100000" kx="0" ky="0" algn="bl" rotWithShape="0" blurRad="88900" dist="25400" dir="5400000">
+            <a:outerShdw blurRad="88900" dist="25400" dir="5400000" algn="bl" rotWithShape="0">
               <a:srgbClr val="000000">
                 <a:alpha val="10000"/>
               </a:srgbClr>
             </a:outerShdw>
           </a:effectLst>
         </p:spPr>
+        <p:txBody>
+          <a:bodyPr/>
+          <a:lstStyle/>
+          <a:p>
+            <a:endParaRPr lang="it-IT"/>
+          </a:p>
+        </p:txBody>
       </p:sp>
       <p:sp>
         <p:nvSpPr>
@@ -14763,6 +15311,13 @@
           </a:solidFill>
           <a:ln/>
         </p:spPr>
+        <p:txBody>
+          <a:bodyPr/>
+          <a:lstStyle/>
+          <a:p>
+            <a:endParaRPr lang="it-IT"/>
+          </a:p>
+        </p:txBody>
       </p:sp>
       <p:sp>
         <p:nvSpPr>
@@ -14785,7 +15340,7 @@
           <a:bodyPr wrap="square" lIns="0" tIns="0" rIns="0" bIns="0" rtlCol="0" anchor="ctr"/>
           <a:lstStyle/>
           <a:p>
-            <a:pPr algn="ctr" indent="0" marL="0">
+            <a:pPr marL="0" indent="0" algn="ctr">
               <a:buNone/>
             </a:pPr>
             <a:r>
@@ -14824,7 +15379,7 @@
           <a:bodyPr wrap="square" lIns="0" tIns="0" rIns="0" bIns="0" rtlCol="0" anchor="t"/>
           <a:lstStyle/>
           <a:p>
-            <a:pPr algn="ctr" indent="0" marL="0">
+            <a:pPr marL="0" indent="0" algn="ctr">
               <a:lnSpc>
                 <a:spcPct val="115000"/>
               </a:lnSpc>
@@ -14844,7 +15399,7 @@
             <a:endParaRPr lang="en-US" sz="1000" dirty="0"/>
           </a:p>
           <a:p>
-            <a:pPr algn="ctr" indent="0" marL="0">
+            <a:pPr marL="0" indent="0" algn="ctr">
               <a:lnSpc>
                 <a:spcPct val="115000"/>
               </a:lnSpc>
@@ -14884,6 +15439,13 @@
           </a:solidFill>
           <a:ln/>
         </p:spPr>
+        <p:txBody>
+          <a:bodyPr/>
+          <a:lstStyle/>
+          <a:p>
+            <a:endParaRPr lang="it-IT"/>
+          </a:p>
+        </p:txBody>
       </p:sp>
       <p:sp>
         <p:nvSpPr>
@@ -14911,13 +15473,20 @@
             <a:prstDash val="solid"/>
           </a:ln>
           <a:effectLst>
-            <a:outerShdw sx="100000" sy="100000" kx="0" ky="0" algn="bl" rotWithShape="0" blurRad="88900" dist="25400" dir="5400000">
+            <a:outerShdw blurRad="88900" dist="25400" dir="5400000" algn="bl" rotWithShape="0">
               <a:srgbClr val="000000">
                 <a:alpha val="10000"/>
               </a:srgbClr>
             </a:outerShdw>
           </a:effectLst>
         </p:spPr>
+        <p:txBody>
+          <a:bodyPr/>
+          <a:lstStyle/>
+          <a:p>
+            <a:endParaRPr lang="it-IT"/>
+          </a:p>
+        </p:txBody>
       </p:sp>
       <p:sp>
         <p:nvSpPr>
@@ -14938,6 +15507,13 @@
           </a:solidFill>
           <a:ln/>
         </p:spPr>
+        <p:txBody>
+          <a:bodyPr/>
+          <a:lstStyle/>
+          <a:p>
+            <a:endParaRPr lang="it-IT"/>
+          </a:p>
+        </p:txBody>
       </p:sp>
       <p:sp>
         <p:nvSpPr>
@@ -14960,7 +15536,7 @@
           <a:bodyPr wrap="square" lIns="0" tIns="0" rIns="0" bIns="0" rtlCol="0" anchor="ctr"/>
           <a:lstStyle/>
           <a:p>
-            <a:pPr algn="ctr" indent="0" marL="0">
+            <a:pPr marL="0" indent="0" algn="ctr">
               <a:buNone/>
             </a:pPr>
             <a:r>
@@ -14999,7 +15575,7 @@
           <a:bodyPr wrap="square" lIns="0" tIns="0" rIns="0" bIns="0" rtlCol="0" anchor="t"/>
           <a:lstStyle/>
           <a:p>
-            <a:pPr algn="ctr" indent="0" marL="0">
+            <a:pPr marL="0" indent="0" algn="ctr">
               <a:lnSpc>
                 <a:spcPct val="115000"/>
               </a:lnSpc>
@@ -15019,7 +15595,7 @@
             <a:endParaRPr lang="en-US" sz="1000" dirty="0"/>
           </a:p>
           <a:p>
-            <a:pPr algn="ctr" indent="0" marL="0">
+            <a:pPr marL="0" indent="0" algn="ctr">
               <a:lnSpc>
                 <a:spcPct val="115000"/>
               </a:lnSpc>
@@ -15059,6 +15635,13 @@
           </a:solidFill>
           <a:ln/>
         </p:spPr>
+        <p:txBody>
+          <a:bodyPr/>
+          <a:lstStyle/>
+          <a:p>
+            <a:endParaRPr lang="it-IT"/>
+          </a:p>
+        </p:txBody>
       </p:sp>
       <p:sp>
         <p:nvSpPr>
@@ -15086,13 +15669,20 @@
             <a:prstDash val="solid"/>
           </a:ln>
           <a:effectLst>
-            <a:outerShdw sx="100000" sy="100000" kx="0" ky="0" algn="bl" rotWithShape="0" blurRad="88900" dist="25400" dir="5400000">
+            <a:outerShdw blurRad="88900" dist="25400" dir="5400000" algn="bl" rotWithShape="0">
               <a:srgbClr val="000000">
                 <a:alpha val="10000"/>
               </a:srgbClr>
             </a:outerShdw>
           </a:effectLst>
         </p:spPr>
+        <p:txBody>
+          <a:bodyPr/>
+          <a:lstStyle/>
+          <a:p>
+            <a:endParaRPr lang="it-IT"/>
+          </a:p>
+        </p:txBody>
       </p:sp>
       <p:sp>
         <p:nvSpPr>
@@ -15113,6 +15703,13 @@
           </a:solidFill>
           <a:ln/>
         </p:spPr>
+        <p:txBody>
+          <a:bodyPr/>
+          <a:lstStyle/>
+          <a:p>
+            <a:endParaRPr lang="it-IT"/>
+          </a:p>
+        </p:txBody>
       </p:sp>
       <p:sp>
         <p:nvSpPr>
@@ -15135,7 +15732,7 @@
           <a:bodyPr wrap="square" lIns="0" tIns="0" rIns="0" bIns="0" rtlCol="0" anchor="ctr"/>
           <a:lstStyle/>
           <a:p>
-            <a:pPr algn="ctr" indent="0" marL="0">
+            <a:pPr marL="0" indent="0" algn="ctr">
               <a:buNone/>
             </a:pPr>
             <a:r>
@@ -15174,7 +15771,7 @@
           <a:bodyPr wrap="square" lIns="0" tIns="0" rIns="0" bIns="0" rtlCol="0" anchor="t"/>
           <a:lstStyle/>
           <a:p>
-            <a:pPr algn="ctr" indent="0" marL="0">
+            <a:pPr marL="0" indent="0" algn="ctr">
               <a:lnSpc>
                 <a:spcPct val="115000"/>
               </a:lnSpc>
@@ -15194,7 +15791,7 @@
             <a:endParaRPr lang="en-US" sz="1000" dirty="0"/>
           </a:p>
           <a:p>
-            <a:pPr algn="ctr" indent="0" marL="0">
+            <a:pPr marL="0" indent="0" algn="ctr">
               <a:lnSpc>
                 <a:spcPct val="115000"/>
               </a:lnSpc>
@@ -15234,6 +15831,13 @@
           </a:solidFill>
           <a:ln/>
         </p:spPr>
+        <p:txBody>
+          <a:bodyPr/>
+          <a:lstStyle/>
+          <a:p>
+            <a:endParaRPr lang="it-IT"/>
+          </a:p>
+        </p:txBody>
       </p:sp>
       <p:sp>
         <p:nvSpPr>
@@ -15261,13 +15865,20 @@
             <a:prstDash val="solid"/>
           </a:ln>
           <a:effectLst>
-            <a:outerShdw sx="100000" sy="100000" kx="0" ky="0" algn="bl" rotWithShape="0" blurRad="88900" dist="25400" dir="5400000">
+            <a:outerShdw blurRad="88900" dist="25400" dir="5400000" algn="bl" rotWithShape="0">
               <a:srgbClr val="000000">
                 <a:alpha val="10000"/>
               </a:srgbClr>
             </a:outerShdw>
           </a:effectLst>
         </p:spPr>
+        <p:txBody>
+          <a:bodyPr/>
+          <a:lstStyle/>
+          <a:p>
+            <a:endParaRPr lang="it-IT"/>
+          </a:p>
+        </p:txBody>
       </p:sp>
       <p:sp>
         <p:nvSpPr>
@@ -15288,6 +15899,13 @@
           </a:solidFill>
           <a:ln/>
         </p:spPr>
+        <p:txBody>
+          <a:bodyPr/>
+          <a:lstStyle/>
+          <a:p>
+            <a:endParaRPr lang="it-IT"/>
+          </a:p>
+        </p:txBody>
       </p:sp>
       <p:sp>
         <p:nvSpPr>
@@ -15310,7 +15928,7 @@
           <a:bodyPr wrap="square" lIns="0" tIns="0" rIns="0" bIns="0" rtlCol="0" anchor="ctr"/>
           <a:lstStyle/>
           <a:p>
-            <a:pPr algn="ctr" indent="0" marL="0">
+            <a:pPr marL="0" indent="0" algn="ctr">
               <a:buNone/>
             </a:pPr>
             <a:r>
@@ -15349,7 +15967,7 @@
           <a:bodyPr wrap="square" lIns="0" tIns="0" rIns="0" bIns="0" rtlCol="0" anchor="t"/>
           <a:lstStyle/>
           <a:p>
-            <a:pPr algn="ctr" indent="0" marL="0">
+            <a:pPr marL="0" indent="0" algn="ctr">
               <a:lnSpc>
                 <a:spcPct val="115000"/>
               </a:lnSpc>
@@ -15369,7 +15987,7 @@
             <a:endParaRPr lang="en-US" sz="1000" dirty="0"/>
           </a:p>
           <a:p>
-            <a:pPr algn="ctr" indent="0" marL="0">
+            <a:pPr marL="0" indent="0" algn="ctr">
               <a:lnSpc>
                 <a:spcPct val="115000"/>
               </a:lnSpc>
@@ -15409,6 +16027,13 @@
           </a:solidFill>
           <a:ln/>
         </p:spPr>
+        <p:txBody>
+          <a:bodyPr/>
+          <a:lstStyle/>
+          <a:p>
+            <a:endParaRPr lang="it-IT"/>
+          </a:p>
+        </p:txBody>
       </p:sp>
       <p:sp>
         <p:nvSpPr>
@@ -15436,13 +16061,20 @@
             <a:prstDash val="solid"/>
           </a:ln>
           <a:effectLst>
-            <a:outerShdw sx="100000" sy="100000" kx="0" ky="0" algn="bl" rotWithShape="0" blurRad="88900" dist="25400" dir="5400000">
+            <a:outerShdw blurRad="88900" dist="25400" dir="5400000" algn="bl" rotWithShape="0">
               <a:srgbClr val="000000">
                 <a:alpha val="10000"/>
               </a:srgbClr>
             </a:outerShdw>
           </a:effectLst>
         </p:spPr>
+        <p:txBody>
+          <a:bodyPr/>
+          <a:lstStyle/>
+          <a:p>
+            <a:endParaRPr lang="it-IT"/>
+          </a:p>
+        </p:txBody>
       </p:sp>
       <p:sp>
         <p:nvSpPr>
@@ -15463,6 +16095,13 @@
           </a:solidFill>
           <a:ln/>
         </p:spPr>
+        <p:txBody>
+          <a:bodyPr/>
+          <a:lstStyle/>
+          <a:p>
+            <a:endParaRPr lang="it-IT"/>
+          </a:p>
+        </p:txBody>
       </p:sp>
       <p:sp>
         <p:nvSpPr>
@@ -15485,7 +16124,7 @@
           <a:bodyPr wrap="square" lIns="0" tIns="0" rIns="0" bIns="0" rtlCol="0" anchor="ctr"/>
           <a:lstStyle/>
           <a:p>
-            <a:pPr algn="ctr" indent="0" marL="0">
+            <a:pPr marL="0" indent="0" algn="ctr">
               <a:buNone/>
             </a:pPr>
             <a:r>
@@ -15524,7 +16163,7 @@
           <a:bodyPr wrap="square" lIns="0" tIns="0" rIns="0" bIns="0" rtlCol="0" anchor="t"/>
           <a:lstStyle/>
           <a:p>
-            <a:pPr algn="ctr" indent="0" marL="0">
+            <a:pPr marL="0" indent="0" algn="ctr">
               <a:lnSpc>
                 <a:spcPct val="115000"/>
               </a:lnSpc>
@@ -15544,7 +16183,7 @@
             <a:endParaRPr lang="en-US" sz="1000" dirty="0"/>
           </a:p>
           <a:p>
-            <a:pPr algn="ctr" indent="0" marL="0">
+            <a:pPr marL="0" indent="0" algn="ctr">
               <a:lnSpc>
                 <a:spcPct val="115000"/>
               </a:lnSpc>
@@ -15584,6 +16223,13 @@
           </a:solidFill>
           <a:ln/>
         </p:spPr>
+        <p:txBody>
+          <a:bodyPr/>
+          <a:lstStyle/>
+          <a:p>
+            <a:endParaRPr lang="it-IT"/>
+          </a:p>
+        </p:txBody>
       </p:sp>
       <p:sp>
         <p:nvSpPr>
@@ -15611,13 +16257,20 @@
             <a:prstDash val="solid"/>
           </a:ln>
           <a:effectLst>
-            <a:outerShdw sx="100000" sy="100000" kx="0" ky="0" algn="bl" rotWithShape="0" blurRad="88900" dist="25400" dir="5400000">
+            <a:outerShdw blurRad="88900" dist="25400" dir="5400000" algn="bl" rotWithShape="0">
               <a:srgbClr val="000000">
                 <a:alpha val="10000"/>
               </a:srgbClr>
             </a:outerShdw>
           </a:effectLst>
         </p:spPr>
+        <p:txBody>
+          <a:bodyPr/>
+          <a:lstStyle/>
+          <a:p>
+            <a:endParaRPr lang="it-IT"/>
+          </a:p>
+        </p:txBody>
       </p:sp>
       <p:sp>
         <p:nvSpPr>
@@ -15638,6 +16291,13 @@
           </a:solidFill>
           <a:ln/>
         </p:spPr>
+        <p:txBody>
+          <a:bodyPr/>
+          <a:lstStyle/>
+          <a:p>
+            <a:endParaRPr lang="it-IT"/>
+          </a:p>
+        </p:txBody>
       </p:sp>
       <p:sp>
         <p:nvSpPr>
@@ -15660,7 +16320,7 @@
           <a:bodyPr wrap="square" lIns="0" tIns="0" rIns="0" bIns="0" rtlCol="0" anchor="ctr"/>
           <a:lstStyle/>
           <a:p>
-            <a:pPr algn="ctr" indent="0" marL="0">
+            <a:pPr marL="0" indent="0" algn="ctr">
               <a:buNone/>
             </a:pPr>
             <a:r>
@@ -15699,7 +16359,7 @@
           <a:bodyPr wrap="square" lIns="0" tIns="0" rIns="0" bIns="0" rtlCol="0" anchor="t"/>
           <a:lstStyle/>
           <a:p>
-            <a:pPr algn="ctr" indent="0" marL="0">
+            <a:pPr marL="0" indent="0" algn="ctr">
               <a:lnSpc>
                 <a:spcPct val="115000"/>
               </a:lnSpc>
@@ -15719,7 +16379,7 @@
             <a:endParaRPr lang="en-US" sz="1000" dirty="0"/>
           </a:p>
           <a:p>
-            <a:pPr algn="ctr" indent="0" marL="0">
+            <a:pPr marL="0" indent="0" algn="ctr">
               <a:lnSpc>
                 <a:spcPct val="115000"/>
               </a:lnSpc>
@@ -15766,13 +16426,20 @@
             <a:prstDash val="solid"/>
           </a:ln>
           <a:effectLst>
-            <a:outerShdw sx="100000" sy="100000" kx="0" ky="0" algn="bl" rotWithShape="0" blurRad="88900" dist="25400" dir="5400000">
+            <a:outerShdw blurRad="88900" dist="25400" dir="5400000" algn="bl" rotWithShape="0">
               <a:srgbClr val="000000">
                 <a:alpha val="10000"/>
               </a:srgbClr>
             </a:outerShdw>
           </a:effectLst>
         </p:spPr>
+        <p:txBody>
+          <a:bodyPr/>
+          <a:lstStyle/>
+          <a:p>
+            <a:endParaRPr lang="it-IT"/>
+          </a:p>
+        </p:txBody>
       </p:sp>
       <p:sp>
         <p:nvSpPr>
@@ -15795,7 +16462,7 @@
           <a:bodyPr wrap="square" lIns="0" tIns="0" rIns="0" bIns="0" rtlCol="0" anchor="ctr"/>
           <a:lstStyle/>
           <a:p>
-            <a:pPr indent="0" marL="0">
+            <a:pPr marL="0" indent="0">
               <a:buNone/>
             </a:pPr>
             <a:r>
@@ -15834,7 +16501,7 @@
           <a:bodyPr wrap="square" lIns="0" tIns="0" rIns="0" bIns="0" rtlCol="0" anchor="ctr"/>
           <a:lstStyle/>
           <a:p>
-            <a:pPr indent="0" marL="0">
+            <a:pPr marL="0" indent="0">
               <a:buNone/>
             </a:pPr>
             <a:r>
@@ -15873,7 +16540,7 @@
           <a:bodyPr wrap="square" lIns="0" tIns="0" rIns="0" bIns="0" rtlCol="0" anchor="ctr"/>
           <a:lstStyle/>
           <a:p>
-            <a:pPr algn="r" indent="0" marL="0">
+            <a:pPr marL="0" indent="0" algn="r">
               <a:buNone/>
             </a:pPr>
             <a:r>
@@ -15907,6 +16574,7 @@
         <a:solidFill>
           <a:srgbClr val="FFFFFF"/>
         </a:solidFill>
+        <a:effectLst/>
       </p:bgPr>
     </p:bg>
     <p:spTree>
@@ -15944,11 +16612,11 @@
           <a:bodyPr wrap="square" lIns="0" tIns="0" rIns="0" bIns="0" rtlCol="0" anchor="ctr"/>
           <a:lstStyle/>
           <a:p>
-            <a:pPr indent="0" marL="0">
-              <a:buNone/>
-            </a:pPr>
-            <a:r>
-              <a:rPr lang="en-US" sz="1250" b="1" spc="200" kern="0" dirty="0">
+            <a:pPr marL="0" indent="0">
+              <a:buNone/>
+            </a:pPr>
+            <a:r>
+              <a:rPr lang="en-US" sz="1250" b="1" kern="0" spc="200" dirty="0">
                 <a:solidFill>
                   <a:srgbClr val="0E8A8A"/>
                 </a:solidFill>
@@ -15983,7 +16651,7 @@
           <a:bodyPr wrap="square" lIns="0" tIns="0" rIns="0" bIns="0" rtlCol="0" anchor="t"/>
           <a:lstStyle/>
           <a:p>
-            <a:pPr indent="0" marL="0">
+            <a:pPr marL="0" indent="0">
               <a:buNone/>
             </a:pPr>
             <a:r>
@@ -16027,13 +16695,20 @@
             <a:prstDash val="solid"/>
           </a:ln>
           <a:effectLst>
-            <a:outerShdw sx="100000" sy="100000" kx="0" ky="0" algn="bl" rotWithShape="0" blurRad="88900" dist="25400" dir="5400000">
+            <a:outerShdw blurRad="88900" dist="25400" dir="5400000" algn="bl" rotWithShape="0">
               <a:srgbClr val="000000">
                 <a:alpha val="10000"/>
               </a:srgbClr>
             </a:outerShdw>
           </a:effectLst>
         </p:spPr>
+        <p:txBody>
+          <a:bodyPr/>
+          <a:lstStyle/>
+          <a:p>
+            <a:endParaRPr lang="it-IT"/>
+          </a:p>
+        </p:txBody>
       </p:sp>
       <p:sp>
         <p:nvSpPr>
@@ -16054,17 +16729,24 @@
           </a:solidFill>
           <a:ln/>
         </p:spPr>
+        <p:txBody>
+          <a:bodyPr/>
+          <a:lstStyle/>
+          <a:p>
+            <a:endParaRPr lang="it-IT"/>
+          </a:p>
+        </p:txBody>
       </p:sp>
       <p:pic>
         <p:nvPicPr>
-          <p:cNvPr id="6" name="Image 0" descr="preencoded.png">    </p:cNvPr>
+          <p:cNvPr id="6" name="Image 0" descr="preencoded.png"/>
           <p:cNvPicPr>
             <a:picLocks noChangeAspect="1"/>
           </p:cNvPicPr>
           <p:nvPr/>
         </p:nvPicPr>
         <p:blipFill>
-          <a:blip r:embed="rId1"/>
+          <a:blip r:embed="rId3"/>
           <a:stretch>
             <a:fillRect/>
           </a:stretch>
@@ -16100,7 +16782,7 @@
           <a:bodyPr wrap="square" lIns="0" tIns="0" rIns="0" bIns="0" rtlCol="0" anchor="ctr"/>
           <a:lstStyle/>
           <a:p>
-            <a:pPr indent="0" marL="0">
+            <a:pPr marL="0" indent="0">
               <a:buNone/>
             </a:pPr>
             <a:r>
@@ -16250,13 +16932,20 @@
             <a:prstDash val="solid"/>
           </a:ln>
           <a:effectLst>
-            <a:outerShdw sx="100000" sy="100000" kx="0" ky="0" algn="bl" rotWithShape="0" blurRad="88900" dist="25400" dir="5400000">
+            <a:outerShdw blurRad="88900" dist="25400" dir="5400000" algn="bl" rotWithShape="0">
               <a:srgbClr val="000000">
                 <a:alpha val="10000"/>
               </a:srgbClr>
             </a:outerShdw>
           </a:effectLst>
         </p:spPr>
+        <p:txBody>
+          <a:bodyPr/>
+          <a:lstStyle/>
+          <a:p>
+            <a:endParaRPr lang="it-IT"/>
+          </a:p>
+        </p:txBody>
       </p:sp>
       <p:sp>
         <p:nvSpPr>
@@ -16277,17 +16966,24 @@
           </a:solidFill>
           <a:ln/>
         </p:spPr>
+        <p:txBody>
+          <a:bodyPr/>
+          <a:lstStyle/>
+          <a:p>
+            <a:endParaRPr lang="it-IT"/>
+          </a:p>
+        </p:txBody>
       </p:sp>
       <p:pic>
         <p:nvPicPr>
-          <p:cNvPr id="11" name="Image 1" descr="preencoded.png">    </p:cNvPr>
+          <p:cNvPr id="11" name="Image 1" descr="preencoded.png"/>
           <p:cNvPicPr>
             <a:picLocks noChangeAspect="1"/>
           </p:cNvPicPr>
           <p:nvPr/>
         </p:nvPicPr>
         <p:blipFill>
-          <a:blip r:embed="rId2"/>
+          <a:blip r:embed="rId4"/>
           <a:stretch>
             <a:fillRect/>
           </a:stretch>
@@ -16323,7 +17019,7 @@
           <a:bodyPr wrap="square" lIns="0" tIns="0" rIns="0" bIns="0" rtlCol="0" anchor="ctr"/>
           <a:lstStyle/>
           <a:p>
-            <a:pPr indent="0" marL="0">
+            <a:pPr marL="0" indent="0">
               <a:buNone/>
             </a:pPr>
             <a:r>
@@ -16489,13 +17185,20 @@
           </a:solidFill>
           <a:ln/>
           <a:effectLst>
-            <a:outerShdw sx="100000" sy="100000" kx="0" ky="0" algn="bl" rotWithShape="0" blurRad="88900" dist="25400" dir="5400000">
+            <a:outerShdw blurRad="88900" dist="25400" dir="5400000" algn="bl" rotWithShape="0">
               <a:srgbClr val="000000">
                 <a:alpha val="10000"/>
               </a:srgbClr>
             </a:outerShdw>
           </a:effectLst>
         </p:spPr>
+        <p:txBody>
+          <a:bodyPr/>
+          <a:lstStyle/>
+          <a:p>
+            <a:endParaRPr lang="it-IT"/>
+          </a:p>
+        </p:txBody>
       </p:sp>
       <p:sp>
         <p:nvSpPr>
@@ -16518,7 +17221,7 @@
           <a:bodyPr wrap="square" lIns="0" tIns="0" rIns="0" bIns="0" rtlCol="0" anchor="ctr"/>
           <a:lstStyle/>
           <a:p>
-            <a:pPr algn="ctr" indent="0" marL="0">
+            <a:pPr marL="0" indent="0" algn="ctr">
               <a:buNone/>
             </a:pPr>
             <a:r>
@@ -16558,6 +17261,13 @@
             <a:prstDash val="solid"/>
           </a:ln>
         </p:spPr>
+        <p:txBody>
+          <a:bodyPr/>
+          <a:lstStyle/>
+          <a:p>
+            <a:endParaRPr lang="it-IT"/>
+          </a:p>
+        </p:txBody>
       </p:sp>
       <p:sp>
         <p:nvSpPr>
@@ -16581,6 +17291,13 @@
             <a:prstDash val="solid"/>
           </a:ln>
         </p:spPr>
+        <p:txBody>
+          <a:bodyPr/>
+          <a:lstStyle/>
+          <a:p>
+            <a:endParaRPr lang="it-IT"/>
+          </a:p>
+        </p:txBody>
       </p:sp>
       <p:sp>
         <p:nvSpPr>
@@ -16604,6 +17321,13 @@
             <a:prstDash val="solid"/>
           </a:ln>
         </p:spPr>
+        <p:txBody>
+          <a:bodyPr/>
+          <a:lstStyle/>
+          <a:p>
+            <a:endParaRPr lang="it-IT"/>
+          </a:p>
+        </p:txBody>
       </p:sp>
       <p:sp>
         <p:nvSpPr>
@@ -16631,13 +17355,20 @@
             <a:prstDash val="solid"/>
           </a:ln>
           <a:effectLst>
-            <a:outerShdw sx="100000" sy="100000" kx="0" ky="0" algn="bl" rotWithShape="0" blurRad="88900" dist="25400" dir="5400000">
+            <a:outerShdw blurRad="88900" dist="25400" dir="5400000" algn="bl" rotWithShape="0">
               <a:srgbClr val="000000">
                 <a:alpha val="10000"/>
               </a:srgbClr>
             </a:outerShdw>
           </a:effectLst>
         </p:spPr>
+        <p:txBody>
+          <a:bodyPr/>
+          <a:lstStyle/>
+          <a:p>
+            <a:endParaRPr lang="it-IT"/>
+          </a:p>
+        </p:txBody>
       </p:sp>
       <p:sp>
         <p:nvSpPr>
@@ -16660,7 +17391,7 @@
           <a:bodyPr wrap="square" lIns="0" tIns="0" rIns="0" bIns="0" rtlCol="0" anchor="ctr"/>
           <a:lstStyle/>
           <a:p>
-            <a:pPr indent="0" marL="0">
+            <a:pPr marL="0" indent="0">
               <a:buNone/>
             </a:pPr>
             <a:r>
@@ -16674,9 +17405,6 @@
               </a:rPr>
               <a:t>Design choice: </a:t>
             </a:r>
-            <a:pPr indent="0" marL="0">
-              <a:buNone/>
-            </a:pPr>
             <a:r>
               <a:rPr lang="en-US" sz="1150" dirty="0">
                 <a:solidFill>
@@ -16713,7 +17441,7 @@
           <a:bodyPr wrap="square" lIns="0" tIns="0" rIns="0" bIns="0" rtlCol="0" anchor="ctr"/>
           <a:lstStyle/>
           <a:p>
-            <a:pPr indent="0" marL="0">
+            <a:pPr marL="0" indent="0">
               <a:buNone/>
             </a:pPr>
             <a:r>
@@ -16752,7 +17480,7 @@
           <a:bodyPr wrap="square" lIns="0" tIns="0" rIns="0" bIns="0" rtlCol="0" anchor="ctr"/>
           <a:lstStyle/>
           <a:p>
-            <a:pPr algn="r" indent="0" marL="0">
+            <a:pPr marL="0" indent="0" algn="r">
               <a:buNone/>
             </a:pPr>
             <a:r>
@@ -16786,6 +17514,7 @@
         <a:solidFill>
           <a:srgbClr val="FFFFFF"/>
         </a:solidFill>
+        <a:effectLst/>
       </p:bgPr>
     </p:bg>
     <p:spTree>
@@ -16823,11 +17552,11 @@
           <a:bodyPr wrap="square" lIns="0" tIns="0" rIns="0" bIns="0" rtlCol="0" anchor="ctr"/>
           <a:lstStyle/>
           <a:p>
-            <a:pPr indent="0" marL="0">
-              <a:buNone/>
-            </a:pPr>
-            <a:r>
-              <a:rPr lang="en-US" sz="1250" b="1" spc="200" kern="0" dirty="0">
+            <a:pPr marL="0" indent="0">
+              <a:buNone/>
+            </a:pPr>
+            <a:r>
+              <a:rPr lang="en-US" sz="1250" b="1" kern="0" spc="200" dirty="0">
                 <a:solidFill>
                   <a:srgbClr val="0E8A8A"/>
                 </a:solidFill>
@@ -16862,7 +17591,7 @@
           <a:bodyPr wrap="square" lIns="0" tIns="0" rIns="0" bIns="0" rtlCol="0" anchor="t"/>
           <a:lstStyle/>
           <a:p>
-            <a:pPr indent="0" marL="0">
+            <a:pPr marL="0" indent="0">
               <a:buNone/>
             </a:pPr>
             <a:r>
@@ -16906,13 +17635,20 @@
             <a:prstDash val="solid"/>
           </a:ln>
           <a:effectLst>
-            <a:outerShdw sx="100000" sy="100000" kx="0" ky="0" algn="bl" rotWithShape="0" blurRad="88900" dist="25400" dir="5400000">
+            <a:outerShdw blurRad="88900" dist="25400" dir="5400000" algn="bl" rotWithShape="0">
               <a:srgbClr val="000000">
                 <a:alpha val="10000"/>
               </a:srgbClr>
             </a:outerShdw>
           </a:effectLst>
         </p:spPr>
+        <p:txBody>
+          <a:bodyPr/>
+          <a:lstStyle/>
+          <a:p>
+            <a:endParaRPr lang="it-IT"/>
+          </a:p>
+        </p:txBody>
       </p:sp>
       <p:sp>
         <p:nvSpPr>
@@ -16933,17 +17669,24 @@
           </a:solidFill>
           <a:ln/>
         </p:spPr>
+        <p:txBody>
+          <a:bodyPr/>
+          <a:lstStyle/>
+          <a:p>
+            <a:endParaRPr lang="it-IT"/>
+          </a:p>
+        </p:txBody>
       </p:sp>
       <p:pic>
         <p:nvPicPr>
-          <p:cNvPr id="6" name="Image 0" descr="preencoded.png">    </p:cNvPr>
+          <p:cNvPr id="6" name="Image 0" descr="preencoded.png"/>
           <p:cNvPicPr>
             <a:picLocks noChangeAspect="1"/>
           </p:cNvPicPr>
           <p:nvPr/>
         </p:nvPicPr>
         <p:blipFill>
-          <a:blip r:embed="rId1"/>
+          <a:blip r:embed="rId3"/>
           <a:stretch>
             <a:fillRect/>
           </a:stretch>
@@ -16979,7 +17722,7 @@
           <a:bodyPr wrap="square" lIns="0" tIns="0" rIns="0" bIns="0" rtlCol="0" anchor="t"/>
           <a:lstStyle/>
           <a:p>
-            <a:pPr algn="ctr" indent="0" marL="0">
+            <a:pPr marL="0" indent="0" algn="ctr">
               <a:buNone/>
             </a:pPr>
             <a:r>
@@ -17129,13 +17872,20 @@
             <a:prstDash val="solid"/>
           </a:ln>
           <a:effectLst>
-            <a:outerShdw sx="100000" sy="100000" kx="0" ky="0" algn="bl" rotWithShape="0" blurRad="88900" dist="25400" dir="5400000">
+            <a:outerShdw blurRad="88900" dist="25400" dir="5400000" algn="bl" rotWithShape="0">
               <a:srgbClr val="000000">
                 <a:alpha val="10000"/>
               </a:srgbClr>
             </a:outerShdw>
           </a:effectLst>
         </p:spPr>
+        <p:txBody>
+          <a:bodyPr/>
+          <a:lstStyle/>
+          <a:p>
+            <a:endParaRPr lang="it-IT"/>
+          </a:p>
+        </p:txBody>
       </p:sp>
       <p:sp>
         <p:nvSpPr>
@@ -17156,17 +17906,24 @@
           </a:solidFill>
           <a:ln/>
         </p:spPr>
+        <p:txBody>
+          <a:bodyPr/>
+          <a:lstStyle/>
+          <a:p>
+            <a:endParaRPr lang="it-IT"/>
+          </a:p>
+        </p:txBody>
       </p:sp>
       <p:pic>
         <p:nvPicPr>
-          <p:cNvPr id="11" name="Image 1" descr="preencoded.png">    </p:cNvPr>
+          <p:cNvPr id="11" name="Image 1" descr="preencoded.png"/>
           <p:cNvPicPr>
             <a:picLocks noChangeAspect="1"/>
           </p:cNvPicPr>
           <p:nvPr/>
         </p:nvPicPr>
         <p:blipFill>
-          <a:blip r:embed="rId2"/>
+          <a:blip r:embed="rId4"/>
           <a:stretch>
             <a:fillRect/>
           </a:stretch>
@@ -17202,7 +17959,7 @@
           <a:bodyPr wrap="square" lIns="0" tIns="0" rIns="0" bIns="0" rtlCol="0" anchor="t"/>
           <a:lstStyle/>
           <a:p>
-            <a:pPr algn="ctr" indent="0" marL="0">
+            <a:pPr marL="0" indent="0" algn="ctr">
               <a:buNone/>
             </a:pPr>
             <a:r>
@@ -17352,13 +18109,20 @@
             <a:prstDash val="solid"/>
           </a:ln>
           <a:effectLst>
-            <a:outerShdw sx="100000" sy="100000" kx="0" ky="0" algn="bl" rotWithShape="0" blurRad="88900" dist="25400" dir="5400000">
+            <a:outerShdw blurRad="88900" dist="25400" dir="5400000" algn="bl" rotWithShape="0">
               <a:srgbClr val="000000">
                 <a:alpha val="10000"/>
               </a:srgbClr>
             </a:outerShdw>
           </a:effectLst>
         </p:spPr>
+        <p:txBody>
+          <a:bodyPr/>
+          <a:lstStyle/>
+          <a:p>
+            <a:endParaRPr lang="it-IT"/>
+          </a:p>
+        </p:txBody>
       </p:sp>
       <p:sp>
         <p:nvSpPr>
@@ -17379,17 +18143,24 @@
           </a:solidFill>
           <a:ln/>
         </p:spPr>
+        <p:txBody>
+          <a:bodyPr/>
+          <a:lstStyle/>
+          <a:p>
+            <a:endParaRPr lang="it-IT"/>
+          </a:p>
+        </p:txBody>
       </p:sp>
       <p:pic>
         <p:nvPicPr>
-          <p:cNvPr id="16" name="Image 2" descr="preencoded.png">    </p:cNvPr>
+          <p:cNvPr id="16" name="Image 2" descr="preencoded.png"/>
           <p:cNvPicPr>
             <a:picLocks noChangeAspect="1"/>
           </p:cNvPicPr>
           <p:nvPr/>
         </p:nvPicPr>
         <p:blipFill>
-          <a:blip r:embed="rId3"/>
+          <a:blip r:embed="rId5"/>
           <a:stretch>
             <a:fillRect/>
           </a:stretch>
@@ -17425,7 +18196,7 @@
           <a:bodyPr wrap="square" lIns="0" tIns="0" rIns="0" bIns="0" rtlCol="0" anchor="t"/>
           <a:lstStyle/>
           <a:p>
-            <a:pPr algn="ctr" indent="0" marL="0">
+            <a:pPr marL="0" indent="0" algn="ctr">
               <a:buNone/>
             </a:pPr>
             <a:r>
@@ -17554,13 +18325,20 @@
             <a:prstDash val="solid"/>
           </a:ln>
           <a:effectLst>
-            <a:outerShdw sx="100000" sy="100000" kx="0" ky="0" algn="bl" rotWithShape="0" blurRad="88900" dist="25400" dir="5400000">
+            <a:outerShdw blurRad="88900" dist="25400" dir="5400000" algn="bl" rotWithShape="0">
               <a:srgbClr val="000000">
                 <a:alpha val="10000"/>
               </a:srgbClr>
             </a:outerShdw>
           </a:effectLst>
         </p:spPr>
+        <p:txBody>
+          <a:bodyPr/>
+          <a:lstStyle/>
+          <a:p>
+            <a:endParaRPr lang="it-IT"/>
+          </a:p>
+        </p:txBody>
       </p:sp>
       <p:sp>
         <p:nvSpPr>
@@ -17581,17 +18359,24 @@
           </a:solidFill>
           <a:ln/>
         </p:spPr>
+        <p:txBody>
+          <a:bodyPr/>
+          <a:lstStyle/>
+          <a:p>
+            <a:endParaRPr lang="it-IT"/>
+          </a:p>
+        </p:txBody>
       </p:sp>
       <p:pic>
         <p:nvPicPr>
-          <p:cNvPr id="21" name="Image 3" descr="preencoded.png">    </p:cNvPr>
+          <p:cNvPr id="21" name="Image 3" descr="preencoded.png"/>
           <p:cNvPicPr>
             <a:picLocks noChangeAspect="1"/>
           </p:cNvPicPr>
           <p:nvPr/>
         </p:nvPicPr>
         <p:blipFill>
-          <a:blip r:embed="rId4"/>
+          <a:blip r:embed="rId6"/>
           <a:stretch>
             <a:fillRect/>
           </a:stretch>
@@ -17627,7 +18412,7 @@
           <a:bodyPr wrap="square" lIns="0" tIns="0" rIns="0" bIns="0" rtlCol="0" anchor="t"/>
           <a:lstStyle/>
           <a:p>
-            <a:pPr algn="ctr" indent="0" marL="0">
+            <a:pPr marL="0" indent="0" algn="ctr">
               <a:buNone/>
             </a:pPr>
             <a:r>
@@ -17751,7 +18536,7 @@
           <a:bodyPr wrap="square" lIns="0" tIns="0" rIns="0" bIns="0" rtlCol="0" anchor="ctr"/>
           <a:lstStyle/>
           <a:p>
-            <a:pPr algn="ctr" indent="0" marL="0">
+            <a:pPr marL="0" indent="0" algn="ctr">
               <a:buNone/>
             </a:pPr>
             <a:r>
@@ -17790,7 +18575,7 @@
           <a:bodyPr wrap="square" lIns="0" tIns="0" rIns="0" bIns="0" rtlCol="0" anchor="ctr"/>
           <a:lstStyle/>
           <a:p>
-            <a:pPr indent="0" marL="0">
+            <a:pPr marL="0" indent="0">
               <a:buNone/>
             </a:pPr>
             <a:r>
@@ -17829,7 +18614,7 @@
           <a:bodyPr wrap="square" lIns="0" tIns="0" rIns="0" bIns="0" rtlCol="0" anchor="ctr"/>
           <a:lstStyle/>
           <a:p>
-            <a:pPr algn="r" indent="0" marL="0">
+            <a:pPr marL="0" indent="0" algn="r">
               <a:buNone/>
             </a:pPr>
             <a:r>
@@ -18148,4 +18933,319 @@
     </a:ext>
   </a:extLst>
 </a:theme>
+</file>
+
+<file path=ppt/theme/theme2.xml><?xml version="1.0" encoding="utf-8"?>
+<a:theme xmlns:a="http://schemas.openxmlformats.org/drawingml/2006/main" name="Tema di Office">
+  <a:themeElements>
+    <a:clrScheme name="Office">
+      <a:dk1>
+        <a:sysClr val="windowText" lastClr="000000"/>
+      </a:dk1>
+      <a:lt1>
+        <a:sysClr val="window" lastClr="FFFFFF"/>
+      </a:lt1>
+      <a:dk2>
+        <a:srgbClr val="0E2841"/>
+      </a:dk2>
+      <a:lt2>
+        <a:srgbClr val="E8E8E8"/>
+      </a:lt2>
+      <a:accent1>
+        <a:srgbClr val="156082"/>
+      </a:accent1>
+      <a:accent2>
+        <a:srgbClr val="E97132"/>
+      </a:accent2>
+      <a:accent3>
+        <a:srgbClr val="196B24"/>
+      </a:accent3>
+      <a:accent4>
+        <a:srgbClr val="0F9ED5"/>
+      </a:accent4>
+      <a:accent5>
+        <a:srgbClr val="A02B93"/>
+      </a:accent5>
+      <a:accent6>
+        <a:srgbClr val="4EA72E"/>
+      </a:accent6>
+      <a:hlink>
+        <a:srgbClr val="467886"/>
+      </a:hlink>
+      <a:folHlink>
+        <a:srgbClr val="96607D"/>
+      </a:folHlink>
+    </a:clrScheme>
+    <a:fontScheme name="Office">
+      <a:majorFont>
+        <a:latin typeface="Aptos Display" panose="02110004020202020204"/>
+        <a:ea typeface=""/>
+        <a:cs typeface=""/>
+        <a:font script="Jpan" typeface="游ゴシック Light"/>
+        <a:font script="Hang" typeface="맑은 고딕"/>
+        <a:font script="Hans" typeface="等线 Light"/>
+        <a:font script="Hant" typeface="新細明體"/>
+        <a:font script="Arab" typeface="Times New Roman"/>
+        <a:font script="Hebr" typeface="Times New Roman"/>
+        <a:font script="Thai" typeface="Angsana New"/>
+        <a:font script="Ethi" typeface="Nyala"/>
+        <a:font script="Beng" typeface="Vrinda"/>
+        <a:font script="Gujr" typeface="Shruti"/>
+        <a:font script="Khmr" typeface="MoolBoran"/>
+        <a:font script="Knda" typeface="Tunga"/>
+        <a:font script="Guru" typeface="Raavi"/>
+        <a:font script="Cans" typeface="Euphemia"/>
+        <a:font script="Cher" typeface="Plantagenet Cherokee"/>
+        <a:font script="Yiii" typeface="Microsoft Yi Baiti"/>
+        <a:font script="Tibt" typeface="Microsoft Himalaya"/>
+        <a:font script="Thaa" typeface="MV Boli"/>
+        <a:font script="Deva" typeface="Mangal"/>
+        <a:font script="Telu" typeface="Gautami"/>
+        <a:font script="Taml" typeface="Latha"/>
+        <a:font script="Syrc" typeface="Estrangelo Edessa"/>
+        <a:font script="Orya" typeface="Kalinga"/>
+        <a:font script="Mlym" typeface="Kartika"/>
+        <a:font script="Laoo" typeface="DokChampa"/>
+        <a:font script="Sinh" typeface="Iskoola Pota"/>
+        <a:font script="Mong" typeface="Mongolian Baiti"/>
+        <a:font script="Viet" typeface="Times New Roman"/>
+        <a:font script="Uigh" typeface="Microsoft Uighur"/>
+        <a:font script="Geor" typeface="Sylfaen"/>
+        <a:font script="Armn" typeface="Arial"/>
+        <a:font script="Bugi" typeface="Leelawadee UI"/>
+        <a:font script="Bopo" typeface="Microsoft JhengHei"/>
+        <a:font script="Java" typeface="Javanese Text"/>
+        <a:font script="Lisu" typeface="Segoe UI"/>
+        <a:font script="Mymr" typeface="Myanmar Text"/>
+        <a:font script="Nkoo" typeface="Ebrima"/>
+        <a:font script="Olck" typeface="Nirmala UI"/>
+        <a:font script="Osma" typeface="Ebrima"/>
+        <a:font script="Phag" typeface="Phagspa"/>
+        <a:font script="Syrn" typeface="Estrangelo Edessa"/>
+        <a:font script="Syrj" typeface="Estrangelo Edessa"/>
+        <a:font script="Syre" typeface="Estrangelo Edessa"/>
+        <a:font script="Sora" typeface="Nirmala UI"/>
+        <a:font script="Tale" typeface="Microsoft Tai Le"/>
+        <a:font script="Talu" typeface="Microsoft New Tai Lue"/>
+        <a:font script="Tfng" typeface="Ebrima"/>
+      </a:majorFont>
+      <a:minorFont>
+        <a:latin typeface="Aptos" panose="02110004020202020204"/>
+        <a:ea typeface=""/>
+        <a:cs typeface=""/>
+        <a:font script="Jpan" typeface="游ゴシック"/>
+        <a:font script="Hang" typeface="맑은 고딕"/>
+        <a:font script="Hans" typeface="等线"/>
+        <a:font script="Hant" typeface="新細明體"/>
+        <a:font script="Arab" typeface="Arial"/>
+        <a:font script="Hebr" typeface="Arial"/>
+        <a:font script="Thai" typeface="Cordia New"/>
+        <a:font script="Ethi" typeface="Nyala"/>
+        <a:font script="Beng" typeface="Vrinda"/>
+        <a:font script="Gujr" typeface="Shruti"/>
+        <a:font script="Khmr" typeface="DaunPenh"/>
+        <a:font script="Knda" typeface="Tunga"/>
+        <a:font script="Guru" typeface="Raavi"/>
+        <a:font script="Cans" typeface="Euphemia"/>
+        <a:font script="Cher" typeface="Plantagenet Cherokee"/>
+        <a:font script="Yiii" typeface="Microsoft Yi Baiti"/>
+        <a:font script="Tibt" typeface="Microsoft Himalaya"/>
+        <a:font script="Thaa" typeface="MV Boli"/>
+        <a:font script="Deva" typeface="Mangal"/>
+        <a:font script="Telu" typeface="Gautami"/>
+        <a:font script="Taml" typeface="Latha"/>
+        <a:font script="Syrc" typeface="Estrangelo Edessa"/>
+        <a:font script="Orya" typeface="Kalinga"/>
+        <a:font script="Mlym" typeface="Kartika"/>
+        <a:font script="Laoo" typeface="DokChampa"/>
+        <a:font script="Sinh" typeface="Iskoola Pota"/>
+        <a:font script="Mong" typeface="Mongolian Baiti"/>
+        <a:font script="Viet" typeface="Arial"/>
+        <a:font script="Uigh" typeface="Microsoft Uighur"/>
+        <a:font script="Geor" typeface="Sylfaen"/>
+        <a:font script="Armn" typeface="Arial"/>
+        <a:font script="Bugi" typeface="Leelawadee UI"/>
+        <a:font script="Bopo" typeface="Microsoft JhengHei"/>
+        <a:font script="Java" typeface="Javanese Text"/>
+        <a:font script="Lisu" typeface="Segoe UI"/>
+        <a:font script="Mymr" typeface="Myanmar Text"/>
+        <a:font script="Nkoo" typeface="Ebrima"/>
+        <a:font script="Olck" typeface="Nirmala UI"/>
+        <a:font script="Osma" typeface="Ebrima"/>
+        <a:font script="Phag" typeface="Phagspa"/>
+        <a:font script="Syrn" typeface="Estrangelo Edessa"/>
+        <a:font script="Syrj" typeface="Estrangelo Edessa"/>
+        <a:font script="Syre" typeface="Estrangelo Edessa"/>
+        <a:font script="Sora" typeface="Nirmala UI"/>
+        <a:font script="Tale" typeface="Microsoft Tai Le"/>
+        <a:font script="Talu" typeface="Microsoft New Tai Lue"/>
+        <a:font script="Tfng" typeface="Ebrima"/>
+      </a:minorFont>
+    </a:fontScheme>
+    <a:fmtScheme name="Office">
+      <a:fillStyleLst>
+        <a:solidFill>
+          <a:schemeClr val="phClr"/>
+        </a:solidFill>
+        <a:gradFill rotWithShape="1">
+          <a:gsLst>
+            <a:gs pos="0">
+              <a:schemeClr val="phClr">
+                <a:lumMod val="110000"/>
+                <a:satMod val="105000"/>
+                <a:tint val="67000"/>
+              </a:schemeClr>
+            </a:gs>
+            <a:gs pos="50000">
+              <a:schemeClr val="phClr">
+                <a:lumMod val="105000"/>
+                <a:satMod val="103000"/>
+                <a:tint val="73000"/>
+              </a:schemeClr>
+            </a:gs>
+            <a:gs pos="100000">
+              <a:schemeClr val="phClr">
+                <a:lumMod val="105000"/>
+                <a:satMod val="109000"/>
+                <a:tint val="81000"/>
+              </a:schemeClr>
+            </a:gs>
+          </a:gsLst>
+          <a:lin ang="5400000" scaled="0"/>
+        </a:gradFill>
+        <a:gradFill rotWithShape="1">
+          <a:gsLst>
+            <a:gs pos="0">
+              <a:schemeClr val="phClr">
+                <a:satMod val="103000"/>
+                <a:lumMod val="102000"/>
+                <a:tint val="94000"/>
+              </a:schemeClr>
+            </a:gs>
+            <a:gs pos="50000">
+              <a:schemeClr val="phClr">
+                <a:satMod val="110000"/>
+                <a:lumMod val="100000"/>
+                <a:shade val="100000"/>
+              </a:schemeClr>
+            </a:gs>
+            <a:gs pos="100000">
+              <a:schemeClr val="phClr">
+                <a:lumMod val="99000"/>
+                <a:satMod val="120000"/>
+                <a:shade val="78000"/>
+              </a:schemeClr>
+            </a:gs>
+          </a:gsLst>
+          <a:lin ang="5400000" scaled="0"/>
+        </a:gradFill>
+      </a:fillStyleLst>
+      <a:lnStyleLst>
+        <a:ln w="12700" cap="flat" cmpd="sng" algn="ctr">
+          <a:solidFill>
+            <a:schemeClr val="phClr"/>
+          </a:solidFill>
+          <a:prstDash val="solid"/>
+          <a:miter lim="800000"/>
+        </a:ln>
+        <a:ln w="19050" cap="flat" cmpd="sng" algn="ctr">
+          <a:solidFill>
+            <a:schemeClr val="phClr"/>
+          </a:solidFill>
+          <a:prstDash val="solid"/>
+          <a:miter lim="800000"/>
+        </a:ln>
+        <a:ln w="25400" cap="flat" cmpd="sng" algn="ctr">
+          <a:solidFill>
+            <a:schemeClr val="phClr"/>
+          </a:solidFill>
+          <a:prstDash val="solid"/>
+          <a:miter lim="800000"/>
+        </a:ln>
+      </a:lnStyleLst>
+      <a:effectStyleLst>
+        <a:effectStyle>
+          <a:effectLst/>
+        </a:effectStyle>
+        <a:effectStyle>
+          <a:effectLst/>
+        </a:effectStyle>
+        <a:effectStyle>
+          <a:effectLst>
+            <a:outerShdw blurRad="57150" dist="19050" dir="5400000" algn="ctr" rotWithShape="0">
+              <a:srgbClr val="000000">
+                <a:alpha val="63000"/>
+              </a:srgbClr>
+            </a:outerShdw>
+          </a:effectLst>
+        </a:effectStyle>
+      </a:effectStyleLst>
+      <a:bgFillStyleLst>
+        <a:solidFill>
+          <a:schemeClr val="phClr"/>
+        </a:solidFill>
+        <a:solidFill>
+          <a:schemeClr val="phClr">
+            <a:tint val="95000"/>
+            <a:satMod val="170000"/>
+          </a:schemeClr>
+        </a:solidFill>
+        <a:gradFill rotWithShape="1">
+          <a:gsLst>
+            <a:gs pos="0">
+              <a:schemeClr val="phClr">
+                <a:tint val="93000"/>
+                <a:satMod val="150000"/>
+                <a:shade val="98000"/>
+                <a:lumMod val="102000"/>
+              </a:schemeClr>
+            </a:gs>
+            <a:gs pos="50000">
+              <a:schemeClr val="phClr">
+                <a:tint val="98000"/>
+                <a:satMod val="130000"/>
+                <a:shade val="90000"/>
+                <a:lumMod val="103000"/>
+              </a:schemeClr>
+            </a:gs>
+            <a:gs pos="100000">
+              <a:schemeClr val="phClr">
+                <a:shade val="63000"/>
+                <a:satMod val="120000"/>
+              </a:schemeClr>
+            </a:gs>
+          </a:gsLst>
+          <a:lin ang="5400000" scaled="0"/>
+        </a:gradFill>
+      </a:bgFillStyleLst>
+    </a:fmtScheme>
+  </a:themeElements>
+  <a:objectDefaults>
+    <a:lnDef>
+      <a:spPr/>
+      <a:bodyPr/>
+      <a:lstStyle/>
+      <a:style>
+        <a:lnRef idx="2">
+          <a:schemeClr val="accent1"/>
+        </a:lnRef>
+        <a:fillRef idx="0">
+          <a:schemeClr val="accent1"/>
+        </a:fillRef>
+        <a:effectRef idx="1">
+          <a:schemeClr val="accent1"/>
+        </a:effectRef>
+        <a:fontRef idx="minor">
+          <a:schemeClr val="tx1"/>
+        </a:fontRef>
+      </a:style>
+    </a:lnDef>
+  </a:objectDefaults>
+  <a:extraClrSchemeLst/>
+  <a:extLst>
+    <a:ext uri="{05A4C25C-085E-4340-85A3-A5531E510DB2}">
+      <thm15:themeFamily xmlns:thm15="http://schemas.microsoft.com/office/thememl/2012/main" name="Office Theme" id="{2E142A2C-CD16-42D6-873A-C26D2A0506FA}" vid="{1BDDFF52-6CD6-40A5-AB3C-68EB2F1E4D0A}"/>
+    </a:ext>
+  </a:extLst>
+</a:theme>
 </file>
--- a/docs/slides/Molinario_Thesis_Defense.pptx
+++ b/docs/slides/Molinario_Thesis_Defense.pptx
@@ -2219,8 +2219,8 @@
         </p:nvSpPr>
         <p:spPr>
           <a:xfrm>
-            <a:off x="4981354" y="4701505"/>
-            <a:ext cx="3578752" cy="320040"/>
+            <a:off x="5326380" y="4082796"/>
+            <a:ext cx="3109099" cy="713232"/>
           </a:xfrm>
           <a:prstGeom prst="rect">
             <a:avLst/>
@@ -2232,172 +2232,53 @@
           <a:bodyPr wrap="square" lIns="0" tIns="0" rIns="0" bIns="0" rtlCol="0" anchor="ctr"/>
           <a:lstStyle/>
           <a:p>
-            <a:pPr marL="0" indent="0">
-              <a:buNone/>
-            </a:pPr>
-            <a:r>
-              <a:rPr lang="en-US" sz="1300" b="1" kern="0" spc="220" dirty="0">
-                <a:solidFill>
-                  <a:srgbClr val="0E8A8A"/>
-                </a:solidFill>
-                <a:latin typeface="Calibri" pitchFamily="34" charset="0"/>
-                <a:ea typeface="Calibri" pitchFamily="34" charset="-122"/>
-                <a:cs typeface="Calibri" pitchFamily="34" charset="-120"/>
-              </a:rPr>
-              <a:t>MASTER'S THESIS DEFENSE</a:t>
-            </a:r>
-            <a:endParaRPr lang="en-US" sz="1300" dirty="0"/>
-          </a:p>
-        </p:txBody>
-      </p:sp>
-      <p:sp>
-        <p:nvSpPr>
-          <p:cNvPr id="7" name="Text 3"/>
-          <p:cNvSpPr/>
-          <p:nvPr/>
-        </p:nvSpPr>
-        <p:spPr>
-          <a:xfrm>
-            <a:off x="685800" y="1575001"/>
-            <a:ext cx="7772400" cy="1463040"/>
-          </a:xfrm>
-          <a:prstGeom prst="rect">
-            <a:avLst/>
-          </a:prstGeom>
-          <a:noFill/>
-          <a:ln/>
-        </p:spPr>
-        <p:txBody>
-          <a:bodyPr wrap="square" lIns="0" tIns="0" rIns="0" bIns="0" rtlCol="0" anchor="ctr"/>
-          <a:lstStyle/>
-          <a:p>
-            <a:pPr marL="0" indent="0" algn="ctr">
-              <a:lnSpc>
-                <a:spcPct val="112000"/>
-              </a:lnSpc>
-              <a:buNone/>
-            </a:pPr>
-            <a:r>
-              <a:rPr lang="en-US" sz="3000" b="1" dirty="0">
+            <a:r>
+              <a:rPr lang="en-US" sz="1400" dirty="0">
+                <a:solidFill>
+                  <a:srgbClr val="9FB1CC"/>
+                </a:solidFill>
+                <a:latin typeface="Calibri" pitchFamily="34" charset="0"/>
+                <a:ea typeface="Calibri" pitchFamily="34" charset="-122"/>
+                <a:cs typeface="Calibri" pitchFamily="34" charset="-120"/>
+              </a:rPr>
+              <a:t>Candidate: </a:t>
+            </a:r>
+            <a:r>
+              <a:rPr lang="en-US" sz="1400" b="1" dirty="0">
                 <a:solidFill>
                   <a:srgbClr val="FFFFFF"/>
                 </a:solidFill>
-                <a:latin typeface="Cambria" pitchFamily="34" charset="0"/>
-                <a:ea typeface="Cambria" pitchFamily="34" charset="-122"/>
-                <a:cs typeface="Cambria" pitchFamily="34" charset="-120"/>
-              </a:rPr>
-              <a:t>Evaluating the Robustness of AI-Based Forensic Tools</a:t>
-            </a:r>
-            <a:endParaRPr lang="en-US" sz="3000" dirty="0"/>
-          </a:p>
-          <a:p>
-            <a:pPr marL="0" indent="0">
-              <a:lnSpc>
-                <a:spcPct val="112000"/>
-              </a:lnSpc>
-              <a:buNone/>
-            </a:pPr>
-            <a:r>
-              <a:rPr lang="en-US" sz="3000" b="1" dirty="0">
+                <a:latin typeface="Calibri" pitchFamily="34" charset="0"/>
+                <a:ea typeface="Calibri" pitchFamily="34" charset="-122"/>
+                <a:cs typeface="Calibri" pitchFamily="34" charset="-120"/>
+              </a:rPr>
+              <a:t>Dr.</a:t>
+            </a:r>
+            <a:r>
+              <a:rPr lang="en-US" sz="1400" dirty="0">
+                <a:solidFill>
+                  <a:srgbClr val="9FB1CC"/>
+                </a:solidFill>
+                <a:latin typeface="Calibri" pitchFamily="34" charset="0"/>
+                <a:ea typeface="Calibri" pitchFamily="34" charset="-122"/>
+                <a:cs typeface="Calibri" pitchFamily="34" charset="-120"/>
+              </a:rPr>
+              <a:t> </a:t>
+            </a:r>
+            <a:r>
+              <a:rPr lang="en-US" sz="1400" b="1" dirty="0">
                 <a:solidFill>
                   <a:srgbClr val="FFFFFF"/>
                 </a:solidFill>
-                <a:latin typeface="Cambria" pitchFamily="34" charset="0"/>
-                <a:ea typeface="Cambria" pitchFamily="34" charset="-122"/>
-                <a:cs typeface="Cambria" pitchFamily="34" charset="-120"/>
-              </a:rPr>
-              <a:t>under Adversarial and Anti-Forensic Attacks</a:t>
-            </a:r>
-            <a:endParaRPr lang="en-US" sz="3000" dirty="0"/>
-          </a:p>
-        </p:txBody>
-      </p:sp>
-      <p:sp>
-        <p:nvSpPr>
-          <p:cNvPr id="8" name="Shape 4"/>
-          <p:cNvSpPr/>
-          <p:nvPr/>
-        </p:nvSpPr>
-        <p:spPr>
-          <a:xfrm>
-            <a:off x="722376" y="3310128"/>
-            <a:ext cx="54864" cy="54864"/>
-          </a:xfrm>
-          <a:prstGeom prst="ellipse">
-            <a:avLst/>
-          </a:prstGeom>
-          <a:solidFill>
-            <a:srgbClr val="0E8A8A"/>
-          </a:solidFill>
-          <a:ln/>
-        </p:spPr>
-        <p:txBody>
-          <a:bodyPr/>
-          <a:lstStyle/>
-          <a:p>
-            <a:endParaRPr lang="it-IT"/>
-          </a:p>
-        </p:txBody>
-      </p:sp>
-      <p:sp>
-        <p:nvSpPr>
-          <p:cNvPr id="9" name="Text 5"/>
-          <p:cNvSpPr/>
-          <p:nvPr/>
-        </p:nvSpPr>
-        <p:spPr>
-          <a:xfrm>
-            <a:off x="-173310" y="441570"/>
-            <a:ext cx="7680960" cy="685800"/>
-          </a:xfrm>
-          <a:prstGeom prst="rect">
-            <a:avLst/>
-          </a:prstGeom>
-          <a:noFill/>
-          <a:ln/>
-        </p:spPr>
-        <p:txBody>
-          <a:bodyPr wrap="square" lIns="0" tIns="0" rIns="0" bIns="0" rtlCol="0" anchor="ctr"/>
-          <a:lstStyle/>
-          <a:p>
-            <a:pPr marL="0" indent="0">
-              <a:spcAft>
-                <a:spcPts val="400"/>
-              </a:spcAft>
-              <a:buNone/>
-            </a:pPr>
-            <a:r>
-              <a:rPr lang="en-US" sz="1400" dirty="0">
-                <a:solidFill>
-                  <a:schemeClr val="bg1"/>
-                </a:solidFill>
-                <a:latin typeface="Calibri" pitchFamily="34" charset="0"/>
-                <a:ea typeface="Calibri" pitchFamily="34" charset="-122"/>
-                <a:cs typeface="Calibri" pitchFamily="34" charset="-120"/>
-              </a:rPr>
-              <a:t>Master's Degree in Computer Engineering, Cybersecurity and Artificial Intelligence</a:t>
-            </a:r>
-            <a:endParaRPr lang="en-US" sz="1400" dirty="0">
+                <a:latin typeface="Calibri" pitchFamily="34" charset="0"/>
+                <a:ea typeface="Calibri" pitchFamily="34" charset="-122"/>
+                <a:cs typeface="Calibri" pitchFamily="34" charset="-120"/>
+              </a:rPr>
+              <a:t>Lello Molinario</a:t>
+            </a:r>
+            <a:endParaRPr lang="en-US" sz="1400" b="1" kern="0" spc="220" dirty="0">
               <a:solidFill>
-                <a:schemeClr val="bg1"/>
-              </a:solidFill>
-            </a:endParaRPr>
-          </a:p>
-          <a:p>
-            <a:r>
-              <a:rPr lang="en-US" sz="1400" dirty="0" err="1">
-                <a:solidFill>
-                  <a:schemeClr val="bg1"/>
-                </a:solidFill>
-                <a:latin typeface="Calibri" pitchFamily="34" charset="0"/>
-                <a:ea typeface="Calibri" pitchFamily="34" charset="-122"/>
-                <a:cs typeface="Calibri" pitchFamily="34" charset="-120"/>
-              </a:rPr>
-              <a:t>UniversitY</a:t>
-            </a:r>
-            <a:endParaRPr lang="en-US" sz="1400" dirty="0">
-              <a:solidFill>
-                <a:schemeClr val="bg1"/>
+                <a:srgbClr val="0E8A8A"/>
               </a:solidFill>
               <a:latin typeface="Calibri" pitchFamily="34" charset="0"/>
               <a:ea typeface="Calibri" pitchFamily="34" charset="-122"/>
@@ -2405,76 +2286,128 @@
             </a:endParaRPr>
           </a:p>
           <a:p>
-            <a:r>
-              <a:rPr lang="it-IT" dirty="0">
-                <a:solidFill>
-                  <a:schemeClr val="bg1"/>
-                </a:solidFill>
-              </a:rPr>
-              <a:t>University of Cagliari</a:t>
-            </a:r>
-          </a:p>
-          <a:p>
-            <a:r>
-              <a:rPr lang="it-IT" b="1" dirty="0">
-                <a:solidFill>
-                  <a:schemeClr val="bg1"/>
-                </a:solidFill>
-              </a:rPr>
-              <a:t>Department of Engineering</a:t>
-            </a:r>
-          </a:p>
-          <a:p>
-            <a:r>
-              <a:rPr lang="en-US" dirty="0">
-                <a:solidFill>
-                  <a:schemeClr val="bg1"/>
-                </a:solidFill>
-              </a:rPr>
-              <a:t>Master’s Degree in “Computer Engineering,</a:t>
-            </a:r>
-          </a:p>
-          <a:p>
-            <a:r>
-              <a:rPr lang="it-IT" dirty="0">
-                <a:solidFill>
-                  <a:schemeClr val="bg1"/>
-                </a:solidFill>
-              </a:rPr>
-              <a:t>Cybersecurity and </a:t>
-            </a:r>
-            <a:r>
-              <a:rPr lang="it-IT" dirty="0" err="1">
-                <a:solidFill>
-                  <a:schemeClr val="bg1"/>
-                </a:solidFill>
-              </a:rPr>
-              <a:t>Artificial</a:t>
-            </a:r>
-            <a:r>
-              <a:rPr lang="it-IT" dirty="0">
-                <a:solidFill>
-                  <a:schemeClr val="bg1"/>
-                </a:solidFill>
-              </a:rPr>
-              <a:t> Intelligence”</a:t>
-            </a:r>
-            <a:r>
-              <a:rPr lang="en-US" sz="1400" dirty="0">
-                <a:solidFill>
-                  <a:schemeClr val="bg1"/>
-                </a:solidFill>
-                <a:latin typeface="Calibri" pitchFamily="34" charset="0"/>
-                <a:ea typeface="Calibri" pitchFamily="34" charset="-122"/>
-                <a:cs typeface="Calibri" pitchFamily="34" charset="-120"/>
-              </a:rPr>
-              <a:t>y of Cagliari</a:t>
-            </a:r>
-            <a:endParaRPr lang="en-US" sz="1400" dirty="0">
-              <a:solidFill>
-                <a:schemeClr val="bg1"/>
-              </a:solidFill>
-            </a:endParaRPr>
+            <a:pPr marL="0" indent="0">
+              <a:buNone/>
+            </a:pPr>
+            <a:r>
+              <a:rPr lang="en-US" sz="1300" b="1" kern="0" spc="220" dirty="0">
+                <a:solidFill>
+                  <a:srgbClr val="0E8A8A"/>
+                </a:solidFill>
+                <a:latin typeface="Calibri" pitchFamily="34" charset="0"/>
+                <a:ea typeface="Calibri" pitchFamily="34" charset="-122"/>
+                <a:cs typeface="Calibri" pitchFamily="34" charset="-120"/>
+              </a:rPr>
+              <a:t>MASTER'S THESIS DEFENSE</a:t>
+            </a:r>
+            <a:endParaRPr lang="en-US" sz="1300" dirty="0"/>
+          </a:p>
+        </p:txBody>
+      </p:sp>
+      <p:sp>
+        <p:nvSpPr>
+          <p:cNvPr id="7" name="Text 3"/>
+          <p:cNvSpPr/>
+          <p:nvPr/>
+        </p:nvSpPr>
+        <p:spPr>
+          <a:xfrm>
+            <a:off x="663079" y="2439747"/>
+            <a:ext cx="7772400" cy="1463040"/>
+          </a:xfrm>
+          <a:prstGeom prst="rect">
+            <a:avLst/>
+          </a:prstGeom>
+          <a:noFill/>
+          <a:ln/>
+        </p:spPr>
+        <p:txBody>
+          <a:bodyPr wrap="square" lIns="0" tIns="0" rIns="0" bIns="0" rtlCol="0" anchor="ctr"/>
+          <a:lstStyle/>
+          <a:p>
+            <a:pPr marL="0" indent="0" algn="ctr">
+              <a:lnSpc>
+                <a:spcPct val="112000"/>
+              </a:lnSpc>
+              <a:buNone/>
+            </a:pPr>
+            <a:r>
+              <a:rPr lang="en-US" sz="2800" b="1" dirty="0">
+                <a:solidFill>
+                  <a:srgbClr val="FFFFFF"/>
+                </a:solidFill>
+                <a:latin typeface="Cambria" pitchFamily="34" charset="0"/>
+                <a:ea typeface="Cambria" pitchFamily="34" charset="-122"/>
+                <a:cs typeface="Cambria" pitchFamily="34" charset="-120"/>
+              </a:rPr>
+              <a:t>Evaluating the Robustness of AI-Based </a:t>
+            </a:r>
+          </a:p>
+          <a:p>
+            <a:pPr marL="0" indent="0" algn="ctr">
+              <a:lnSpc>
+                <a:spcPct val="112000"/>
+              </a:lnSpc>
+              <a:buNone/>
+            </a:pPr>
+            <a:r>
+              <a:rPr lang="en-US" sz="2800" b="1" dirty="0">
+                <a:solidFill>
+                  <a:srgbClr val="FFFFFF"/>
+                </a:solidFill>
+                <a:latin typeface="Cambria" pitchFamily="34" charset="0"/>
+                <a:ea typeface="Cambria" pitchFamily="34" charset="-122"/>
+                <a:cs typeface="Cambria" pitchFamily="34" charset="-120"/>
+              </a:rPr>
+              <a:t>Forensic Tools under Adversarial </a:t>
+            </a:r>
+          </a:p>
+          <a:p>
+            <a:pPr marL="0" indent="0" algn="ctr">
+              <a:lnSpc>
+                <a:spcPct val="112000"/>
+              </a:lnSpc>
+              <a:buNone/>
+            </a:pPr>
+            <a:r>
+              <a:rPr lang="en-US" sz="2800" b="1" dirty="0">
+                <a:solidFill>
+                  <a:srgbClr val="FFFFFF"/>
+                </a:solidFill>
+                <a:latin typeface="Cambria" pitchFamily="34" charset="0"/>
+                <a:ea typeface="Cambria" pitchFamily="34" charset="-122"/>
+                <a:cs typeface="Cambria" pitchFamily="34" charset="-120"/>
+              </a:rPr>
+              <a:t>and Anti-Forensic Attacks</a:t>
+            </a:r>
+            <a:endParaRPr lang="en-US" sz="2800" dirty="0"/>
+          </a:p>
+        </p:txBody>
+      </p:sp>
+      <p:sp>
+        <p:nvSpPr>
+          <p:cNvPr id="8" name="Shape 4"/>
+          <p:cNvSpPr/>
+          <p:nvPr/>
+        </p:nvSpPr>
+        <p:spPr>
+          <a:xfrm>
+            <a:off x="722376" y="3310128"/>
+            <a:ext cx="54864" cy="54864"/>
+          </a:xfrm>
+          <a:prstGeom prst="ellipse">
+            <a:avLst/>
+          </a:prstGeom>
+          <a:solidFill>
+            <a:srgbClr val="0E8A8A"/>
+          </a:solidFill>
+          <a:ln/>
+        </p:spPr>
+        <p:txBody>
+          <a:bodyPr/>
+          <a:lstStyle/>
+          <a:p>
+            <a:endParaRPr lang="it-IT"/>
           </a:p>
         </p:txBody>
       </p:sp>
@@ -2486,7 +2419,7 @@
         </p:nvSpPr>
         <p:spPr>
           <a:xfrm>
-            <a:off x="388620" y="4367642"/>
+            <a:off x="388620" y="4119372"/>
             <a:ext cx="7680960" cy="640080"/>
           </a:xfrm>
           <a:prstGeom prst="rect">
@@ -2499,11 +2432,10 @@
           <a:bodyPr wrap="square" lIns="0" tIns="0" rIns="0" bIns="0" rtlCol="0" anchor="ctr"/>
           <a:lstStyle/>
           <a:p>
-            <a:pPr marL="0" indent="0">
+            <a:pPr>
               <a:spcAft>
                 <a:spcPts val="300"/>
               </a:spcAft>
-              <a:buNone/>
             </a:pPr>
             <a:r>
               <a:rPr lang="en-US" sz="1400" dirty="0">
@@ -2514,7 +2446,7 @@
                 <a:ea typeface="Calibri" pitchFamily="34" charset="-122"/>
                 <a:cs typeface="Calibri" pitchFamily="34" charset="-120"/>
               </a:rPr>
-              <a:t>Candidate: </a:t>
+              <a:t>Advisor: </a:t>
             </a:r>
             <a:r>
               <a:rPr lang="en-US" sz="1400" b="1" dirty="0">
@@ -2525,16 +2457,36 @@
                 <a:ea typeface="Calibri" pitchFamily="34" charset="-122"/>
                 <a:cs typeface="Calibri" pitchFamily="34" charset="-120"/>
               </a:rPr>
-              <a:t>Lello Molinario</a:t>
-            </a:r>
-            <a:endParaRPr lang="en-US" sz="1400" dirty="0"/>
-          </a:p>
-          <a:p>
-            <a:pPr marL="0" indent="0">
+              <a:t>Prof.</a:t>
+            </a:r>
+            <a:r>
+              <a:rPr lang="en-US" sz="1400" dirty="0">
+                <a:solidFill>
+                  <a:srgbClr val="9FB1CC"/>
+                </a:solidFill>
+                <a:latin typeface="Calibri" pitchFamily="34" charset="0"/>
+                <a:ea typeface="Calibri" pitchFamily="34" charset="-122"/>
+                <a:cs typeface="Calibri" pitchFamily="34" charset="-120"/>
+              </a:rPr>
+              <a:t> </a:t>
+            </a:r>
+            <a:r>
+              <a:rPr lang="en-US" sz="1400" b="1" dirty="0">
+                <a:solidFill>
+                  <a:srgbClr val="FFFFFF"/>
+                </a:solidFill>
+                <a:latin typeface="Calibri" pitchFamily="34" charset="0"/>
+                <a:ea typeface="Calibri" pitchFamily="34" charset="-122"/>
+                <a:cs typeface="Calibri" pitchFamily="34" charset="-120"/>
+              </a:rPr>
+              <a:t>Davide Maiorca</a:t>
+            </a:r>
+          </a:p>
+          <a:p>
+            <a:pPr>
               <a:spcAft>
                 <a:spcPts val="300"/>
               </a:spcAft>
-              <a:buNone/>
             </a:pPr>
             <a:r>
               <a:rPr lang="en-US" sz="1400" dirty="0">
@@ -2545,7 +2497,7 @@
                 <a:ea typeface="Calibri" pitchFamily="34" charset="-122"/>
                 <a:cs typeface="Calibri" pitchFamily="34" charset="-120"/>
               </a:rPr>
-              <a:t>Supervisor: </a:t>
+              <a:t>Co-Advisor: </a:t>
             </a:r>
             <a:r>
               <a:rPr lang="en-US" sz="1400" b="1" dirty="0">
@@ -2556,7 +2508,7 @@
                 <a:ea typeface="Calibri" pitchFamily="34" charset="-122"/>
                 <a:cs typeface="Calibri" pitchFamily="34" charset="-120"/>
               </a:rPr>
-              <a:t>Davide Maiorca</a:t>
+              <a:t>Silvia Lucia Sanna, Ph.D.				</a:t>
             </a:r>
             <a:endParaRPr lang="en-US" sz="1400" dirty="0"/>
           </a:p>
@@ -2584,14 +2536,151 @@
         </p:blipFill>
         <p:spPr>
           <a:xfrm>
-            <a:off x="3979446" y="276126"/>
-            <a:ext cx="1185107" cy="1185107"/>
+            <a:off x="4221850" y="276127"/>
+            <a:ext cx="700299" cy="700299"/>
           </a:xfrm>
           <a:prstGeom prst="rect">
             <a:avLst/>
           </a:prstGeom>
         </p:spPr>
       </p:pic>
+      <p:sp>
+        <p:nvSpPr>
+          <p:cNvPr id="4" name="Text 5">
+            <a:extLst>
+              <a:ext uri="{FF2B5EF4-FFF2-40B4-BE49-F238E27FC236}">
+                <a16:creationId xmlns:a16="http://schemas.microsoft.com/office/drawing/2014/main" id="{50912FC3-E37E-3D2A-AECE-B352DA4D51B7}"/>
+              </a:ext>
+            </a:extLst>
+          </p:cNvPr>
+          <p:cNvSpPr/>
+          <p:nvPr/>
+        </p:nvSpPr>
+        <p:spPr>
+          <a:xfrm>
+            <a:off x="708799" y="1274568"/>
+            <a:ext cx="7680960" cy="685800"/>
+          </a:xfrm>
+          <a:prstGeom prst="rect">
+            <a:avLst/>
+          </a:prstGeom>
+          <a:noFill/>
+          <a:ln/>
+        </p:spPr>
+        <p:txBody>
+          <a:bodyPr wrap="square" lIns="0" tIns="0" rIns="0" bIns="0" rtlCol="0" anchor="ctr"/>
+          <a:lstStyle/>
+          <a:p>
+            <a:pPr algn="ctr"/>
+            <a:r>
+              <a:rPr lang="it-IT" dirty="0">
+                <a:solidFill>
+                  <a:schemeClr val="bg1"/>
+                </a:solidFill>
+                <a:latin typeface="Cambria" panose="02040503050406030204" pitchFamily="18" charset="0"/>
+                <a:ea typeface="Cambria" panose="02040503050406030204" pitchFamily="18" charset="0"/>
+              </a:rPr>
+              <a:t>University of Cagliari</a:t>
+            </a:r>
+          </a:p>
+          <a:p>
+            <a:pPr algn="ctr"/>
+            <a:r>
+              <a:rPr lang="it-IT" sz="1600" b="1" dirty="0">
+                <a:solidFill>
+                  <a:schemeClr val="bg1"/>
+                </a:solidFill>
+                <a:latin typeface="Cambria" panose="02040503050406030204" pitchFamily="18" charset="0"/>
+                <a:ea typeface="Cambria" panose="02040503050406030204" pitchFamily="18" charset="0"/>
+              </a:rPr>
+              <a:t>Department of Engineering</a:t>
+            </a:r>
+          </a:p>
+          <a:p>
+            <a:pPr algn="ctr"/>
+            <a:endParaRPr lang="it-IT" sz="1600" b="1" dirty="0">
+              <a:solidFill>
+                <a:schemeClr val="bg1"/>
+              </a:solidFill>
+              <a:latin typeface="Cambria" panose="02040503050406030204" pitchFamily="18" charset="0"/>
+              <a:ea typeface="Cambria" panose="02040503050406030204" pitchFamily="18" charset="0"/>
+            </a:endParaRPr>
+          </a:p>
+          <a:p>
+            <a:pPr algn="ctr"/>
+            <a:r>
+              <a:rPr lang="en-US" dirty="0">
+                <a:solidFill>
+                  <a:schemeClr val="bg1"/>
+                </a:solidFill>
+                <a:latin typeface="Cambria" panose="02040503050406030204" pitchFamily="18" charset="0"/>
+                <a:ea typeface="Cambria" panose="02040503050406030204" pitchFamily="18" charset="0"/>
+              </a:rPr>
+              <a:t>Master’s </a:t>
+            </a:r>
+            <a:r>
+              <a:rPr lang="en-US" dirty="0">
+                <a:solidFill>
+                  <a:srgbClr val="FFFFFF"/>
+                </a:solidFill>
+                <a:latin typeface="Cambria" panose="02040503050406030204" pitchFamily="18" charset="0"/>
+                <a:ea typeface="Cambria" panose="02040503050406030204" pitchFamily="18" charset="0"/>
+              </a:rPr>
+              <a:t>Degree</a:t>
+            </a:r>
+            <a:r>
+              <a:rPr lang="en-US" dirty="0">
+                <a:solidFill>
+                  <a:schemeClr val="bg1"/>
+                </a:solidFill>
+                <a:latin typeface="Cambria" panose="02040503050406030204" pitchFamily="18" charset="0"/>
+                <a:ea typeface="Cambria" panose="02040503050406030204" pitchFamily="18" charset="0"/>
+              </a:rPr>
+              <a:t> in “Computer Engineering,</a:t>
+            </a:r>
+          </a:p>
+          <a:p>
+            <a:pPr algn="ctr"/>
+            <a:r>
+              <a:rPr lang="it-IT" dirty="0">
+                <a:solidFill>
+                  <a:schemeClr val="bg1"/>
+                </a:solidFill>
+                <a:latin typeface="Cambria" panose="02040503050406030204" pitchFamily="18" charset="0"/>
+                <a:ea typeface="Cambria" panose="02040503050406030204" pitchFamily="18" charset="0"/>
+              </a:rPr>
+              <a:t>Cybersecurity and </a:t>
+            </a:r>
+            <a:r>
+              <a:rPr lang="it-IT" dirty="0" err="1">
+                <a:solidFill>
+                  <a:schemeClr val="bg1"/>
+                </a:solidFill>
+                <a:latin typeface="Cambria" panose="02040503050406030204" pitchFamily="18" charset="0"/>
+                <a:ea typeface="Cambria" panose="02040503050406030204" pitchFamily="18" charset="0"/>
+              </a:rPr>
+              <a:t>Artificial</a:t>
+            </a:r>
+            <a:r>
+              <a:rPr lang="it-IT" dirty="0">
+                <a:solidFill>
+                  <a:schemeClr val="bg1"/>
+                </a:solidFill>
+                <a:latin typeface="Cambria" panose="02040503050406030204" pitchFamily="18" charset="0"/>
+                <a:ea typeface="Cambria" panose="02040503050406030204" pitchFamily="18" charset="0"/>
+              </a:rPr>
+              <a:t> Intelligence”</a:t>
+            </a:r>
+            <a:endParaRPr lang="en-US" dirty="0">
+              <a:solidFill>
+                <a:schemeClr val="bg1"/>
+              </a:solidFill>
+              <a:latin typeface="Cambria" panose="02040503050406030204" pitchFamily="18" charset="0"/>
+              <a:ea typeface="Cambria" panose="02040503050406030204" pitchFamily="18" charset="0"/>
+            </a:endParaRPr>
+          </a:p>
+        </p:txBody>
+      </p:sp>
     </p:spTree>
   </p:cSld>
   <p:clrMapOvr>
@@ -4162,7 +4251,7 @@
             </a:avLst>
           </a:prstGeom>
           <a:solidFill>
-            <a:srgbClr val="0A1F3D"/>
+            <a:schemeClr val="bg2"/>
           </a:solidFill>
           <a:ln/>
           <a:effectLst>
@@ -4234,9 +4323,6 @@
             </a:pPr>
             <a:r>
               <a:rPr lang="en-US" sz="930" b="1" dirty="0">
-                <a:solidFill>
-                  <a:srgbClr val="FFFFFF"/>
-                </a:solidFill>
                 <a:latin typeface="Calibri" pitchFamily="34" charset="0"/>
                 <a:ea typeface="Calibri" pitchFamily="34" charset="-122"/>
                 <a:cs typeface="Calibri" pitchFamily="34" charset="-120"/>
@@ -4254,9 +4340,6 @@
             </a:pPr>
             <a:r>
               <a:rPr lang="en-US" sz="930" b="1" dirty="0">
-                <a:solidFill>
-                  <a:srgbClr val="FFFFFF"/>
-                </a:solidFill>
                 <a:latin typeface="Calibri" pitchFamily="34" charset="0"/>
                 <a:ea typeface="Calibri" pitchFamily="34" charset="-122"/>
                 <a:cs typeface="Calibri" pitchFamily="34" charset="-120"/>
@@ -4974,8 +5057,80 @@
                 <a:ea typeface="Calibri" pitchFamily="34" charset="-122"/>
                 <a:cs typeface="Calibri" pitchFamily="34" charset="-120"/>
               </a:rPr>
-              <a:t>Cellebrite Inseyets</a:t>
-            </a:r>
+              <a:t>Cellebrite </a:t>
+            </a:r>
+            <a:r>
+              <a:rPr lang="en-US" sz="1200" dirty="0" err="1">
+                <a:solidFill>
+                  <a:srgbClr val="1C2B42"/>
+                </a:solidFill>
+                <a:latin typeface="Calibri" pitchFamily="34" charset="0"/>
+                <a:ea typeface="Calibri" pitchFamily="34" charset="-122"/>
+                <a:cs typeface="Calibri" pitchFamily="34" charset="-120"/>
+              </a:rPr>
+              <a:t>Inseyets</a:t>
+            </a:r>
+            <a:endParaRPr lang="en-US" sz="1200" dirty="0">
+              <a:solidFill>
+                <a:srgbClr val="1C2B42"/>
+              </a:solidFill>
+              <a:latin typeface="Calibri" pitchFamily="34" charset="0"/>
+              <a:ea typeface="Calibri" pitchFamily="34" charset="-122"/>
+              <a:cs typeface="Calibri" pitchFamily="34" charset="-120"/>
+            </a:endParaRPr>
+          </a:p>
+          <a:p>
+            <a:pPr marL="342900" indent="-342900">
+              <a:spcAft>
+                <a:spcPts val="600"/>
+              </a:spcAft>
+              <a:buSzPct val="100000"/>
+              <a:buFontTx/>
+              <a:buChar char="–"/>
+            </a:pPr>
+            <a:r>
+              <a:rPr lang="en-US" sz="1200" dirty="0">
+                <a:solidFill>
+                  <a:srgbClr val="1C2B42"/>
+                </a:solidFill>
+                <a:latin typeface="Calibri" pitchFamily="34" charset="0"/>
+                <a:ea typeface="Calibri" pitchFamily="34" charset="-122"/>
+                <a:cs typeface="Calibri" pitchFamily="34" charset="-120"/>
+              </a:rPr>
+              <a:t>Magnet </a:t>
+            </a:r>
+            <a:r>
+              <a:rPr lang="en-US" sz="1200" dirty="0" err="1">
+                <a:solidFill>
+                  <a:srgbClr val="1C2B42"/>
+                </a:solidFill>
+                <a:latin typeface="Calibri" pitchFamily="34" charset="0"/>
+                <a:ea typeface="Calibri" pitchFamily="34" charset="-122"/>
+                <a:cs typeface="Calibri" pitchFamily="34" charset="-120"/>
+              </a:rPr>
+              <a:t>Griffeye</a:t>
+            </a:r>
+            <a:r>
+              <a:rPr lang="en-US" sz="1200" dirty="0">
+                <a:solidFill>
+                  <a:srgbClr val="1C2B42"/>
+                </a:solidFill>
+                <a:latin typeface="Calibri" pitchFamily="34" charset="0"/>
+                <a:ea typeface="Calibri" pitchFamily="34" charset="-122"/>
+                <a:cs typeface="Calibri" pitchFamily="34" charset="-120"/>
+              </a:rPr>
+              <a:t> / T3K</a:t>
+            </a:r>
+            <a:endParaRPr lang="en-US" sz="1200" dirty="0"/>
+          </a:p>
+          <a:p>
+            <a:pPr marL="342900" indent="-342900">
+              <a:spcAft>
+                <a:spcPts val="600"/>
+              </a:spcAft>
+              <a:buSzPct val="100000"/>
+              <a:buChar char="–"/>
+            </a:pPr>
             <a:endParaRPr lang="en-US" sz="1200" dirty="0"/>
           </a:p>
         </p:txBody>
@@ -5943,6 +6098,349 @@
             </a:r>
             <a:endParaRPr lang="en-US" sz="1100" dirty="0"/>
           </a:p>
+        </p:txBody>
+      </p:sp>
+      <p:sp>
+        <p:nvSpPr>
+          <p:cNvPr id="23" name="Shape 17"/>
+          <p:cNvSpPr/>
+          <p:nvPr/>
+        </p:nvSpPr>
+        <p:spPr>
+          <a:xfrm>
+            <a:off x="502920" y="4434840"/>
+            <a:ext cx="146304" cy="146304"/>
+          </a:xfrm>
+          <a:prstGeom prst="ellipse">
+            <a:avLst/>
+          </a:prstGeom>
+          <a:solidFill>
+            <a:srgbClr val="3EA36B"/>
+          </a:solidFill>
+          <a:ln/>
+        </p:spPr>
+        <p:txBody>
+          <a:bodyPr/>
+          <a:lstStyle/>
+          <a:p>
+            <a:endParaRPr lang="it-IT"/>
+          </a:p>
+        </p:txBody>
+      </p:sp>
+      <p:sp>
+        <p:nvSpPr>
+          <p:cNvPr id="24" name="Text 18"/>
+          <p:cNvSpPr/>
+          <p:nvPr/>
+        </p:nvSpPr>
+        <p:spPr>
+          <a:xfrm>
+            <a:off x="704088" y="4389120"/>
+            <a:ext cx="822960" cy="256032"/>
+          </a:xfrm>
+          <a:prstGeom prst="rect">
+            <a:avLst/>
+          </a:prstGeom>
+          <a:noFill/>
+          <a:ln/>
+        </p:spPr>
+        <p:txBody>
+          <a:bodyPr wrap="square" lIns="0" tIns="0" rIns="0" bIns="0" rtlCol="0" anchor="ctr"/>
+          <a:lstStyle/>
+          <a:p>
+            <a:pPr marL="0" indent="0">
+              <a:buNone/>
+            </a:pPr>
+            <a:r>
+              <a:rPr lang="en-US" sz="1050" dirty="0">
+                <a:solidFill>
+                  <a:srgbClr val="5C6B83"/>
+                </a:solidFill>
+                <a:latin typeface="Calibri" pitchFamily="34" charset="0"/>
+                <a:ea typeface="Calibri" pitchFamily="34" charset="-122"/>
+                <a:cs typeface="Calibri" pitchFamily="34" charset="-120"/>
+              </a:rPr>
+              <a:t>Low</a:t>
+            </a:r>
+            <a:endParaRPr lang="en-US" sz="1050" dirty="0"/>
+          </a:p>
+        </p:txBody>
+      </p:sp>
+      <p:sp>
+        <p:nvSpPr>
+          <p:cNvPr id="25" name="Shape 19"/>
+          <p:cNvSpPr/>
+          <p:nvPr/>
+        </p:nvSpPr>
+        <p:spPr>
+          <a:xfrm>
+            <a:off x="1554480" y="4434840"/>
+            <a:ext cx="146304" cy="146304"/>
+          </a:xfrm>
+          <a:prstGeom prst="ellipse">
+            <a:avLst/>
+          </a:prstGeom>
+          <a:solidFill>
+            <a:srgbClr val="E2692C"/>
+          </a:solidFill>
+          <a:ln/>
+        </p:spPr>
+        <p:txBody>
+          <a:bodyPr/>
+          <a:lstStyle/>
+          <a:p>
+            <a:endParaRPr lang="it-IT"/>
+          </a:p>
+        </p:txBody>
+      </p:sp>
+      <p:sp>
+        <p:nvSpPr>
+          <p:cNvPr id="26" name="Text 20"/>
+          <p:cNvSpPr/>
+          <p:nvPr/>
+        </p:nvSpPr>
+        <p:spPr>
+          <a:xfrm>
+            <a:off x="1755648" y="4389120"/>
+            <a:ext cx="822960" cy="256032"/>
+          </a:xfrm>
+          <a:prstGeom prst="rect">
+            <a:avLst/>
+          </a:prstGeom>
+          <a:noFill/>
+          <a:ln/>
+        </p:spPr>
+        <p:txBody>
+          <a:bodyPr wrap="square" lIns="0" tIns="0" rIns="0" bIns="0" rtlCol="0" anchor="ctr"/>
+          <a:lstStyle/>
+          <a:p>
+            <a:pPr marL="0" indent="0">
+              <a:buNone/>
+            </a:pPr>
+            <a:r>
+              <a:rPr lang="en-US" sz="1050" dirty="0">
+                <a:solidFill>
+                  <a:srgbClr val="5C6B83"/>
+                </a:solidFill>
+                <a:latin typeface="Calibri" pitchFamily="34" charset="0"/>
+                <a:ea typeface="Calibri" pitchFamily="34" charset="-122"/>
+                <a:cs typeface="Calibri" pitchFamily="34" charset="-120"/>
+              </a:rPr>
+              <a:t>Moderate</a:t>
+            </a:r>
+            <a:endParaRPr lang="en-US" sz="1050" dirty="0"/>
+          </a:p>
+        </p:txBody>
+      </p:sp>
+      <p:sp>
+        <p:nvSpPr>
+          <p:cNvPr id="27" name="Shape 21"/>
+          <p:cNvSpPr/>
+          <p:nvPr/>
+        </p:nvSpPr>
+        <p:spPr>
+          <a:xfrm>
+            <a:off x="2606040" y="4434840"/>
+            <a:ext cx="146304" cy="146304"/>
+          </a:xfrm>
+          <a:prstGeom prst="ellipse">
+            <a:avLst/>
+          </a:prstGeom>
+          <a:solidFill>
+            <a:srgbClr val="C0392B"/>
+          </a:solidFill>
+          <a:ln/>
+        </p:spPr>
+        <p:txBody>
+          <a:bodyPr/>
+          <a:lstStyle/>
+          <a:p>
+            <a:endParaRPr lang="it-IT"/>
+          </a:p>
+        </p:txBody>
+      </p:sp>
+      <p:sp>
+        <p:nvSpPr>
+          <p:cNvPr id="28" name="Text 22"/>
+          <p:cNvSpPr/>
+          <p:nvPr/>
+        </p:nvSpPr>
+        <p:spPr>
+          <a:xfrm>
+            <a:off x="2807208" y="4389120"/>
+            <a:ext cx="822960" cy="256032"/>
+          </a:xfrm>
+          <a:prstGeom prst="rect">
+            <a:avLst/>
+          </a:prstGeom>
+          <a:noFill/>
+          <a:ln/>
+        </p:spPr>
+        <p:txBody>
+          <a:bodyPr wrap="square" lIns="0" tIns="0" rIns="0" bIns="0" rtlCol="0" anchor="ctr"/>
+          <a:lstStyle/>
+          <a:p>
+            <a:pPr marL="0" indent="0">
+              <a:buNone/>
+            </a:pPr>
+            <a:r>
+              <a:rPr lang="en-US" sz="1050" dirty="0">
+                <a:solidFill>
+                  <a:srgbClr val="5C6B83"/>
+                </a:solidFill>
+                <a:latin typeface="Calibri" pitchFamily="34" charset="0"/>
+                <a:ea typeface="Calibri" pitchFamily="34" charset="-122"/>
+                <a:cs typeface="Calibri" pitchFamily="34" charset="-120"/>
+              </a:rPr>
+              <a:t>High</a:t>
+            </a:r>
+            <a:endParaRPr lang="en-US" sz="1050" dirty="0"/>
+          </a:p>
+        </p:txBody>
+      </p:sp>
+      <p:sp>
+        <p:nvSpPr>
+          <p:cNvPr id="29" name="Text 23"/>
+          <p:cNvSpPr/>
+          <p:nvPr/>
+        </p:nvSpPr>
+        <p:spPr>
+          <a:xfrm>
+            <a:off x="3657600" y="4389120"/>
+            <a:ext cx="5029200" cy="256032"/>
+          </a:xfrm>
+          <a:prstGeom prst="rect">
+            <a:avLst/>
+          </a:prstGeom>
+          <a:noFill/>
+          <a:ln/>
+        </p:spPr>
+        <p:txBody>
+          <a:bodyPr wrap="square" lIns="0" tIns="0" rIns="0" bIns="0" rtlCol="0" anchor="ctr"/>
+          <a:lstStyle/>
+          <a:p>
+            <a:pPr marL="0" indent="0">
+              <a:buNone/>
+            </a:pPr>
+            <a:r>
+              <a:rPr lang="en-US" sz="1000" i="1" dirty="0">
+                <a:solidFill>
+                  <a:srgbClr val="5C6B83"/>
+                </a:solidFill>
+                <a:latin typeface="Calibri" pitchFamily="34" charset="0"/>
+                <a:ea typeface="Calibri" pitchFamily="34" charset="-122"/>
+                <a:cs typeface="Calibri" pitchFamily="34" charset="-120"/>
+              </a:rPr>
+              <a:t>risk-level legend, applied per system in the full thesis report</a:t>
+            </a:r>
+            <a:endParaRPr lang="en-US" sz="1000" dirty="0"/>
+          </a:p>
+        </p:txBody>
+      </p:sp>
+      <p:sp>
+        <p:nvSpPr>
+          <p:cNvPr id="30" name="Text 24"/>
+          <p:cNvSpPr/>
+          <p:nvPr/>
+        </p:nvSpPr>
+        <p:spPr>
+          <a:xfrm>
+            <a:off x="502920" y="4864608"/>
+            <a:ext cx="5486400" cy="228600"/>
+          </a:xfrm>
+          <a:prstGeom prst="rect">
+            <a:avLst/>
+          </a:prstGeom>
+          <a:noFill/>
+          <a:ln/>
+        </p:spPr>
+        <p:txBody>
+          <a:bodyPr wrap="square" lIns="0" tIns="0" rIns="0" bIns="0" rtlCol="0" anchor="ctr"/>
+          <a:lstStyle/>
+          <a:p>
+            <a:pPr marL="0" indent="0">
+              <a:buNone/>
+            </a:pPr>
+            <a:r>
+              <a:rPr lang="en-US" sz="900" dirty="0">
+                <a:solidFill>
+                  <a:srgbClr val="5C6B83"/>
+                </a:solidFill>
+                <a:latin typeface="Calibri" pitchFamily="34" charset="0"/>
+                <a:ea typeface="Calibri" pitchFamily="34" charset="-122"/>
+                <a:cs typeface="Calibri" pitchFamily="34" charset="-120"/>
+              </a:rPr>
+              <a:t>Robustness of AI-Based Forensic Tools  |  Lello Molinario</a:t>
+            </a:r>
+            <a:endParaRPr lang="en-US" sz="900" dirty="0"/>
+          </a:p>
+        </p:txBody>
+      </p:sp>
+      <p:sp>
+        <p:nvSpPr>
+          <p:cNvPr id="31" name="Text 25"/>
+          <p:cNvSpPr/>
+          <p:nvPr/>
+        </p:nvSpPr>
+        <p:spPr>
+          <a:xfrm>
+            <a:off x="8732520" y="4864608"/>
+            <a:ext cx="365760" cy="228600"/>
+          </a:xfrm>
+          <a:prstGeom prst="rect">
+            <a:avLst/>
+          </a:prstGeom>
+          <a:noFill/>
+          <a:ln/>
+        </p:spPr>
+        <p:txBody>
+          <a:bodyPr wrap="square" lIns="0" tIns="0" rIns="0" bIns="0" rtlCol="0" anchor="ctr"/>
+          <a:lstStyle/>
+          <a:p>
+            <a:pPr marL="0" indent="0" algn="r">
+              <a:buNone/>
+            </a:pPr>
+            <a:r>
+              <a:rPr lang="en-US" sz="900" dirty="0">
+                <a:solidFill>
+                  <a:srgbClr val="5C6B83"/>
+                </a:solidFill>
+                <a:latin typeface="Calibri" pitchFamily="34" charset="0"/>
+                <a:ea typeface="Calibri" pitchFamily="34" charset="-122"/>
+                <a:cs typeface="Calibri" pitchFamily="34" charset="-120"/>
+              </a:rPr>
+              <a:t>12</a:t>
+            </a:r>
+            <a:endParaRPr lang="en-US" sz="900" dirty="0"/>
+          </a:p>
+        </p:txBody>
+      </p:sp>
+      <p:sp>
+        <p:nvSpPr>
+          <p:cNvPr id="32" name="Text 16">
+            <a:extLst>
+              <a:ext uri="{FF2B5EF4-FFF2-40B4-BE49-F238E27FC236}">
+                <a16:creationId xmlns:a16="http://schemas.microsoft.com/office/drawing/2014/main" id="{3BB41C90-F290-8C83-BF95-CC4214D1950C}"/>
+              </a:ext>
+            </a:extLst>
+          </p:cNvPr>
+          <p:cNvSpPr/>
+          <p:nvPr/>
+        </p:nvSpPr>
+        <p:spPr>
+          <a:xfrm>
+            <a:off x="3822192" y="3474720"/>
+            <a:ext cx="4636008" cy="731520"/>
+          </a:xfrm>
+          <a:prstGeom prst="rect">
+            <a:avLst/>
+          </a:prstGeom>
+          <a:noFill/>
+          <a:ln/>
+        </p:spPr>
+        <p:txBody>
+          <a:bodyPr wrap="square" rtlCol="0" anchor="t"/>
+          <a:lstStyle/>
           <a:p>
             <a:pPr marL="342900" indent="-342900">
               <a:spcAft>
@@ -5984,321 +6482,6 @@
               <a:t>Performance degradation under perturbation</a:t>
             </a:r>
             <a:endParaRPr lang="en-US" sz="1100" dirty="0"/>
-          </a:p>
-        </p:txBody>
-      </p:sp>
-      <p:sp>
-        <p:nvSpPr>
-          <p:cNvPr id="23" name="Shape 17"/>
-          <p:cNvSpPr/>
-          <p:nvPr/>
-        </p:nvSpPr>
-        <p:spPr>
-          <a:xfrm>
-            <a:off x="502920" y="4434840"/>
-            <a:ext cx="146304" cy="146304"/>
-          </a:xfrm>
-          <a:prstGeom prst="ellipse">
-            <a:avLst/>
-          </a:prstGeom>
-          <a:solidFill>
-            <a:srgbClr val="3EA36B"/>
-          </a:solidFill>
-          <a:ln/>
-        </p:spPr>
-        <p:txBody>
-          <a:bodyPr/>
-          <a:lstStyle/>
-          <a:p>
-            <a:endParaRPr lang="it-IT"/>
-          </a:p>
-        </p:txBody>
-      </p:sp>
-      <p:sp>
-        <p:nvSpPr>
-          <p:cNvPr id="24" name="Text 18"/>
-          <p:cNvSpPr/>
-          <p:nvPr/>
-        </p:nvSpPr>
-        <p:spPr>
-          <a:xfrm>
-            <a:off x="704088" y="4389120"/>
-            <a:ext cx="822960" cy="256032"/>
-          </a:xfrm>
-          <a:prstGeom prst="rect">
-            <a:avLst/>
-          </a:prstGeom>
-          <a:noFill/>
-          <a:ln/>
-        </p:spPr>
-        <p:txBody>
-          <a:bodyPr wrap="square" lIns="0" tIns="0" rIns="0" bIns="0" rtlCol="0" anchor="ctr"/>
-          <a:lstStyle/>
-          <a:p>
-            <a:pPr marL="0" indent="0">
-              <a:buNone/>
-            </a:pPr>
-            <a:r>
-              <a:rPr lang="en-US" sz="1050" dirty="0">
-                <a:solidFill>
-                  <a:srgbClr val="5C6B83"/>
-                </a:solidFill>
-                <a:latin typeface="Calibri" pitchFamily="34" charset="0"/>
-                <a:ea typeface="Calibri" pitchFamily="34" charset="-122"/>
-                <a:cs typeface="Calibri" pitchFamily="34" charset="-120"/>
-              </a:rPr>
-              <a:t>Low</a:t>
-            </a:r>
-            <a:endParaRPr lang="en-US" sz="1050" dirty="0"/>
-          </a:p>
-        </p:txBody>
-      </p:sp>
-      <p:sp>
-        <p:nvSpPr>
-          <p:cNvPr id="25" name="Shape 19"/>
-          <p:cNvSpPr/>
-          <p:nvPr/>
-        </p:nvSpPr>
-        <p:spPr>
-          <a:xfrm>
-            <a:off x="1554480" y="4434840"/>
-            <a:ext cx="146304" cy="146304"/>
-          </a:xfrm>
-          <a:prstGeom prst="ellipse">
-            <a:avLst/>
-          </a:prstGeom>
-          <a:solidFill>
-            <a:srgbClr val="E2692C"/>
-          </a:solidFill>
-          <a:ln/>
-        </p:spPr>
-        <p:txBody>
-          <a:bodyPr/>
-          <a:lstStyle/>
-          <a:p>
-            <a:endParaRPr lang="it-IT"/>
-          </a:p>
-        </p:txBody>
-      </p:sp>
-      <p:sp>
-        <p:nvSpPr>
-          <p:cNvPr id="26" name="Text 20"/>
-          <p:cNvSpPr/>
-          <p:nvPr/>
-        </p:nvSpPr>
-        <p:spPr>
-          <a:xfrm>
-            <a:off x="1755648" y="4389120"/>
-            <a:ext cx="822960" cy="256032"/>
-          </a:xfrm>
-          <a:prstGeom prst="rect">
-            <a:avLst/>
-          </a:prstGeom>
-          <a:noFill/>
-          <a:ln/>
-        </p:spPr>
-        <p:txBody>
-          <a:bodyPr wrap="square" lIns="0" tIns="0" rIns="0" bIns="0" rtlCol="0" anchor="ctr"/>
-          <a:lstStyle/>
-          <a:p>
-            <a:pPr marL="0" indent="0">
-              <a:buNone/>
-            </a:pPr>
-            <a:r>
-              <a:rPr lang="en-US" sz="1050" dirty="0">
-                <a:solidFill>
-                  <a:srgbClr val="5C6B83"/>
-                </a:solidFill>
-                <a:latin typeface="Calibri" pitchFamily="34" charset="0"/>
-                <a:ea typeface="Calibri" pitchFamily="34" charset="-122"/>
-                <a:cs typeface="Calibri" pitchFamily="34" charset="-120"/>
-              </a:rPr>
-              <a:t>Moderate</a:t>
-            </a:r>
-            <a:endParaRPr lang="en-US" sz="1050" dirty="0"/>
-          </a:p>
-        </p:txBody>
-      </p:sp>
-      <p:sp>
-        <p:nvSpPr>
-          <p:cNvPr id="27" name="Shape 21"/>
-          <p:cNvSpPr/>
-          <p:nvPr/>
-        </p:nvSpPr>
-        <p:spPr>
-          <a:xfrm>
-            <a:off x="2606040" y="4434840"/>
-            <a:ext cx="146304" cy="146304"/>
-          </a:xfrm>
-          <a:prstGeom prst="ellipse">
-            <a:avLst/>
-          </a:prstGeom>
-          <a:solidFill>
-            <a:srgbClr val="C0392B"/>
-          </a:solidFill>
-          <a:ln/>
-        </p:spPr>
-        <p:txBody>
-          <a:bodyPr/>
-          <a:lstStyle/>
-          <a:p>
-            <a:endParaRPr lang="it-IT"/>
-          </a:p>
-        </p:txBody>
-      </p:sp>
-      <p:sp>
-        <p:nvSpPr>
-          <p:cNvPr id="28" name="Text 22"/>
-          <p:cNvSpPr/>
-          <p:nvPr/>
-        </p:nvSpPr>
-        <p:spPr>
-          <a:xfrm>
-            <a:off x="2807208" y="4389120"/>
-            <a:ext cx="822960" cy="256032"/>
-          </a:xfrm>
-          <a:prstGeom prst="rect">
-            <a:avLst/>
-          </a:prstGeom>
-          <a:noFill/>
-          <a:ln/>
-        </p:spPr>
-        <p:txBody>
-          <a:bodyPr wrap="square" lIns="0" tIns="0" rIns="0" bIns="0" rtlCol="0" anchor="ctr"/>
-          <a:lstStyle/>
-          <a:p>
-            <a:pPr marL="0" indent="0">
-              <a:buNone/>
-            </a:pPr>
-            <a:r>
-              <a:rPr lang="en-US" sz="1050" dirty="0">
-                <a:solidFill>
-                  <a:srgbClr val="5C6B83"/>
-                </a:solidFill>
-                <a:latin typeface="Calibri" pitchFamily="34" charset="0"/>
-                <a:ea typeface="Calibri" pitchFamily="34" charset="-122"/>
-                <a:cs typeface="Calibri" pitchFamily="34" charset="-120"/>
-              </a:rPr>
-              <a:t>High</a:t>
-            </a:r>
-            <a:endParaRPr lang="en-US" sz="1050" dirty="0"/>
-          </a:p>
-        </p:txBody>
-      </p:sp>
-      <p:sp>
-        <p:nvSpPr>
-          <p:cNvPr id="29" name="Text 23"/>
-          <p:cNvSpPr/>
-          <p:nvPr/>
-        </p:nvSpPr>
-        <p:spPr>
-          <a:xfrm>
-            <a:off x="3657600" y="4389120"/>
-            <a:ext cx="5029200" cy="256032"/>
-          </a:xfrm>
-          <a:prstGeom prst="rect">
-            <a:avLst/>
-          </a:prstGeom>
-          <a:noFill/>
-          <a:ln/>
-        </p:spPr>
-        <p:txBody>
-          <a:bodyPr wrap="square" lIns="0" tIns="0" rIns="0" bIns="0" rtlCol="0" anchor="ctr"/>
-          <a:lstStyle/>
-          <a:p>
-            <a:pPr marL="0" indent="0">
-              <a:buNone/>
-            </a:pPr>
-            <a:r>
-              <a:rPr lang="en-US" sz="1000" i="1" dirty="0">
-                <a:solidFill>
-                  <a:srgbClr val="5C6B83"/>
-                </a:solidFill>
-                <a:latin typeface="Calibri" pitchFamily="34" charset="0"/>
-                <a:ea typeface="Calibri" pitchFamily="34" charset="-122"/>
-                <a:cs typeface="Calibri" pitchFamily="34" charset="-120"/>
-              </a:rPr>
-              <a:t>risk-level legend, applied per system in the full thesis report</a:t>
-            </a:r>
-            <a:endParaRPr lang="en-US" sz="1000" dirty="0"/>
-          </a:p>
-        </p:txBody>
-      </p:sp>
-      <p:sp>
-        <p:nvSpPr>
-          <p:cNvPr id="30" name="Text 24"/>
-          <p:cNvSpPr/>
-          <p:nvPr/>
-        </p:nvSpPr>
-        <p:spPr>
-          <a:xfrm>
-            <a:off x="502920" y="4864608"/>
-            <a:ext cx="5486400" cy="228600"/>
-          </a:xfrm>
-          <a:prstGeom prst="rect">
-            <a:avLst/>
-          </a:prstGeom>
-          <a:noFill/>
-          <a:ln/>
-        </p:spPr>
-        <p:txBody>
-          <a:bodyPr wrap="square" lIns="0" tIns="0" rIns="0" bIns="0" rtlCol="0" anchor="ctr"/>
-          <a:lstStyle/>
-          <a:p>
-            <a:pPr marL="0" indent="0">
-              <a:buNone/>
-            </a:pPr>
-            <a:r>
-              <a:rPr lang="en-US" sz="900" dirty="0">
-                <a:solidFill>
-                  <a:srgbClr val="5C6B83"/>
-                </a:solidFill>
-                <a:latin typeface="Calibri" pitchFamily="34" charset="0"/>
-                <a:ea typeface="Calibri" pitchFamily="34" charset="-122"/>
-                <a:cs typeface="Calibri" pitchFamily="34" charset="-120"/>
-              </a:rPr>
-              <a:t>Robustness of AI-Based Forensic Tools  |  Lello Molinario</a:t>
-            </a:r>
-            <a:endParaRPr lang="en-US" sz="900" dirty="0"/>
-          </a:p>
-        </p:txBody>
-      </p:sp>
-      <p:sp>
-        <p:nvSpPr>
-          <p:cNvPr id="31" name="Text 25"/>
-          <p:cNvSpPr/>
-          <p:nvPr/>
-        </p:nvSpPr>
-        <p:spPr>
-          <a:xfrm>
-            <a:off x="8732520" y="4864608"/>
-            <a:ext cx="365760" cy="228600"/>
-          </a:xfrm>
-          <a:prstGeom prst="rect">
-            <a:avLst/>
-          </a:prstGeom>
-          <a:noFill/>
-          <a:ln/>
-        </p:spPr>
-        <p:txBody>
-          <a:bodyPr wrap="square" lIns="0" tIns="0" rIns="0" bIns="0" rtlCol="0" anchor="ctr"/>
-          <a:lstStyle/>
-          <a:p>
-            <a:pPr marL="0" indent="0" algn="r">
-              <a:buNone/>
-            </a:pPr>
-            <a:r>
-              <a:rPr lang="en-US" sz="900" dirty="0">
-                <a:solidFill>
-                  <a:srgbClr val="5C6B83"/>
-                </a:solidFill>
-                <a:latin typeface="Calibri" pitchFamily="34" charset="0"/>
-                <a:ea typeface="Calibri" pitchFamily="34" charset="-122"/>
-                <a:cs typeface="Calibri" pitchFamily="34" charset="-120"/>
-              </a:rPr>
-              <a:t>12</a:t>
-            </a:r>
-            <a:endParaRPr lang="en-US" sz="900" dirty="0"/>
           </a:p>
         </p:txBody>
       </p:sp>
@@ -7601,7 +7784,7 @@
             <a:avLst/>
           </a:prstGeom>
           <a:solidFill>
-            <a:srgbClr val="0A1F3D"/>
+            <a:schemeClr val="bg2"/>
           </a:solidFill>
           <a:ln/>
         </p:spPr>
@@ -8618,7 +8801,7 @@
         </p:nvGraphicFramePr>
         <p:xfrm>
           <a:off x="502920" y="1325880"/>
-          <a:ext cx="8138160" cy="914400"/>
+          <a:ext cx="8138160" cy="1714500"/>
         </p:xfrm>
         <a:graphic>
           <a:graphicData uri="http://schemas.openxmlformats.org/drawingml/2006/table">
@@ -10828,7 +11011,7 @@
           <a:bodyPr wrap="square" rtlCol="0" anchor="t"/>
           <a:lstStyle/>
           <a:p>
-            <a:pPr marL="342900" indent="-342900">
+            <a:pPr marL="342900" indent="-342900" algn="just">
               <a:spcAft>
                 <a:spcPts val="1000"/>
               </a:spcAft>
@@ -10849,7 +11032,7 @@
             <a:endParaRPr lang="en-US" sz="1450" dirty="0"/>
           </a:p>
           <a:p>
-            <a:pPr marL="342900" indent="-342900">
+            <a:pPr marL="342900" indent="-342900" algn="just">
               <a:spcAft>
                 <a:spcPts val="1000"/>
               </a:spcAft>
@@ -10870,7 +11053,7 @@
             <a:endParaRPr lang="en-US" sz="1450" dirty="0"/>
           </a:p>
           <a:p>
-            <a:pPr marL="342900" indent="-342900">
+            <a:pPr marL="342900" indent="-342900" algn="just">
               <a:spcAft>
                 <a:spcPts val="1000"/>
               </a:spcAft>
@@ -10891,7 +11074,7 @@
             <a:endParaRPr lang="en-US" sz="1450" dirty="0"/>
           </a:p>
           <a:p>
-            <a:pPr marL="342900" indent="-342900">
+            <a:pPr marL="342900" indent="-342900" algn="just">
               <a:spcAft>
                 <a:spcPts val="1000"/>
               </a:spcAft>
@@ -10999,7 +11182,7 @@
           <a:bodyPr wrap="square" lIns="0" tIns="0" rIns="0" bIns="0" rtlCol="0" anchor="ctr"/>
           <a:lstStyle/>
           <a:p>
-            <a:pPr marL="0" indent="0">
+            <a:pPr marL="0" indent="0" algn="just">
               <a:buNone/>
             </a:pPr>
             <a:r>
@@ -11025,7 +11208,7 @@
         </p:nvSpPr>
         <p:spPr>
           <a:xfrm>
-            <a:off x="4892040" y="1737360"/>
+            <a:off x="4837176" y="1155954"/>
             <a:ext cx="1417320" cy="960120"/>
           </a:xfrm>
           <a:prstGeom prst="roundRect">
@@ -11074,7 +11257,7 @@
         </p:blipFill>
         <p:spPr>
           <a:xfrm>
-            <a:off x="5381244" y="1865376"/>
+            <a:off x="5257800" y="1273683"/>
             <a:ext cx="438912" cy="438912"/>
           </a:xfrm>
           <a:prstGeom prst="rect">
@@ -11090,7 +11273,7 @@
         </p:nvSpPr>
         <p:spPr>
           <a:xfrm>
-            <a:off x="4892040" y="2304288"/>
+            <a:off x="4796028" y="1679643"/>
             <a:ext cx="1417320" cy="365760"/>
           </a:xfrm>
           <a:prstGeom prst="rect">
@@ -11146,7 +11329,7 @@
         </p:nvSpPr>
         <p:spPr>
           <a:xfrm>
-            <a:off x="6812280" y="1737360"/>
+            <a:off x="6142482" y="2189988"/>
             <a:ext cx="1417320" cy="960120"/>
           </a:xfrm>
           <a:prstGeom prst="roundRect">
@@ -11195,7 +11378,7 @@
         </p:blipFill>
         <p:spPr>
           <a:xfrm>
-            <a:off x="7301484" y="1865376"/>
+            <a:off x="6603492" y="2331720"/>
             <a:ext cx="438912" cy="438912"/>
           </a:xfrm>
           <a:prstGeom prst="rect">
@@ -11211,7 +11394,7 @@
         </p:nvSpPr>
         <p:spPr>
           <a:xfrm>
-            <a:off x="6812280" y="2304288"/>
+            <a:off x="6114288" y="2713580"/>
             <a:ext cx="1417320" cy="365760"/>
           </a:xfrm>
           <a:prstGeom prst="rect">
@@ -11267,7 +11450,7 @@
         </p:nvSpPr>
         <p:spPr>
           <a:xfrm>
-            <a:off x="8732520" y="1737360"/>
+            <a:off x="7592568" y="3174492"/>
             <a:ext cx="1417320" cy="960120"/>
           </a:xfrm>
           <a:prstGeom prst="roundRect">
@@ -11316,7 +11499,7 @@
         </p:blipFill>
         <p:spPr>
           <a:xfrm>
-            <a:off x="9221724" y="1865376"/>
+            <a:off x="8107680" y="3258840"/>
             <a:ext cx="438912" cy="438912"/>
           </a:xfrm>
           <a:prstGeom prst="rect">
@@ -11332,7 +11515,7 @@
         </p:nvSpPr>
         <p:spPr>
           <a:xfrm>
-            <a:off x="8732520" y="2304288"/>
+            <a:off x="7618476" y="3697752"/>
             <a:ext cx="1417320" cy="365760"/>
           </a:xfrm>
           <a:prstGeom prst="rect">
@@ -11387,8 +11570,8 @@
           <p:nvPr/>
         </p:nvSpPr>
         <p:spPr>
-          <a:xfrm>
-            <a:off x="6364224" y="2135124"/>
+          <a:xfrm rot="1449472">
+            <a:off x="5556202" y="2263238"/>
             <a:ext cx="393192" cy="164592"/>
           </a:xfrm>
           <a:prstGeom prst="rightArrow">
@@ -11409,40 +11592,13 @@
       </p:sp>
       <p:sp>
         <p:nvSpPr>
-          <p:cNvPr id="18" name="Shape 12"/>
-          <p:cNvSpPr/>
-          <p:nvPr/>
-        </p:nvSpPr>
-        <p:spPr>
-          <a:xfrm>
-            <a:off x="8284464" y="2135124"/>
-            <a:ext cx="393192" cy="164592"/>
-          </a:xfrm>
-          <a:prstGeom prst="rightArrow">
-            <a:avLst/>
-          </a:prstGeom>
-          <a:solidFill>
-            <a:srgbClr val="C6D2E3"/>
-          </a:solidFill>
-          <a:ln/>
-        </p:spPr>
-        <p:txBody>
-          <a:bodyPr/>
-          <a:lstStyle/>
-          <a:p>
-            <a:endParaRPr lang="it-IT"/>
-          </a:p>
-        </p:txBody>
-      </p:sp>
-      <p:sp>
-        <p:nvSpPr>
           <p:cNvPr id="19" name="Shape 13"/>
           <p:cNvSpPr/>
           <p:nvPr/>
         </p:nvSpPr>
         <p:spPr>
           <a:xfrm>
-            <a:off x="8028432" y="1536192"/>
+            <a:off x="7046976" y="2174748"/>
             <a:ext cx="402336" cy="402336"/>
           </a:xfrm>
           <a:prstGeom prst="ellipse">
@@ -11482,7 +11638,7 @@
         </p:blipFill>
         <p:spPr>
           <a:xfrm>
-            <a:off x="8110728" y="1618488"/>
+            <a:off x="7129272" y="2257044"/>
             <a:ext cx="237744" cy="237744"/>
           </a:xfrm>
           <a:prstGeom prst="rect">
@@ -11498,7 +11654,7 @@
         </p:nvSpPr>
         <p:spPr>
           <a:xfrm>
-            <a:off x="4892040" y="2953512"/>
+            <a:off x="4194048" y="4327691"/>
             <a:ext cx="5257800" cy="274320"/>
           </a:xfrm>
           <a:prstGeom prst="rect">
@@ -11604,6 +11760,39 @@
               <a:t>2</a:t>
             </a:r>
             <a:endParaRPr lang="en-US" sz="900" dirty="0"/>
+          </a:p>
+        </p:txBody>
+      </p:sp>
+      <p:sp>
+        <p:nvSpPr>
+          <p:cNvPr id="24" name="Shape 11">
+            <a:extLst>
+              <a:ext uri="{FF2B5EF4-FFF2-40B4-BE49-F238E27FC236}">
+                <a16:creationId xmlns:a16="http://schemas.microsoft.com/office/drawing/2014/main" id="{DF16A4A4-6887-00E7-06B2-3A6C0F896221}"/>
+              </a:ext>
+            </a:extLst>
+          </p:cNvPr>
+          <p:cNvSpPr/>
+          <p:nvPr/>
+        </p:nvSpPr>
+        <p:spPr>
+          <a:xfrm rot="1449472">
+            <a:off x="6867603" y="3277556"/>
+            <a:ext cx="393192" cy="164592"/>
+          </a:xfrm>
+          <a:prstGeom prst="rightArrow">
+            <a:avLst/>
+          </a:prstGeom>
+          <a:solidFill>
+            <a:srgbClr val="C6D2E3"/>
+          </a:solidFill>
+          <a:ln/>
+        </p:spPr>
+        <p:txBody>
+          <a:bodyPr/>
+          <a:lstStyle/>
+          <a:p>
+            <a:endParaRPr lang="it-IT"/>
           </a:p>
         </p:txBody>
       </p:sp>
@@ -12677,7 +12866,7 @@
             <a:avLst/>
           </a:prstGeom>
           <a:solidFill>
-            <a:srgbClr val="0A1F3D"/>
+            <a:schemeClr val="bg2"/>
           </a:solidFill>
           <a:ln/>
         </p:spPr>
@@ -12825,7 +13014,7 @@
             <a:avLst/>
           </a:prstGeom>
           <a:solidFill>
-            <a:srgbClr val="0A1F3D"/>
+            <a:schemeClr val="bg2"/>
           </a:solidFill>
           <a:ln/>
         </p:spPr>
@@ -12973,7 +13162,7 @@
             <a:avLst/>
           </a:prstGeom>
           <a:solidFill>
-            <a:srgbClr val="0A1F3D"/>
+            <a:schemeClr val="bg2"/>
           </a:solidFill>
           <a:ln/>
         </p:spPr>
@@ -13121,7 +13310,7 @@
             <a:avLst/>
           </a:prstGeom>
           <a:solidFill>
-            <a:srgbClr val="0A1F3D"/>
+            <a:schemeClr val="bg2"/>
           </a:solidFill>
           <a:ln/>
         </p:spPr>
@@ -13269,7 +13458,7 @@
             <a:avLst/>
           </a:prstGeom>
           <a:solidFill>
-            <a:srgbClr val="0A1F3D"/>
+            <a:schemeClr val="bg2"/>
           </a:solidFill>
           <a:ln/>
         </p:spPr>
@@ -14095,6 +14284,49 @@
               </a:rPr>
               <a:t>Cellebrite Inseyets 10.9 / Physical Analyzer 10.9.0.3029 export</a:t>
             </a:r>
+          </a:p>
+          <a:p>
+            <a:pPr marL="342900" indent="-342900">
+              <a:spcAft>
+                <a:spcPts val="800"/>
+              </a:spcAft>
+              <a:buSzPct val="100000"/>
+              <a:buFontTx/>
+              <a:buChar char="–"/>
+            </a:pPr>
+            <a:r>
+              <a:rPr lang="en-US" sz="1250" dirty="0">
+                <a:solidFill>
+                  <a:srgbClr val="1C2B42"/>
+                </a:solidFill>
+                <a:latin typeface="Calibri" pitchFamily="34" charset="0"/>
+                <a:ea typeface="Calibri" pitchFamily="34" charset="-122"/>
+                <a:cs typeface="Calibri" pitchFamily="34" charset="-120"/>
+              </a:rPr>
+              <a:t>Magnet </a:t>
+            </a:r>
+            <a:r>
+              <a:rPr lang="en-US" sz="1250" dirty="0" err="1">
+                <a:solidFill>
+                  <a:srgbClr val="1C2B42"/>
+                </a:solidFill>
+                <a:latin typeface="Calibri" pitchFamily="34" charset="0"/>
+                <a:ea typeface="Calibri" pitchFamily="34" charset="-122"/>
+                <a:cs typeface="Calibri" pitchFamily="34" charset="-120"/>
+              </a:rPr>
+              <a:t>Griffeye</a:t>
+            </a:r>
+            <a:r>
+              <a:rPr lang="en-US" sz="1250" dirty="0">
+                <a:solidFill>
+                  <a:srgbClr val="1C2B42"/>
+                </a:solidFill>
+                <a:latin typeface="Calibri" pitchFamily="34" charset="0"/>
+                <a:ea typeface="Calibri" pitchFamily="34" charset="-122"/>
+                <a:cs typeface="Calibri" pitchFamily="34" charset="-120"/>
+              </a:rPr>
+              <a:t> x64 26.2.108 / T3K CORE 1.18.0</a:t>
+            </a:r>
             <a:endParaRPr lang="en-US" sz="1250" dirty="0"/>
           </a:p>
         </p:txBody>
@@ -14941,7 +15173,7 @@
             </a:avLst>
           </a:prstGeom>
           <a:solidFill>
-            <a:srgbClr val="0A1F3D"/>
+            <a:schemeClr val="bg2"/>
           </a:solidFill>
           <a:ln/>
           <a:effectLst>
@@ -15010,9 +15242,6 @@
             </a:pPr>
             <a:r>
               <a:rPr lang="en-US" sz="1300" b="1" dirty="0">
-                <a:solidFill>
-                  <a:srgbClr val="FFFFFF"/>
-                </a:solidFill>
                 <a:latin typeface="Calibri" pitchFamily="34" charset="0"/>
                 <a:ea typeface="Calibri" pitchFamily="34" charset="-122"/>
                 <a:cs typeface="Calibri" pitchFamily="34" charset="-120"/>
@@ -16837,7 +17066,7 @@
                 <a:ea typeface="Calibri" pitchFamily="34" charset="-122"/>
                 <a:cs typeface="Calibri" pitchFamily="34" charset="-120"/>
               </a:rPr>
-              <a:t>FGSM (baseline)</a:t>
+              <a:t>FGSM Iterative gradient-based attacks</a:t>
             </a:r>
             <a:endParaRPr lang="en-US" sz="1250" dirty="0"/>
           </a:p>
@@ -16858,7 +17087,7 @@
                 <a:ea typeface="Calibri" pitchFamily="34" charset="-122"/>
                 <a:cs typeface="Calibri" pitchFamily="34" charset="-120"/>
               </a:rPr>
-              <a:t>Iterative gradient-based attacks</a:t>
+              <a:t>One-pixel attack</a:t>
             </a:r>
             <a:endParaRPr lang="en-US" sz="1250" dirty="0"/>
           </a:p>
@@ -16879,9 +17108,8 @@
                 <a:ea typeface="Calibri" pitchFamily="34" charset="-122"/>
                 <a:cs typeface="Calibri" pitchFamily="34" charset="-120"/>
               </a:rPr>
-              <a:t>Sparse / one-pixel family</a:t>
-            </a:r>
-            <a:endParaRPr lang="en-US" sz="1250" dirty="0"/>
+              <a:t>Sigma Zero Attack</a:t>
+            </a:r>
           </a:p>
           <a:p>
             <a:pPr marL="342900" indent="-342900">
@@ -16900,9 +17128,25 @@
                 <a:ea typeface="Calibri" pitchFamily="34" charset="-122"/>
                 <a:cs typeface="Calibri" pitchFamily="34" charset="-120"/>
               </a:rPr>
-              <a:t>Untargeted</a:t>
-            </a:r>
-            <a:endParaRPr lang="en-US" sz="1250" dirty="0"/>
+              <a:t>Super Deel Fool</a:t>
+            </a:r>
+          </a:p>
+          <a:p>
+            <a:pPr marL="342900" indent="-342900">
+              <a:spcAft>
+                <a:spcPts val="600"/>
+              </a:spcAft>
+              <a:buSzPct val="100000"/>
+              <a:buChar char="–"/>
+            </a:pPr>
+            <a:r>
+              <a:rPr lang="en-US" sz="1250" dirty="0"/>
+              <a:t>Color Shift </a:t>
+            </a:r>
+            <a:r>
+              <a:rPr lang="en-US" sz="1250" b="1" dirty="0"/>
+              <a:t>*</a:t>
+            </a:r>
           </a:p>
         </p:txBody>
       </p:sp>
@@ -17108,6 +17352,28 @@
               <a:buChar char="–"/>
             </a:pPr>
             <a:r>
+              <a:rPr lang="it-IT" sz="1250" dirty="0" err="1">
+                <a:solidFill>
+                  <a:srgbClr val="1C2B42"/>
+                </a:solidFill>
+                <a:latin typeface="Calibri" pitchFamily="34" charset="0"/>
+                <a:ea typeface="Calibri" pitchFamily="34" charset="-122"/>
+                <a:cs typeface="Calibri" pitchFamily="34" charset="-120"/>
+              </a:rPr>
+              <a:t>Gaussian</a:t>
+            </a:r>
+            <a:r>
+              <a:rPr lang="it-IT" sz="1250" dirty="0">
+                <a:solidFill>
+                  <a:srgbClr val="1C2B42"/>
+                </a:solidFill>
+                <a:latin typeface="Calibri" pitchFamily="34" charset="0"/>
+                <a:ea typeface="Calibri" pitchFamily="34" charset="-122"/>
+                <a:cs typeface="Calibri" pitchFamily="34" charset="-120"/>
+              </a:rPr>
+              <a:t> Blur</a:t>
+            </a:r>
+            <a:r>
               <a:rPr lang="en-US" sz="1250" dirty="0">
                 <a:solidFill>
                   <a:srgbClr val="1C2B42"/>
@@ -17116,7 +17382,7 @@
                 <a:ea typeface="Calibri" pitchFamily="34" charset="-122"/>
                 <a:cs typeface="Calibri" pitchFamily="34" charset="-120"/>
               </a:rPr>
-              <a:t>Blur / sharpen</a:t>
+              <a:t> / sharpen</a:t>
             </a:r>
             <a:endParaRPr lang="en-US" sz="1250" dirty="0"/>
           </a:p>
@@ -17137,7 +17403,7 @@
                 <a:ea typeface="Calibri" pitchFamily="34" charset="-122"/>
                 <a:cs typeface="Calibri" pitchFamily="34" charset="-120"/>
               </a:rPr>
-              <a:t>Noise</a:t>
+              <a:t>Histogram Modification</a:t>
             </a:r>
             <a:endParaRPr lang="en-US" sz="1250" dirty="0"/>
           </a:p>
@@ -17158,7 +17424,7 @@
                 <a:ea typeface="Calibri" pitchFamily="34" charset="-122"/>
                 <a:cs typeface="Calibri" pitchFamily="34" charset="-120"/>
               </a:rPr>
-              <a:t>Color shift</a:t>
+              <a:t>Contrast Stretching</a:t>
             </a:r>
             <a:endParaRPr lang="en-US" sz="1250" dirty="0"/>
           </a:p>
@@ -17493,6 +17759,61 @@
                 <a:cs typeface="Calibri" pitchFamily="34" charset="-120"/>
               </a:rPr>
               <a:t>8</a:t>
+            </a:r>
+            <a:endParaRPr lang="en-US" sz="900" dirty="0"/>
+          </a:p>
+        </p:txBody>
+      </p:sp>
+      <p:sp>
+        <p:nvSpPr>
+          <p:cNvPr id="23" name="Text 16">
+            <a:extLst>
+              <a:ext uri="{FF2B5EF4-FFF2-40B4-BE49-F238E27FC236}">
+                <a16:creationId xmlns:a16="http://schemas.microsoft.com/office/drawing/2014/main" id="{A9A4C516-2E63-DE9C-09F0-8463B5BEB1D1}"/>
+              </a:ext>
+            </a:extLst>
+          </p:cNvPr>
+          <p:cNvSpPr/>
+          <p:nvPr/>
+        </p:nvSpPr>
+        <p:spPr>
+          <a:xfrm>
+            <a:off x="594360" y="4404846"/>
+            <a:ext cx="7680960" cy="548640"/>
+          </a:xfrm>
+          <a:prstGeom prst="rect">
+            <a:avLst/>
+          </a:prstGeom>
+          <a:noFill/>
+          <a:ln/>
+        </p:spPr>
+        <p:txBody>
+          <a:bodyPr wrap="square" lIns="0" tIns="0" rIns="0" bIns="0" rtlCol="0" anchor="ctr"/>
+          <a:lstStyle/>
+          <a:p>
+            <a:r>
+              <a:rPr lang="en-US" sz="1200" b="1" dirty="0"/>
+              <a:t>* </a:t>
+            </a:r>
+            <a:r>
+              <a:rPr lang="it-IT" sz="900" dirty="0" err="1"/>
+              <a:t>Adversarial</a:t>
+            </a:r>
+            <a:r>
+              <a:rPr lang="it-IT" sz="900" dirty="0"/>
+              <a:t>-style </a:t>
+            </a:r>
+            <a:r>
+              <a:rPr lang="it-IT" sz="900" dirty="0" err="1"/>
+              <a:t>attack</a:t>
+            </a:r>
+            <a:r>
+              <a:rPr lang="it-IT" sz="900" dirty="0"/>
+              <a:t>  - model-</a:t>
+            </a:r>
+            <a:r>
+              <a:rPr lang="it-IT" sz="900" dirty="0" err="1"/>
+              <a:t>agnostic</a:t>
             </a:r>
             <a:endParaRPr lang="en-US" sz="900" dirty="0"/>
           </a:p>

--- a/docs/slides/Molinario_Thesis_Defense.pptx
+++ b/docs/slides/Molinario_Thesis_Defense.pptx
@@ -5119,7 +5119,7 @@
                 <a:ea typeface="Calibri" pitchFamily="34" charset="-122"/>
                 <a:cs typeface="Calibri" pitchFamily="34" charset="-120"/>
               </a:rPr>
-              <a:t> / T3K</a:t>
+              <a:t> / T3K CORE</a:t>
             </a:r>
             <a:endParaRPr lang="en-US" sz="1200" dirty="0"/>
           </a:p>
@@ -6629,7 +6629,7 @@
                 <a:ea typeface="Calibri" pitchFamily="34" charset="-122"/>
                 <a:cs typeface="Calibri" pitchFamily="34" charset="-120"/>
               </a:rPr>
-              <a:t>Under the tested conditions:</a:t>
+              <a:t>Evidence observed under the FAIR-Lab protocol</a:t>
             </a:r>
             <a:endParaRPr lang="en-US" sz="1250" dirty="0"/>
           </a:p>
@@ -6802,7 +6802,7 @@
                 <a:ea typeface="Calibri" pitchFamily="34" charset="-122"/>
                 <a:cs typeface="Calibri" pitchFamily="34" charset="-120"/>
               </a:rPr>
-              <a:t>Clean performance does not fully predict robustness.</a:t>
+              <a:t>High clean accuracy did not prevent severe degradation under selected adversarial attacks.</a:t>
             </a:r>
             <a:endParaRPr lang="en-US" sz="930" dirty="0"/>
           </a:p>
@@ -6975,7 +6975,7 @@
                 <a:ea typeface="Calibri" pitchFamily="34" charset="-122"/>
                 <a:cs typeface="Calibri" pitchFamily="34" charset="-120"/>
               </a:rPr>
-              <a:t>OOD inputs can expose unexpected classification behavior.</a:t>
+              <a:t>OOD weapon-flag rates were non-zero across all black-box tools.</a:t>
             </a:r>
             <a:endParaRPr lang="en-US" sz="930" dirty="0"/>
           </a:p>
@@ -7098,7 +7098,7 @@
               <a:buNone/>
             </a:pPr>
             <a:r>
-              <a:rPr lang="en-US" sz="1100" b="1" dirty="0">
+              <a:rPr lang="en-US" sz="1100" b="1">
                 <a:solidFill>
                   <a:srgbClr val="0A1F3D"/>
                 </a:solidFill>
@@ -7106,7 +7106,7 @@
                 <a:ea typeface="Cambria" pitchFamily="34" charset="-122"/>
                 <a:cs typeface="Cambria" pitchFamily="34" charset="-120"/>
               </a:rPr>
-              <a:t>Perturbations Matter</a:t>
+              <a:t>Manipulations Matter</a:t>
             </a:r>
             <a:endParaRPr lang="en-US" sz="1100" dirty="0"/>
           </a:p>
@@ -7148,7 +7148,7 @@
                 <a:ea typeface="Calibri" pitchFamily="34" charset="-122"/>
                 <a:cs typeface="Calibri" pitchFamily="34" charset="-120"/>
               </a:rPr>
-              <a:t>Perturbations can induce classification errors or confidence shifts.</a:t>
+              <a:t>Adversarial attacks produced stronger degradation than most anti-forensic transformations.</a:t>
             </a:r>
             <a:endParaRPr lang="en-US" sz="930" dirty="0"/>
           </a:p>
@@ -7321,7 +7321,7 @@
                 <a:ea typeface="Calibri" pitchFamily="34" charset="-122"/>
                 <a:cs typeface="Calibri" pitchFamily="34" charset="-120"/>
               </a:rPr>
-              <a:t>Black-box tools require conservative interpretation.</a:t>
+              <a:t>Only observable exports can be evaluated; labels must be normalized conservatively.</a:t>
             </a:r>
             <a:endParaRPr lang="en-US" sz="930" dirty="0"/>
           </a:p>
@@ -7494,7 +7494,7 @@
                 <a:ea typeface="Calibri" pitchFamily="34" charset="-122"/>
                 <a:cs typeface="Calibri" pitchFamily="34" charset="-120"/>
               </a:rPr>
-              <a:t>Traceability is essential for reproducible forensic assessment.</a:t>
+              <a:t>Blind input, separated ground truth, and preserved unknowns support reproducibility.</a:t>
             </a:r>
             <a:endParaRPr lang="en-US" sz="930" dirty="0"/>
           </a:p>
@@ -7533,7 +7533,7 @@
                 <a:ea typeface="Calibri" pitchFamily="34" charset="-122"/>
                 <a:cs typeface="Calibri" pitchFamily="34" charset="-120"/>
               </a:rPr>
-              <a:t>High clean performance is not sufficient for forensic reliability under manipulated inputs.</a:t>
+              <a:t>High clean performance is useful, but not sufficient for forensic reliability under manipulated and out-of-distribution inputs.</a:t>
             </a:r>
             <a:endParaRPr lang="en-US" sz="1250" dirty="0"/>
           </a:p>
@@ -14609,7 +14609,7 @@
                 <a:ea typeface="Cambria" pitchFamily="34" charset="-122"/>
                 <a:cs typeface="Cambria" pitchFamily="34" charset="-120"/>
               </a:rPr>
-              <a:t>Frozen Evaluation Bundle</a:t>
+              <a:t>Frozen Dataset and Evaluation Branches</a:t>
             </a:r>
             <a:endParaRPr lang="en-US" sz="2700" dirty="0"/>
           </a:p>
@@ -15589,68 +15589,6 @@
       </p:sp>
       <p:sp>
         <p:nvSpPr>
-          <p:cNvPr id="7" name="Text 5"/>
-          <p:cNvSpPr/>
-          <p:nvPr/>
-        </p:nvSpPr>
-        <p:spPr>
-          <a:xfrm>
-            <a:off x="388620" y="2167128"/>
-            <a:ext cx="1188720" cy="1097280"/>
-          </a:xfrm>
-          <a:prstGeom prst="rect">
-            <a:avLst/>
-          </a:prstGeom>
-          <a:noFill/>
-          <a:ln/>
-        </p:spPr>
-        <p:txBody>
-          <a:bodyPr wrap="square" lIns="0" tIns="0" rIns="0" bIns="0" rtlCol="0" anchor="t"/>
-          <a:lstStyle/>
-          <a:p>
-            <a:pPr marL="0" indent="0" algn="ctr">
-              <a:lnSpc>
-                <a:spcPct val="115000"/>
-              </a:lnSpc>
-              <a:buNone/>
-            </a:pPr>
-            <a:r>
-              <a:rPr lang="en-US" sz="1000" b="1" dirty="0">
-                <a:solidFill>
-                  <a:srgbClr val="1C2B42"/>
-                </a:solidFill>
-                <a:latin typeface="Calibri" pitchFamily="34" charset="0"/>
-                <a:ea typeface="Calibri" pitchFamily="34" charset="-122"/>
-                <a:cs typeface="Calibri" pitchFamily="34" charset="-120"/>
-              </a:rPr>
-              <a:t>Build frozen</a:t>
-            </a:r>
-            <a:endParaRPr lang="en-US" sz="1000" dirty="0"/>
-          </a:p>
-          <a:p>
-            <a:pPr marL="0" indent="0" algn="ctr">
-              <a:lnSpc>
-                <a:spcPct val="115000"/>
-              </a:lnSpc>
-              <a:buNone/>
-            </a:pPr>
-            <a:r>
-              <a:rPr lang="en-US" sz="1000" b="1" dirty="0">
-                <a:solidFill>
-                  <a:srgbClr val="1C2B42"/>
-                </a:solidFill>
-                <a:latin typeface="Calibri" pitchFamily="34" charset="0"/>
-                <a:ea typeface="Calibri" pitchFamily="34" charset="-122"/>
-                <a:cs typeface="Calibri" pitchFamily="34" charset="-120"/>
-              </a:rPr>
-              <a:t>evaluation bundle</a:t>
-            </a:r>
-            <a:endParaRPr lang="en-US" sz="1000" dirty="0"/>
-          </a:p>
-        </p:txBody>
-      </p:sp>
-      <p:sp>
-        <p:nvSpPr>
           <p:cNvPr id="8" name="Shape 6"/>
           <p:cNvSpPr/>
           <p:nvPr/>
@@ -16183,7 +16121,7 @@
         </p:nvSpPr>
         <p:spPr>
           <a:xfrm>
-            <a:off x="4695444" y="2167128"/>
+            <a:off x="359941" y="2185416"/>
             <a:ext cx="1188720" cy="1097280"/>
           </a:xfrm>
           <a:prstGeom prst="rect">
@@ -16784,6 +16722,68 @@
               <a:t>7</a:t>
             </a:r>
             <a:endParaRPr lang="en-US" sz="900" dirty="0"/>
+          </a:p>
+        </p:txBody>
+      </p:sp>
+      <p:sp>
+        <p:nvSpPr>
+          <p:cNvPr id="7" name="Text 5"/>
+          <p:cNvSpPr/>
+          <p:nvPr/>
+        </p:nvSpPr>
+        <p:spPr>
+          <a:xfrm>
+            <a:off x="4640580" y="2170176"/>
+            <a:ext cx="1188720" cy="1097280"/>
+          </a:xfrm>
+          <a:prstGeom prst="rect">
+            <a:avLst/>
+          </a:prstGeom>
+          <a:noFill/>
+          <a:ln/>
+        </p:spPr>
+        <p:txBody>
+          <a:bodyPr wrap="square" lIns="0" tIns="0" rIns="0" bIns="0" rtlCol="0" anchor="t"/>
+          <a:lstStyle/>
+          <a:p>
+            <a:pPr marL="0" indent="0" algn="ctr">
+              <a:lnSpc>
+                <a:spcPct val="115000"/>
+              </a:lnSpc>
+              <a:buNone/>
+            </a:pPr>
+            <a:r>
+              <a:rPr lang="en-US" sz="1000" b="1" dirty="0">
+                <a:solidFill>
+                  <a:srgbClr val="1C2B42"/>
+                </a:solidFill>
+                <a:latin typeface="Calibri" pitchFamily="34" charset="0"/>
+                <a:ea typeface="Calibri" pitchFamily="34" charset="-122"/>
+                <a:cs typeface="Calibri" pitchFamily="34" charset="-120"/>
+              </a:rPr>
+              <a:t>Build frozen</a:t>
+            </a:r>
+            <a:endParaRPr lang="en-US" sz="1000" dirty="0"/>
+          </a:p>
+          <a:p>
+            <a:pPr marL="0" indent="0" algn="ctr">
+              <a:lnSpc>
+                <a:spcPct val="115000"/>
+              </a:lnSpc>
+              <a:buNone/>
+            </a:pPr>
+            <a:r>
+              <a:rPr lang="en-US" sz="1000" b="1" dirty="0">
+                <a:solidFill>
+                  <a:srgbClr val="1C2B42"/>
+                </a:solidFill>
+                <a:latin typeface="Calibri" pitchFamily="34" charset="0"/>
+                <a:ea typeface="Calibri" pitchFamily="34" charset="-122"/>
+                <a:cs typeface="Calibri" pitchFamily="34" charset="-120"/>
+              </a:rPr>
+              <a:t>evaluation bundle</a:t>
+            </a:r>
+            <a:endParaRPr lang="en-US" sz="1000" dirty="0"/>
           </a:p>
         </p:txBody>
       </p:sp>
@@ -17066,7 +17066,7 @@
                 <a:ea typeface="Calibri" pitchFamily="34" charset="-122"/>
                 <a:cs typeface="Calibri" pitchFamily="34" charset="-120"/>
               </a:rPr>
-              <a:t>FGSM Iterative gradient-based attacks</a:t>
+              <a:t>FGSM</a:t>
             </a:r>
             <a:endParaRPr lang="en-US" sz="1250" dirty="0"/>
           </a:p>
@@ -17382,7 +17382,7 @@
                 <a:ea typeface="Calibri" pitchFamily="34" charset="-122"/>
                 <a:cs typeface="Calibri" pitchFamily="34" charset="-120"/>
               </a:rPr>
-              <a:t> / sharpen</a:t>
+              <a:t> </a:t>
             </a:r>
             <a:endParaRPr lang="en-US" sz="1250" dirty="0"/>
           </a:p>
